--- a/docs/presentation/Orbit_Observers_Pitch.pptx
+++ b/docs/presentation/Orbit_Observers_Pitch.pptx
@@ -18,9 +18,10 @@
     <p:sldId id="266" r:id="rId12"/>
     <p:sldId id="267" r:id="rId13"/>
     <p:sldId id="268" r:id="rId14"/>
+    <p:sldId id="269" r:id="rId15"/>
   </p:sldIdLst>
   <p:notesMasterIdLst>
-    <p:notesMasterId r:id="rId15"/>
+    <p:notesMasterId r:id="rId16"/>
   </p:notesMasterIdLst>
   <p:sldSz cx="12192000" cy="6858000"/>
   <p:notesSz cx="6858000" cy="12192000"/>
@@ -119,41 +120,42 @@
   <p:extLst>
     <p:ext uri="{521415D9-36F7-43E2-AB2F-B90AF26B5E84}">
       <p14:sectionLst xmlns:p14="http://schemas.microsoft.com/office/powerpoint/2010/main">
-        <p14:section name="Open" id="{c4f6b686-1909-3a9b-f542-e898b5c4e301}">
+        <p14:section name="Open" id="{f690cfa3-cd19-d501-1b0e-193637cc467a}">
           <p14:sldIdLst>
             <p14:sldId id="256"/>
           </p14:sldIdLst>
         </p14:section>
-        <p14:section name="Serviceability" id="{eef3a9b2-ee1e-3334-f82b-5492ed46c79d}">
+        <p14:section name="Serviceability" id="{d5cb0778-873b-3b71-e99a-6f249b37f1cc}">
           <p14:sldIdLst>
             <p14:sldId id="257"/>
             <p14:sldId id="258"/>
             <p14:sldId id="259"/>
           </p14:sldIdLst>
         </p14:section>
-        <p14:section name="Technical" id="{587a4499-a236-2822-340c-86b8c790acf1}">
+        <p14:section name="Technical" id="{d4318066-1552-b912-8f5b-333cbdc32a84}">
           <p14:sldIdLst>
             <p14:sldId id="260"/>
             <p14:sldId id="261"/>
+            <p14:sldId id="262"/>
           </p14:sldIdLst>
         </p14:section>
-        <p14:section name="Business" id="{16cf09c0-b92b-252b-468c-f97c60d685d1}">
+        <p14:section name="Business" id="{a98a2ac3-f443-3388-8cbf-bc073dd5d7e3}">
           <p14:sldIdLst>
-            <p14:sldId id="262"/>
             <p14:sldId id="263"/>
             <p14:sldId id="264"/>
+            <p14:sldId id="265"/>
           </p14:sldIdLst>
         </p14:section>
-        <p14:section name="Implementation" id="{ca041136-ccc4-90ca-9683-6aa6a4cfac28}">
+        <p14:section name="Implementation" id="{d84456bf-1dc4-45a1-aebd-f32b1dcee747}">
           <p14:sldIdLst>
-            <p14:sldId id="265"/>
             <p14:sldId id="266"/>
             <p14:sldId id="267"/>
+            <p14:sldId id="268"/>
           </p14:sldIdLst>
         </p14:section>
-        <p14:section name="Appendix" id="{a74b382e-c848-020a-0003-bde0a035aed5}">
+        <p14:section name="Appendix" id="{6ecbeac0-b2ef-6822-0a51-898c6950cd59}">
           <p14:sldIdLst>
-            <p14:sldId id="268"/>
+            <p14:sldId id="269"/>
           </p14:sldIdLst>
         </p14:section>
       </p14:sectionLst>
@@ -1381,7 +1383,7 @@
           <a:p>
             <a:r>
               <a:rPr lang="en-US" dirty="0"/>
-              <a:t>3:50. Next is a ground demonstration: bench-test the beacon, validate a contact model, run the HIL rig. A draft budget is about 770 thousand euros, assumptions we want ClearSpace to challenge. Budget table: docs/PRESENTATION_PACK.md section 5.2.</a:t>
+              <a:t>Competitor and standards lists are from background knowledge and must be sourced before submission. A patent search is still open.</a:t>
             </a:r>
             <a:endParaRPr lang="en-US" dirty="0"/>
           </a:p>
@@ -1469,7 +1471,7 @@
           <a:p>
             <a:r>
               <a:rPr lang="en-US" dirty="0"/>
-              <a:t>4:30. Three asks: confirm the reference client and failure cases, point us to failure statistics, agree the ground-demo success criteria.</a:t>
+              <a:t>3:50. Next is a ground demonstration: bench-test the beacon, validate a contact model, run the HIL rig. A draft budget is about 770 thousand euros, assumptions we want ClearSpace to challenge. Budget table: docs/PRESENTATION_PACK.md section 5.2.</a:t>
             </a:r>
             <a:endParaRPr lang="en-US" dirty="0"/>
           </a:p>
@@ -1557,7 +1559,7 @@
           <a:p>
             <a:r>
               <a:rPr lang="en-US" dirty="0"/>
-              <a:t>4:50. Minimum preparation. Safe when degraded. A scalable roadmap.</a:t>
+              <a:t>4:30. Three asks: confirm the reference client and failure cases, point us to failure statistics, agree the ground-demo success criteria.</a:t>
             </a:r>
             <a:endParaRPr lang="en-US" dirty="0"/>
           </a:p>
@@ -1645,7 +1647,7 @@
           <a:p>
             <a:r>
               <a:rPr lang="en-US" dirty="0"/>
-              <a:t/>
+              <a:t>4:50. Minimum preparation. Safe when degraded. A scalable roadmap.</a:t>
             </a:r>
             <a:endParaRPr lang="en-US" dirty="0"/>
           </a:p>
@@ -1669,6 +1671,94 @@
             <a:fld id="{F7021451-1387-4CA6-816F-3879F97B5CBC}" type="slidenum">
               <a:rPr lang="en-US"/>
               <a:t>13</a:t>
+            </a:fld>
+            <a:endParaRPr lang="en-US"/>
+          </a:p>
+        </p:txBody>
+      </p:sp>
+    </p:spTree>
+    <p:extLst>
+      <p:ext uri="{BB962C8B-B14F-4D97-AF65-F5344CB8AC3E}">
+        <p14:creationId xmlns:p14="http://schemas.microsoft.com/office/powerpoint/2010/main" val="1024086991"/>
+      </p:ext>
+    </p:extLst>
+  </p:cSld>
+  <p:clrMapOvr>
+    <a:masterClrMapping/>
+  </p:clrMapOvr>
+</p:notes>
+</file>
+
+<file path=ppt/notesSlides/notesSlide14.xml><?xml version="1.0" encoding="utf-8"?>
+<p:notes xmlns:a="http://schemas.openxmlformats.org/drawingml/2006/main" xmlns:r="http://schemas.openxmlformats.org/officeDocument/2006/relationships" xmlns:p="http://schemas.openxmlformats.org/presentationml/2006/main">
+  <p:cSld>
+    <p:spTree>
+      <p:nvGrpSpPr>
+        <p:cNvPr id="1" name=""/>
+        <p:cNvGrpSpPr/>
+        <p:nvPr/>
+      </p:nvGrpSpPr>
+      <p:grpSpPr>
+        <a:xfrm>
+          <a:off x="0" y="0"/>
+          <a:ext cx="0" cy="0"/>
+          <a:chOff x="0" y="0"/>
+          <a:chExt cx="0" cy="0"/>
+        </a:xfrm>
+      </p:grpSpPr>
+      <p:sp>
+        <p:nvSpPr>
+          <p:cNvPr id="2" name="Slide Image Placeholder 1"/>
+          <p:cNvSpPr>
+            <a:spLocks noGrp="1" noRot="1" noChangeAspect="1"/>
+          </p:cNvSpPr>
+          <p:nvPr>
+            <p:ph type="sldImg"/>
+          </p:nvPr>
+        </p:nvSpPr>
+        <p:spPr/>
+      </p:sp>
+      <p:sp>
+        <p:nvSpPr>
+          <p:cNvPr id="3" name="Notes Placeholder 2"/>
+          <p:cNvSpPr>
+            <a:spLocks noGrp="1"/>
+          </p:cNvSpPr>
+          <p:nvPr>
+            <p:ph type="body" idx="1"/>
+          </p:nvPr>
+        </p:nvSpPr>
+        <p:spPr/>
+        <p:txBody>
+          <a:bodyPr/>
+          <a:lstStyle/>
+          <a:p>
+            <a:r>
+              <a:rPr lang="en-US" dirty="0"/>
+              <a:t/>
+            </a:r>
+            <a:endParaRPr lang="en-US" dirty="0"/>
+          </a:p>
+        </p:txBody>
+      </p:sp>
+      <p:sp>
+        <p:nvSpPr>
+          <p:cNvPr id="4" name="Slide Number Placeholder 3"/>
+          <p:cNvSpPr>
+            <a:spLocks noGrp="1"/>
+          </p:cNvSpPr>
+          <p:nvPr>
+            <p:ph type="sldNum" sz="quarter" idx="10"/>
+          </p:nvPr>
+        </p:nvSpPr>
+        <p:spPr/>
+        <p:txBody>
+          <a:bodyPr/>
+          <a:lstStyle/>
+          <a:p>
+            <a:fld id="{F7021451-1387-4CA6-816F-3879F97B5CBC}" type="slidenum">
+              <a:rPr lang="en-US"/>
+              <a:t>14</a:t>
             </a:fld>
             <a:endParaRPr lang="en-US"/>
           </a:p>
@@ -2085,7 +2175,7 @@
           <a:p>
             <a:r>
               <a:rPr lang="en-US" dirty="0"/>
-              <a:t>2:45. 74 tests, reproducible campaigns on HPC, zero keep-out violations in 6,140 runs. This is a model: no contact physics, no hardware yet, and we say so on every slide.</a:t>
+              <a:t>Reference diagram from the team. It confirms our three layers and adds a client health monitoring system, power management, a utility interface panel and an upgrade port. We cover navigation aids, servicer GNC and abort logic, and the ground platform; the beacon, IOS and health monitoring are partial; utility and fluid transfer, the upgrade port and robotic servicing are next. Full table: docs/PRESENTATION_PACK.md section 10.</a:t>
             </a:r>
             <a:endParaRPr lang="en-US" dirty="0"/>
           </a:p>
@@ -2173,7 +2263,7 @@
           <a:p>
             <a:r>
               <a:rPr lang="en-US" dirty="0"/>
-              <a:t>3:15. Buyers are satellite makers and operators who add a tier at build time, and servicers who get more successful visits per vehicle. All costs here are assumptions.</a:t>
+              <a:t>2:45. 74 tests, reproducible campaigns on HPC, zero keep-out violations in 6,140 runs. This is a model: no contact physics, no hardware yet, and we say so on every slide.</a:t>
             </a:r>
             <a:endParaRPr lang="en-US" dirty="0"/>
           </a:p>
@@ -2261,7 +2351,7 @@
           <a:p>
             <a:r>
               <a:rPr lang="en-US" dirty="0"/>
-              <a:t>With our assumed inputs, markers repay their cost if even 0.6 percent of clients ever need rescue. The beacon and IOS mode pay off where tumble is high or where data beyond approach matters. Source: docs/ECONOMICS_MODEL.md.</a:t>
+              <a:t>3:15. Buyers are satellite makers and operators who add a tier at build time, and servicers who get more successful visits per vehicle. All costs here are assumptions.</a:t>
             </a:r>
             <a:endParaRPr lang="en-US" dirty="0"/>
           </a:p>
@@ -2349,7 +2439,7 @@
           <a:p>
             <a:r>
               <a:rPr lang="en-US" dirty="0"/>
-              <a:t>Competitor and standards lists are from background knowledge and must be sourced before submission. A patent search is still open.</a:t>
+              <a:t>With our assumed inputs, markers repay their cost if even 0.6 percent of clients ever need rescue. The beacon and IOS mode pay off where tumble is high or where data beyond approach matters. Source: docs/ECONOMICS_MODEL.md.</a:t>
             </a:r>
             <a:endParaRPr lang="en-US" dirty="0"/>
           </a:p>
@@ -3266,7 +3356,7 @@
                   <a:schemeClr val="bg1"/>
                 </a:solidFill>
               </a:rPr>
-              <a:t>Next: a ground demonstration with agreed criteria</a:t>
+              <a:t>Others fix the servicer; we specify the client</a:t>
             </a:r>
             <a:endParaRPr lang="en-US" sz="3200" dirty="0"/>
           </a:p>
@@ -3274,18 +3364,18 @@
       </p:sp>
       <p:sp>
         <p:nvSpPr>
-          <p:cNvPr id="3" name="Stage Study"/>
+          <p:cNvPr id="3" name="Competition"/>
           <p:cNvSpPr/>
           <p:nvPr/>
         </p:nvSpPr>
         <p:spPr>
           <a:xfrm>
             <a:off x="548640" y="1463040"/>
-            <a:ext cx="2651760" cy="2286000"/>
+            <a:ext cx="5394960" cy="4206240"/>
           </a:xfrm>
           <a:prstGeom prst="roundRect">
             <a:avLst>
-              <a:gd name="adj" fmla="val 3200"/>
+              <a:gd name="adj" fmla="val 1739"/>
             </a:avLst>
           </a:prstGeom>
           <a:solidFill>
@@ -3307,8 +3397,8 @@
         </p:nvSpPr>
         <p:spPr>
           <a:xfrm>
-            <a:off x="777240" y="1645920"/>
-            <a:ext cx="2194560" cy="274320"/>
+            <a:off x="822960" y="1645920"/>
+            <a:ext cx="4846320" cy="365760"/>
           </a:xfrm>
           <a:prstGeom prst="rect">
             <a:avLst/>
@@ -3324,14 +3414,14 @@
               <a:buNone/>
             </a:pPr>
             <a:r>
-              <a:rPr lang="en-US" sz="1400" dirty="0">
-                <a:solidFill>
-                  <a:schemeClr val="bg2"/>
-                </a:solidFill>
-              </a:rPr>
-              <a:t>now</a:t>
-            </a:r>
-            <a:endParaRPr lang="en-US" sz="1400" dirty="0"/>
+              <a:rPr lang="en-US" sz="2000" b="1" dirty="0">
+                <a:solidFill>
+                  <a:schemeClr val="accent1"/>
+                </a:solidFill>
+              </a:rPr>
+              <a:t>Existing offers [to verify]</a:t>
+            </a:r>
+            <a:endParaRPr lang="en-US" sz="2000" dirty="0"/>
           </a:p>
         </p:txBody>
       </p:sp>
@@ -3343,8 +3433,8 @@
         </p:nvSpPr>
         <p:spPr>
           <a:xfrm>
-            <a:off x="777240" y="1965960"/>
-            <a:ext cx="2194560" cy="457200"/>
+            <a:off x="822960" y="2194560"/>
+            <a:ext cx="4846320" cy="3200400"/>
           </a:xfrm>
           <a:prstGeom prst="rect">
             <a:avLst/>
@@ -3356,206 +3446,111 @@
           <a:bodyPr wrap="square" lIns="0" tIns="0" rIns="0" bIns="0" rtlCol="0" anchor="t"/>
           <a:lstStyle/>
           <a:p>
-            <a:pPr indent="0" marL="0">
-              <a:buNone/>
-            </a:pPr>
-            <a:r>
-              <a:rPr lang="en-US" sz="2200" b="1" dirty="0">
-                <a:solidFill>
-                  <a:schemeClr val="accent1"/>
-                </a:solidFill>
-              </a:rPr>
-              <a:t>Study</a:t>
-            </a:r>
-            <a:endParaRPr lang="en-US" sz="2200" dirty="0"/>
-          </a:p>
-        </p:txBody>
-      </p:sp>
-      <p:sp>
-        <p:nvSpPr>
-          <p:cNvPr id="6" name="Text 4"/>
-          <p:cNvSpPr txBox="1"/>
-          <p:nvPr/>
-        </p:nvSpPr>
-        <p:spPr>
-          <a:xfrm>
-            <a:off x="777240" y="2560320"/>
-            <a:ext cx="2194560" cy="1097280"/>
-          </a:xfrm>
-          <a:prstGeom prst="rect">
-            <a:avLst/>
-          </a:prstGeom>
-          <a:noFill/>
-          <a:ln/>
-        </p:spPr>
-        <p:txBody>
-          <a:bodyPr wrap="square" lIns="0" tIns="0" rIns="0" bIns="0" rtlCol="0" anchor="t"/>
-          <a:lstStyle/>
-          <a:p>
-            <a:pPr indent="0" marL="0">
-              <a:buNone/>
-            </a:pPr>
-            <a:r>
-              <a:rPr lang="en-US" sz="1500" dirty="0">
+            <a:pPr marL="342900" indent="-342900">
+              <a:spcAft>
+                <a:spcPts val="800"/>
+              </a:spcAft>
+              <a:buSzPct val="100000"/>
+              <a:buChar char="•"/>
+            </a:pPr>
+            <a:r>
+              <a:rPr lang="en-US" sz="1700" dirty="0">
                 <a:solidFill>
                   <a:schemeClr val="bg1"/>
                 </a:solidFill>
               </a:rPr>
-              <a:t>Envelopes, beacon and IOS concept, tier trade</a:t>
-            </a:r>
-            <a:endParaRPr lang="en-US" sz="1500" dirty="0"/>
-          </a:p>
-        </p:txBody>
-      </p:sp>
-      <p:sp>
-        <p:nvSpPr>
-          <p:cNvPr id="7" name="Stage Ground demo"/>
+              <a:t>Northrop Grumman MEV and MRV: life extension of unprepared GEO clients</a:t>
+            </a:r>
+            <a:endParaRPr lang="en-US" sz="1700" dirty="0"/>
+          </a:p>
+          <a:p>
+            <a:pPr marL="342900" indent="-342900">
+              <a:spcAft>
+                <a:spcPts val="800"/>
+              </a:spcAft>
+              <a:buSzPct val="100000"/>
+              <a:buChar char="•"/>
+            </a:pPr>
+            <a:r>
+              <a:rPr lang="en-US" sz="1700" dirty="0">
+                <a:solidFill>
+                  <a:schemeClr val="bg1"/>
+                </a:solidFill>
+              </a:rPr>
+              <a:t>Astroscale: removal, inspection, docking plate on client</a:t>
+            </a:r>
+            <a:endParaRPr lang="en-US" sz="1700" dirty="0"/>
+          </a:p>
+          <a:p>
+            <a:pPr marL="342900" indent="-342900">
+              <a:spcAft>
+                <a:spcPts val="800"/>
+              </a:spcAft>
+              <a:buSzPct val="100000"/>
+              <a:buChar char="•"/>
+            </a:pPr>
+            <a:r>
+              <a:rPr lang="en-US" sz="1700" dirty="0">
+                <a:solidFill>
+                  <a:schemeClr val="bg1"/>
+                </a:solidFill>
+              </a:rPr>
+              <a:t>Starfish Space: autonomous docking and inspection</a:t>
+            </a:r>
+            <a:endParaRPr lang="en-US" sz="1700" dirty="0"/>
+          </a:p>
+          <a:p>
+            <a:pPr marL="342900" indent="-342900">
+              <a:spcAft>
+                <a:spcPts val="800"/>
+              </a:spcAft>
+              <a:buSzPct val="100000"/>
+              <a:buChar char="•"/>
+            </a:pPr>
+            <a:r>
+              <a:rPr lang="en-US" sz="1700" dirty="0">
+                <a:solidFill>
+                  <a:schemeClr val="bg1"/>
+                </a:solidFill>
+              </a:rPr>
+              <a:t>ClearSpace: capture of defunct objects</a:t>
+            </a:r>
+            <a:endParaRPr lang="en-US" sz="1700" dirty="0"/>
+          </a:p>
+          <a:p>
+            <a:pPr marL="342900" indent="-342900">
+              <a:spcAft>
+                <a:spcPts val="800"/>
+              </a:spcAft>
+              <a:buSzPct val="100000"/>
+              <a:buChar char="•"/>
+            </a:pPr>
+            <a:r>
+              <a:rPr lang="en-US" sz="1700" dirty="0">
+                <a:solidFill>
+                  <a:schemeClr val="bg1"/>
+                </a:solidFill>
+              </a:rPr>
+              <a:t>Orbit Fab, MDA, Airbus, Thales Alenia, OHB: refuel ports, arms, interfaces</a:t>
+            </a:r>
+            <a:endParaRPr lang="en-US" sz="1700" dirty="0"/>
+          </a:p>
+        </p:txBody>
+      </p:sp>
+      <p:sp>
+        <p:nvSpPr>
+          <p:cNvPr id="6" name="Rules"/>
           <p:cNvSpPr/>
           <p:nvPr/>
         </p:nvSpPr>
         <p:spPr>
           <a:xfrm>
-            <a:off x="3355848" y="1463040"/>
-            <a:ext cx="2651760" cy="2286000"/>
+            <a:off x="6217920" y="1463040"/>
+            <a:ext cx="5422392" cy="4206240"/>
           </a:xfrm>
           <a:prstGeom prst="roundRect">
             <a:avLst>
-              <a:gd name="adj" fmla="val 3200"/>
-            </a:avLst>
-          </a:prstGeom>
-          <a:solidFill>
-            <a:schemeClr val="accent6"/>
-          </a:solidFill>
-          <a:ln w="12700">
-            <a:solidFill>
-              <a:schemeClr val="accent6"/>
-            </a:solidFill>
-            <a:prstDash val="solid"/>
-          </a:ln>
-        </p:spPr>
-      </p:sp>
-      <p:sp>
-        <p:nvSpPr>
-          <p:cNvPr id="8" name="Text 6"/>
-          <p:cNvSpPr txBox="1"/>
-          <p:nvPr/>
-        </p:nvSpPr>
-        <p:spPr>
-          <a:xfrm>
-            <a:off x="3584448" y="1645920"/>
-            <a:ext cx="2194560" cy="274320"/>
-          </a:xfrm>
-          <a:prstGeom prst="rect">
-            <a:avLst/>
-          </a:prstGeom>
-          <a:noFill/>
-          <a:ln/>
-        </p:spPr>
-        <p:txBody>
-          <a:bodyPr wrap="square" lIns="0" tIns="0" rIns="0" bIns="0" rtlCol="0" anchor="t"/>
-          <a:lstStyle/>
-          <a:p>
-            <a:pPr indent="0" marL="0">
-              <a:buNone/>
-            </a:pPr>
-            <a:r>
-              <a:rPr lang="en-US" sz="1400" dirty="0">
-                <a:solidFill>
-                  <a:schemeClr val="bg2"/>
-                </a:solidFill>
-              </a:rPr>
-              <a:t>next</a:t>
-            </a:r>
-            <a:endParaRPr lang="en-US" sz="1400" dirty="0"/>
-          </a:p>
-        </p:txBody>
-      </p:sp>
-      <p:sp>
-        <p:nvSpPr>
-          <p:cNvPr id="9" name="Text 7"/>
-          <p:cNvSpPr txBox="1"/>
-          <p:nvPr/>
-        </p:nvSpPr>
-        <p:spPr>
-          <a:xfrm>
-            <a:off x="3584448" y="1965960"/>
-            <a:ext cx="2194560" cy="457200"/>
-          </a:xfrm>
-          <a:prstGeom prst="rect">
-            <a:avLst/>
-          </a:prstGeom>
-          <a:noFill/>
-          <a:ln/>
-        </p:spPr>
-        <p:txBody>
-          <a:bodyPr wrap="square" lIns="0" tIns="0" rIns="0" bIns="0" rtlCol="0" anchor="t"/>
-          <a:lstStyle/>
-          <a:p>
-            <a:pPr indent="0" marL="0">
-              <a:buNone/>
-            </a:pPr>
-            <a:r>
-              <a:rPr lang="en-US" sz="2200" b="1" dirty="0">
-                <a:solidFill>
-                  <a:schemeClr val="accent1"/>
-                </a:solidFill>
-              </a:rPr>
-              <a:t>Ground demo</a:t>
-            </a:r>
-            <a:endParaRPr lang="en-US" sz="2200" dirty="0"/>
-          </a:p>
-        </p:txBody>
-      </p:sp>
-      <p:sp>
-        <p:nvSpPr>
-          <p:cNvPr id="10" name="Text 8"/>
-          <p:cNvSpPr txBox="1"/>
-          <p:nvPr/>
-        </p:nvSpPr>
-        <p:spPr>
-          <a:xfrm>
-            <a:off x="3584448" y="2560320"/>
-            <a:ext cx="2194560" cy="1097280"/>
-          </a:xfrm>
-          <a:prstGeom prst="rect">
-            <a:avLst/>
-          </a:prstGeom>
-          <a:noFill/>
-          <a:ln/>
-        </p:spPr>
-        <p:txBody>
-          <a:bodyPr wrap="square" lIns="0" tIns="0" rIns="0" bIns="0" rtlCol="0" anchor="t"/>
-          <a:lstStyle/>
-          <a:p>
-            <a:pPr indent="0" marL="0">
-              <a:buNone/>
-            </a:pPr>
-            <a:r>
-              <a:rPr lang="en-US" sz="1500" dirty="0">
-                <a:solidFill>
-                  <a:schemeClr val="bg1"/>
-                </a:solidFill>
-              </a:rPr>
-              <a:t>Bench B1 to B7, contact model, HIL rig</a:t>
-            </a:r>
-            <a:endParaRPr lang="en-US" sz="1500" dirty="0"/>
-          </a:p>
-        </p:txBody>
-      </p:sp>
-      <p:sp>
-        <p:nvSpPr>
-          <p:cNvPr id="11" name="Stage IOD"/>
-          <p:cNvSpPr/>
-          <p:nvPr/>
-        </p:nvSpPr>
-        <p:spPr>
-          <a:xfrm>
-            <a:off x="6163056" y="1463040"/>
-            <a:ext cx="2651760" cy="2286000"/>
-          </a:xfrm>
-          <a:prstGeom prst="roundRect">
-            <a:avLst>
-              <a:gd name="adj" fmla="val 3200"/>
+              <a:gd name="adj" fmla="val 1739"/>
             </a:avLst>
           </a:prstGeom>
           <a:solidFill>
@@ -3571,14 +3566,14 @@
       </p:sp>
       <p:sp>
         <p:nvSpPr>
-          <p:cNvPr id="12" name="Text 10"/>
+          <p:cNvPr id="7" name="Text 5"/>
           <p:cNvSpPr txBox="1"/>
           <p:nvPr/>
         </p:nvSpPr>
         <p:spPr>
           <a:xfrm>
-            <a:off x="6391656" y="1645920"/>
-            <a:ext cx="2194560" cy="274320"/>
+            <a:off x="6492240" y="1645920"/>
+            <a:ext cx="4846320" cy="365760"/>
           </a:xfrm>
           <a:prstGeom prst="rect">
             <a:avLst/>
@@ -3594,27 +3589,27 @@
               <a:buNone/>
             </a:pPr>
             <a:r>
-              <a:rPr lang="en-US" sz="1400" dirty="0">
-                <a:solidFill>
-                  <a:schemeClr val="bg2"/>
-                </a:solidFill>
-              </a:rPr>
-              <a:t>later</a:t>
-            </a:r>
-            <a:endParaRPr lang="en-US" sz="1400" dirty="0"/>
-          </a:p>
-        </p:txBody>
-      </p:sp>
-      <p:sp>
-        <p:nvSpPr>
-          <p:cNvPr id="13" name="Text 11"/>
+              <a:rPr lang="en-US" sz="2000" b="1" dirty="0">
+                <a:solidFill>
+                  <a:schemeClr val="accent3"/>
+                </a:solidFill>
+              </a:rPr>
+              <a:t>Rules that shape the design [to verify]</a:t>
+            </a:r>
+            <a:endParaRPr lang="en-US" sz="2000" dirty="0"/>
+          </a:p>
+        </p:txBody>
+      </p:sp>
+      <p:sp>
+        <p:nvSpPr>
+          <p:cNvPr id="8" name="Text 6"/>
           <p:cNvSpPr txBox="1"/>
           <p:nvPr/>
         </p:nvSpPr>
         <p:spPr>
           <a:xfrm>
-            <a:off x="6391656" y="1965960"/>
-            <a:ext cx="2194560" cy="457200"/>
+            <a:off x="6492240" y="2194560"/>
+            <a:ext cx="4846320" cy="3200400"/>
           </a:xfrm>
           <a:prstGeom prst="rect">
             <a:avLst/>
@@ -3626,369 +3621,112 @@
           <a:bodyPr wrap="square" lIns="0" tIns="0" rIns="0" bIns="0" rtlCol="0" anchor="t"/>
           <a:lstStyle/>
           <a:p>
-            <a:pPr indent="0" marL="0">
-              <a:buNone/>
-            </a:pPr>
-            <a:r>
-              <a:rPr lang="en-US" sz="2200" b="1" dirty="0">
-                <a:solidFill>
-                  <a:schemeClr val="accent1"/>
-                </a:solidFill>
-              </a:rPr>
-              <a:t>IOD</a:t>
-            </a:r>
-            <a:endParaRPr lang="en-US" sz="2200" dirty="0"/>
-          </a:p>
-        </p:txBody>
-      </p:sp>
-      <p:sp>
-        <p:nvSpPr>
-          <p:cNvPr id="14" name="Text 12"/>
-          <p:cNvSpPr txBox="1"/>
-          <p:nvPr/>
-        </p:nvSpPr>
-        <p:spPr>
-          <a:xfrm>
-            <a:off x="6391656" y="2560320"/>
-            <a:ext cx="2194560" cy="1097280"/>
-          </a:xfrm>
-          <a:prstGeom prst="rect">
-            <a:avLst/>
-          </a:prstGeom>
-          <a:noFill/>
-          <a:ln/>
-        </p:spPr>
-        <p:txBody>
-          <a:bodyPr wrap="square" lIns="0" tIns="0" rIns="0" bIns="0" rtlCol="0" anchor="t"/>
-          <a:lstStyle/>
-          <a:p>
-            <a:pPr indent="0" marL="0">
-              <a:buNone/>
-            </a:pPr>
-            <a:r>
-              <a:rPr lang="en-US" sz="1500" dirty="0">
+            <a:pPr marL="342900" indent="-342900">
+              <a:spcAft>
+                <a:spcPts val="800"/>
+              </a:spcAft>
+              <a:buSzPct val="100000"/>
+              <a:buChar char="•"/>
+            </a:pPr>
+            <a:r>
+              <a:rPr lang="en-US" sz="1700" dirty="0">
                 <a:solidFill>
                   <a:schemeClr val="bg1"/>
                 </a:solidFill>
               </a:rPr>
-              <a:t>Prepared client and servicer in orbit</a:t>
-            </a:r>
-            <a:endParaRPr lang="en-US" sz="1500" dirty="0"/>
-          </a:p>
-        </p:txBody>
-      </p:sp>
-      <p:sp>
-        <p:nvSpPr>
-          <p:cNvPr id="15" name="Stage Product family"/>
-          <p:cNvSpPr/>
-          <p:nvPr/>
-        </p:nvSpPr>
-        <p:spPr>
-          <a:xfrm>
-            <a:off x="8970264" y="1463040"/>
-            <a:ext cx="2651760" cy="2286000"/>
-          </a:xfrm>
-          <a:prstGeom prst="roundRect">
-            <a:avLst>
-              <a:gd name="adj" fmla="val 3200"/>
-            </a:avLst>
-          </a:prstGeom>
-          <a:solidFill>
-            <a:schemeClr val="tx2"/>
-          </a:solidFill>
-          <a:ln w="12700">
-            <a:solidFill>
-              <a:schemeClr val="accent6"/>
-            </a:solidFill>
-            <a:prstDash val="solid"/>
-          </a:ln>
-        </p:spPr>
-      </p:sp>
-      <p:sp>
-        <p:nvSpPr>
-          <p:cNvPr id="16" name="Text 14"/>
-          <p:cNvSpPr txBox="1"/>
-          <p:nvPr/>
-        </p:nvSpPr>
-        <p:spPr>
-          <a:xfrm>
-            <a:off x="9198864" y="1645920"/>
-            <a:ext cx="2194560" cy="274320"/>
-          </a:xfrm>
-          <a:prstGeom prst="rect">
-            <a:avLst/>
-          </a:prstGeom>
-          <a:noFill/>
-          <a:ln/>
-        </p:spPr>
-        <p:txBody>
-          <a:bodyPr wrap="square" lIns="0" tIns="0" rIns="0" bIns="0" rtlCol="0" anchor="t"/>
-          <a:lstStyle/>
-          <a:p>
-            <a:pPr indent="0" marL="0">
-              <a:buNone/>
-            </a:pPr>
-            <a:r>
-              <a:rPr lang="en-US" sz="1400" dirty="0">
-                <a:solidFill>
-                  <a:schemeClr val="bg2"/>
-                </a:solidFill>
-              </a:rPr>
-              <a:t>after</a:t>
-            </a:r>
-            <a:endParaRPr lang="en-US" sz="1400" dirty="0"/>
-          </a:p>
-        </p:txBody>
-      </p:sp>
-      <p:sp>
-        <p:nvSpPr>
-          <p:cNvPr id="17" name="Text 15"/>
-          <p:cNvSpPr txBox="1"/>
-          <p:nvPr/>
-        </p:nvSpPr>
-        <p:spPr>
-          <a:xfrm>
-            <a:off x="9198864" y="1965960"/>
-            <a:ext cx="2194560" cy="457200"/>
-          </a:xfrm>
-          <a:prstGeom prst="rect">
-            <a:avLst/>
-          </a:prstGeom>
-          <a:noFill/>
-          <a:ln/>
-        </p:spPr>
-        <p:txBody>
-          <a:bodyPr wrap="square" lIns="0" tIns="0" rIns="0" bIns="0" rtlCol="0" anchor="t"/>
-          <a:lstStyle/>
-          <a:p>
-            <a:pPr indent="0" marL="0">
-              <a:buNone/>
-            </a:pPr>
-            <a:r>
-              <a:rPr lang="en-US" sz="2200" b="1" dirty="0">
-                <a:solidFill>
-                  <a:schemeClr val="accent1"/>
-                </a:solidFill>
-              </a:rPr>
-              <a:t>Product family</a:t>
-            </a:r>
-            <a:endParaRPr lang="en-US" sz="2200" dirty="0"/>
-          </a:p>
-        </p:txBody>
-      </p:sp>
-      <p:sp>
-        <p:nvSpPr>
-          <p:cNvPr id="18" name="Text 16"/>
-          <p:cNvSpPr txBox="1"/>
-          <p:nvPr/>
-        </p:nvSpPr>
-        <p:spPr>
-          <a:xfrm>
-            <a:off x="9198864" y="2560320"/>
-            <a:ext cx="2194560" cy="1097280"/>
-          </a:xfrm>
-          <a:prstGeom prst="rect">
-            <a:avLst/>
-          </a:prstGeom>
-          <a:noFill/>
-          <a:ln/>
-        </p:spPr>
-        <p:txBody>
-          <a:bodyPr wrap="square" lIns="0" tIns="0" rIns="0" bIns="0" rtlCol="0" anchor="t"/>
-          <a:lstStyle/>
-          <a:p>
-            <a:pPr indent="0" marL="0">
-              <a:buNone/>
-            </a:pPr>
-            <a:r>
-              <a:rPr lang="en-US" sz="1500" dirty="0">
+              <a:t>ISO 24330 for rendezvous and servicing practice</a:t>
+            </a:r>
+            <a:endParaRPr lang="en-US" sz="1700" dirty="0"/>
+          </a:p>
+          <a:p>
+            <a:pPr marL="342900" indent="-342900">
+              <a:spcAft>
+                <a:spcPts val="800"/>
+              </a:spcAft>
+              <a:buSzPct val="100000"/>
+              <a:buChar char="•"/>
+            </a:pPr>
+            <a:r>
+              <a:rPr lang="en-US" sz="1700" dirty="0">
                 <a:solidFill>
                   <a:schemeClr val="bg1"/>
                 </a:solidFill>
               </a:rPr>
-              <a:t>Tiers 1 to 4 as catalogue items</a:t>
-            </a:r>
-            <a:endParaRPr lang="en-US" sz="1500" dirty="0"/>
-          </a:p>
-        </p:txBody>
-      </p:sp>
-      <p:sp>
-        <p:nvSpPr>
-          <p:cNvPr id="19" name="Text 17"/>
-          <p:cNvSpPr txBox="1"/>
-          <p:nvPr/>
-        </p:nvSpPr>
-        <p:spPr>
-          <a:xfrm>
-            <a:off x="548640" y="4069080"/>
-            <a:ext cx="3291840" cy="822960"/>
-          </a:xfrm>
-          <a:prstGeom prst="rect">
-            <a:avLst/>
-          </a:prstGeom>
-          <a:noFill/>
-          <a:ln/>
-        </p:spPr>
-        <p:txBody>
-          <a:bodyPr wrap="square" lIns="0" tIns="0" rIns="0" bIns="0" rtlCol="0" anchor="t"/>
-          <a:lstStyle/>
-          <a:p>
-            <a:pPr indent="0" marL="0">
-              <a:buNone/>
-            </a:pPr>
-            <a:r>
-              <a:rPr lang="en-US" sz="4800" b="1" dirty="0">
-                <a:solidFill>
-                  <a:schemeClr val="accent2"/>
-                </a:solidFill>
-              </a:rPr>
-              <a:t>EUR 770 k</a:t>
-            </a:r>
-            <a:endParaRPr lang="en-US" sz="4800" dirty="0"/>
-          </a:p>
-        </p:txBody>
-      </p:sp>
-      <p:sp>
-        <p:nvSpPr>
-          <p:cNvPr id="20" name="Text 18"/>
-          <p:cNvSpPr txBox="1"/>
-          <p:nvPr/>
-        </p:nvSpPr>
-        <p:spPr>
-          <a:xfrm>
-            <a:off x="548640" y="4937760"/>
-            <a:ext cx="3291840" cy="640080"/>
-          </a:xfrm>
-          <a:prstGeom prst="rect">
-            <a:avLst/>
-          </a:prstGeom>
-          <a:noFill/>
-          <a:ln/>
-        </p:spPr>
-        <p:txBody>
-          <a:bodyPr wrap="square" lIns="0" tIns="0" rIns="0" bIns="0" rtlCol="0" anchor="t"/>
-          <a:lstStyle/>
-          <a:p>
-            <a:pPr indent="0" marL="0">
-              <a:buNone/>
-            </a:pPr>
-            <a:r>
-              <a:rPr lang="en-US" sz="1400" dirty="0">
-                <a:solidFill>
-                  <a:schemeClr val="bg2"/>
-                </a:solidFill>
-              </a:rPr>
-              <a:t>draft ground-demo budget (assumed)</a:t>
-            </a:r>
-            <a:endParaRPr lang="en-US" sz="1400" dirty="0"/>
-          </a:p>
-        </p:txBody>
-      </p:sp>
-      <p:sp>
-        <p:nvSpPr>
-          <p:cNvPr id="21" name="Text 19"/>
-          <p:cNvSpPr txBox="1"/>
-          <p:nvPr/>
-        </p:nvSpPr>
-        <p:spPr>
-          <a:xfrm>
-            <a:off x="4114800" y="4069080"/>
-            <a:ext cx="2743200" cy="822960"/>
-          </a:xfrm>
-          <a:prstGeom prst="rect">
-            <a:avLst/>
-          </a:prstGeom>
-          <a:noFill/>
-          <a:ln/>
-        </p:spPr>
-        <p:txBody>
-          <a:bodyPr wrap="square" lIns="0" tIns="0" rIns="0" bIns="0" rtlCol="0" anchor="t"/>
-          <a:lstStyle/>
-          <a:p>
-            <a:pPr indent="0" marL="0">
-              <a:buNone/>
-            </a:pPr>
-            <a:r>
-              <a:rPr lang="en-US" sz="4800" b="1" dirty="0">
-                <a:solidFill>
-                  <a:schemeClr val="accent1"/>
-                </a:solidFill>
-              </a:rPr>
-              <a:t>40</a:t>
-            </a:r>
-            <a:endParaRPr lang="en-US" sz="4800" dirty="0"/>
-          </a:p>
-        </p:txBody>
-      </p:sp>
-      <p:sp>
-        <p:nvSpPr>
-          <p:cNvPr id="22" name="Text 20"/>
-          <p:cNvSpPr txBox="1"/>
-          <p:nvPr/>
-        </p:nvSpPr>
-        <p:spPr>
-          <a:xfrm>
-            <a:off x="4114800" y="4937760"/>
-            <a:ext cx="2743200" cy="640080"/>
-          </a:xfrm>
-          <a:prstGeom prst="rect">
-            <a:avLst/>
-          </a:prstGeom>
-          <a:noFill/>
-          <a:ln/>
-        </p:spPr>
-        <p:txBody>
-          <a:bodyPr wrap="square" lIns="0" tIns="0" rIns="0" bIns="0" rtlCol="0" anchor="t"/>
-          <a:lstStyle/>
-          <a:p>
-            <a:pPr indent="0" marL="0">
-              <a:buNone/>
-            </a:pPr>
-            <a:r>
-              <a:rPr lang="en-US" sz="1400" dirty="0">
-                <a:solidFill>
-                  <a:schemeClr val="bg2"/>
-                </a:solidFill>
-              </a:rPr>
-              <a:t>person-months at EUR 8 k assumed</a:t>
-            </a:r>
-            <a:endParaRPr lang="en-US" sz="1400" dirty="0"/>
-          </a:p>
-        </p:txBody>
-      </p:sp>
-      <p:sp>
-        <p:nvSpPr>
-          <p:cNvPr id="23" name="Text 21"/>
-          <p:cNvSpPr txBox="1"/>
-          <p:nvPr/>
-        </p:nvSpPr>
-        <p:spPr>
-          <a:xfrm>
-            <a:off x="7132320" y="4114800"/>
-            <a:ext cx="4480560" cy="1645920"/>
-          </a:xfrm>
-          <a:prstGeom prst="rect">
-            <a:avLst/>
-          </a:prstGeom>
-          <a:noFill/>
-          <a:ln/>
-        </p:spPr>
-        <p:txBody>
-          <a:bodyPr wrap="square" lIns="0" tIns="0" rIns="0" bIns="0" rtlCol="0" anchor="t"/>
-          <a:lstStyle/>
-          <a:p>
-            <a:pPr indent="0" marL="0">
-              <a:buNone/>
-            </a:pPr>
-            <a:r>
-              <a:rPr lang="en-US" sz="1500" dirty="0">
-                <a:solidFill>
-                  <a:schemeClr val="bg2"/>
-                </a:solidFill>
-              </a:rPr>
-              <a:t>Use of funds: about 42% people, 45% bench and rig hardware, 13% contingency. Six work packages: systems, RPO and GNC, HPC and analysis, beacon bench, IOS and OSAN, business and regulatory.</a:t>
-            </a:r>
-            <a:endParaRPr lang="en-US" sz="1500" dirty="0"/>
+              <a:t>ISO 24113 and IADC for debris and end of life</a:t>
+            </a:r>
+            <a:endParaRPr lang="en-US" sz="1700" dirty="0"/>
+          </a:p>
+          <a:p>
+            <a:pPr marL="342900" indent="-342900">
+              <a:spcAft>
+                <a:spcPts val="800"/>
+              </a:spcAft>
+              <a:buSzPct val="100000"/>
+              <a:buChar char="•"/>
+            </a:pPr>
+            <a:r>
+              <a:rPr lang="en-US" sz="1700" dirty="0">
+                <a:solidFill>
+                  <a:schemeClr val="bg1"/>
+                </a:solidFill>
+              </a:rPr>
+              <a:t>ECSS series for GNC, verification and interfaces</a:t>
+            </a:r>
+            <a:endParaRPr lang="en-US" sz="1700" dirty="0"/>
+          </a:p>
+          <a:p>
+            <a:pPr marL="342900" indent="-342900">
+              <a:spcAft>
+                <a:spcPts val="800"/>
+              </a:spcAft>
+              <a:buSzPct val="100000"/>
+              <a:buChar char="•"/>
+            </a:pPr>
+            <a:r>
+              <a:rPr lang="en-US" sz="1700" dirty="0">
+                <a:solidFill>
+                  <a:schemeClr val="bg1"/>
+                </a:solidFill>
+              </a:rPr>
+              <a:t>NASA-STD-7009 for model credibility</a:t>
+            </a:r>
+            <a:endParaRPr lang="en-US" sz="1700" dirty="0"/>
+          </a:p>
+          <a:p>
+            <a:pPr marL="342900" indent="-342900">
+              <a:spcAft>
+                <a:spcPts val="800"/>
+              </a:spcAft>
+              <a:buSzPct val="100000"/>
+              <a:buChar char="•"/>
+            </a:pPr>
+            <a:r>
+              <a:rPr lang="en-US" sz="1700" dirty="0">
+                <a:solidFill>
+                  <a:schemeClr val="bg1"/>
+                </a:solidFill>
+              </a:rPr>
+              <a:t>ITU and national licensing for the beacon</a:t>
+            </a:r>
+            <a:endParaRPr lang="en-US" sz="1700" dirty="0"/>
+          </a:p>
+          <a:p>
+            <a:pPr marL="342900" indent="-342900">
+              <a:spcAft>
+                <a:spcPts val="800"/>
+              </a:spcAft>
+              <a:buSzPct val="100000"/>
+              <a:buChar char="•"/>
+            </a:pPr>
+            <a:r>
+              <a:rPr lang="en-US" sz="1700" dirty="0">
+                <a:solidFill>
+                  <a:schemeClr val="bg1"/>
+                </a:solidFill>
+              </a:rPr>
+              <a:t>Owner consent and national authorisation; EU Space Act evolving</a:t>
+            </a:r>
+            <a:endParaRPr lang="en-US" sz="1700" dirty="0"/>
           </a:p>
         </p:txBody>
       </p:sp>
@@ -4094,7 +3832,7 @@
                   <a:schemeClr val="bg1"/>
                 </a:solidFill>
               </a:rPr>
-              <a:t>Three asks and the risks we are watching</a:t>
+              <a:t>Next: a ground demonstration with agreed criteria</a:t>
             </a:r>
             <a:endParaRPr lang="en-US" sz="3200" dirty="0"/>
           </a:p>
@@ -4102,18 +3840,18 @@
       </p:sp>
       <p:sp>
         <p:nvSpPr>
-          <p:cNvPr id="3" name="Asks"/>
+          <p:cNvPr id="3" name="Stage Study"/>
           <p:cNvSpPr/>
           <p:nvPr/>
         </p:nvSpPr>
         <p:spPr>
           <a:xfrm>
             <a:off x="548640" y="1463040"/>
-            <a:ext cx="5394960" cy="4023360"/>
+            <a:ext cx="2651760" cy="2286000"/>
           </a:xfrm>
           <a:prstGeom prst="roundRect">
             <a:avLst>
-              <a:gd name="adj" fmla="val 1818"/>
+              <a:gd name="adj" fmla="val 3200"/>
             </a:avLst>
           </a:prstGeom>
           <a:solidFill>
@@ -4135,8 +3873,8 @@
         </p:nvSpPr>
         <p:spPr>
           <a:xfrm>
-            <a:off x="822960" y="1645920"/>
-            <a:ext cx="4846320" cy="365760"/>
+            <a:off x="777240" y="1645920"/>
+            <a:ext cx="2194560" cy="274320"/>
           </a:xfrm>
           <a:prstGeom prst="rect">
             <a:avLst/>
@@ -4152,14 +3890,14 @@
               <a:buNone/>
             </a:pPr>
             <a:r>
-              <a:rPr lang="en-US" sz="2200" b="1" dirty="0">
-                <a:solidFill>
-                  <a:schemeClr val="accent3"/>
-                </a:solidFill>
-              </a:rPr>
-              <a:t>What we need</a:t>
-            </a:r>
-            <a:endParaRPr lang="en-US" sz="2200" dirty="0"/>
+              <a:rPr lang="en-US" sz="1400" dirty="0">
+                <a:solidFill>
+                  <a:schemeClr val="bg2"/>
+                </a:solidFill>
+              </a:rPr>
+              <a:t>now</a:t>
+            </a:r>
+            <a:endParaRPr lang="en-US" sz="1400" dirty="0"/>
           </a:p>
         </p:txBody>
       </p:sp>
@@ -4171,8 +3909,8 @@
         </p:nvSpPr>
         <p:spPr>
           <a:xfrm>
-            <a:off x="822960" y="2286000"/>
-            <a:ext cx="4846320" cy="3474720"/>
+            <a:off x="777240" y="1965960"/>
+            <a:ext cx="2194560" cy="457200"/>
           </a:xfrm>
           <a:prstGeom prst="rect">
             <a:avLst/>
@@ -4184,78 +3922,206 @@
           <a:bodyPr wrap="square" lIns="0" tIns="0" rIns="0" bIns="0" rtlCol="0" anchor="t"/>
           <a:lstStyle/>
           <a:p>
-            <a:pPr marL="342900" indent="-342900">
-              <a:spcAft>
-                <a:spcPts val="1200"/>
-              </a:spcAft>
-              <a:buSzPct val="100000"/>
-              <a:buFont typeface="+mj-lt"/>
-              <a:buAutoNum type="arabicPeriod" startAt="1"/>
-            </a:pPr>
-            <a:r>
-              <a:rPr lang="en-US" sz="2000" dirty="0">
+            <a:pPr indent="0" marL="0">
+              <a:buNone/>
+            </a:pPr>
+            <a:r>
+              <a:rPr lang="en-US" sz="2200" b="1" dirty="0">
+                <a:solidFill>
+                  <a:schemeClr val="accent1"/>
+                </a:solidFill>
+              </a:rPr>
+              <a:t>Study</a:t>
+            </a:r>
+            <a:endParaRPr lang="en-US" sz="2200" dirty="0"/>
+          </a:p>
+        </p:txBody>
+      </p:sp>
+      <p:sp>
+        <p:nvSpPr>
+          <p:cNvPr id="6" name="Text 4"/>
+          <p:cNvSpPr txBox="1"/>
+          <p:nvPr/>
+        </p:nvSpPr>
+        <p:spPr>
+          <a:xfrm>
+            <a:off x="777240" y="2560320"/>
+            <a:ext cx="2194560" cy="1097280"/>
+          </a:xfrm>
+          <a:prstGeom prst="rect">
+            <a:avLst/>
+          </a:prstGeom>
+          <a:noFill/>
+          <a:ln/>
+        </p:spPr>
+        <p:txBody>
+          <a:bodyPr wrap="square" lIns="0" tIns="0" rIns="0" bIns="0" rtlCol="0" anchor="t"/>
+          <a:lstStyle/>
+          <a:p>
+            <a:pPr indent="0" marL="0">
+              <a:buNone/>
+            </a:pPr>
+            <a:r>
+              <a:rPr lang="en-US" sz="1500" dirty="0">
                 <a:solidFill>
                   <a:schemeClr val="bg1"/>
                 </a:solidFill>
               </a:rPr>
-              <a:t>Confirm the reference client and the degraded failure cases</a:t>
-            </a:r>
-            <a:endParaRPr lang="en-US" sz="2000" dirty="0"/>
-          </a:p>
-          <a:p>
-            <a:pPr marL="342900" indent="-342900">
-              <a:spcAft>
-                <a:spcPts val="1200"/>
-              </a:spcAft>
-              <a:buSzPct val="100000"/>
-              <a:buFont typeface="+mj-lt"/>
-              <a:buAutoNum type="arabicPeriod" startAt="1"/>
-            </a:pPr>
-            <a:r>
-              <a:rPr lang="en-US" sz="2000" dirty="0">
-                <a:solidFill>
-                  <a:schemeClr val="bg1"/>
-                </a:solidFill>
-              </a:rPr>
-              <a:t>Point us to failure statistics so we can test how often rescue is needed</a:t>
-            </a:r>
-            <a:endParaRPr lang="en-US" sz="2000" dirty="0"/>
-          </a:p>
-          <a:p>
-            <a:pPr marL="342900" indent="-342900">
-              <a:spcAft>
-                <a:spcPts val="1200"/>
-              </a:spcAft>
-              <a:buSzPct val="100000"/>
-              <a:buFont typeface="+mj-lt"/>
-              <a:buAutoNum type="arabicPeriod" startAt="1"/>
-            </a:pPr>
-            <a:r>
-              <a:rPr lang="en-US" sz="2000" dirty="0">
-                <a:solidFill>
-                  <a:schemeClr val="bg1"/>
-                </a:solidFill>
-              </a:rPr>
-              <a:t>Agree the success criteria for the ground demo</a:t>
-            </a:r>
-            <a:endParaRPr lang="en-US" sz="2000" dirty="0"/>
-          </a:p>
-        </p:txBody>
-      </p:sp>
-      <p:sp>
-        <p:nvSpPr>
-          <p:cNvPr id="6" name="Risks"/>
+              <a:t>Envelopes, beacon and IOS concept, tier trade</a:t>
+            </a:r>
+            <a:endParaRPr lang="en-US" sz="1500" dirty="0"/>
+          </a:p>
+        </p:txBody>
+      </p:sp>
+      <p:sp>
+        <p:nvSpPr>
+          <p:cNvPr id="7" name="Stage Ground demo"/>
           <p:cNvSpPr/>
           <p:nvPr/>
         </p:nvSpPr>
         <p:spPr>
           <a:xfrm>
-            <a:off x="6217920" y="1463040"/>
-            <a:ext cx="5422392" cy="4023360"/>
+            <a:off x="3355848" y="1463040"/>
+            <a:ext cx="2651760" cy="2286000"/>
           </a:xfrm>
           <a:prstGeom prst="roundRect">
             <a:avLst>
-              <a:gd name="adj" fmla="val 1818"/>
+              <a:gd name="adj" fmla="val 3200"/>
+            </a:avLst>
+          </a:prstGeom>
+          <a:solidFill>
+            <a:schemeClr val="accent6"/>
+          </a:solidFill>
+          <a:ln w="12700">
+            <a:solidFill>
+              <a:schemeClr val="accent6"/>
+            </a:solidFill>
+            <a:prstDash val="solid"/>
+          </a:ln>
+        </p:spPr>
+      </p:sp>
+      <p:sp>
+        <p:nvSpPr>
+          <p:cNvPr id="8" name="Text 6"/>
+          <p:cNvSpPr txBox="1"/>
+          <p:nvPr/>
+        </p:nvSpPr>
+        <p:spPr>
+          <a:xfrm>
+            <a:off x="3584448" y="1645920"/>
+            <a:ext cx="2194560" cy="274320"/>
+          </a:xfrm>
+          <a:prstGeom prst="rect">
+            <a:avLst/>
+          </a:prstGeom>
+          <a:noFill/>
+          <a:ln/>
+        </p:spPr>
+        <p:txBody>
+          <a:bodyPr wrap="square" lIns="0" tIns="0" rIns="0" bIns="0" rtlCol="0" anchor="t"/>
+          <a:lstStyle/>
+          <a:p>
+            <a:pPr indent="0" marL="0">
+              <a:buNone/>
+            </a:pPr>
+            <a:r>
+              <a:rPr lang="en-US" sz="1400" dirty="0">
+                <a:solidFill>
+                  <a:schemeClr val="bg2"/>
+                </a:solidFill>
+              </a:rPr>
+              <a:t>next</a:t>
+            </a:r>
+            <a:endParaRPr lang="en-US" sz="1400" dirty="0"/>
+          </a:p>
+        </p:txBody>
+      </p:sp>
+      <p:sp>
+        <p:nvSpPr>
+          <p:cNvPr id="9" name="Text 7"/>
+          <p:cNvSpPr txBox="1"/>
+          <p:nvPr/>
+        </p:nvSpPr>
+        <p:spPr>
+          <a:xfrm>
+            <a:off x="3584448" y="1965960"/>
+            <a:ext cx="2194560" cy="457200"/>
+          </a:xfrm>
+          <a:prstGeom prst="rect">
+            <a:avLst/>
+          </a:prstGeom>
+          <a:noFill/>
+          <a:ln/>
+        </p:spPr>
+        <p:txBody>
+          <a:bodyPr wrap="square" lIns="0" tIns="0" rIns="0" bIns="0" rtlCol="0" anchor="t"/>
+          <a:lstStyle/>
+          <a:p>
+            <a:pPr indent="0" marL="0">
+              <a:buNone/>
+            </a:pPr>
+            <a:r>
+              <a:rPr lang="en-US" sz="2200" b="1" dirty="0">
+                <a:solidFill>
+                  <a:schemeClr val="accent1"/>
+                </a:solidFill>
+              </a:rPr>
+              <a:t>Ground demo</a:t>
+            </a:r>
+            <a:endParaRPr lang="en-US" sz="2200" dirty="0"/>
+          </a:p>
+        </p:txBody>
+      </p:sp>
+      <p:sp>
+        <p:nvSpPr>
+          <p:cNvPr id="10" name="Text 8"/>
+          <p:cNvSpPr txBox="1"/>
+          <p:nvPr/>
+        </p:nvSpPr>
+        <p:spPr>
+          <a:xfrm>
+            <a:off x="3584448" y="2560320"/>
+            <a:ext cx="2194560" cy="1097280"/>
+          </a:xfrm>
+          <a:prstGeom prst="rect">
+            <a:avLst/>
+          </a:prstGeom>
+          <a:noFill/>
+          <a:ln/>
+        </p:spPr>
+        <p:txBody>
+          <a:bodyPr wrap="square" lIns="0" tIns="0" rIns="0" bIns="0" rtlCol="0" anchor="t"/>
+          <a:lstStyle/>
+          <a:p>
+            <a:pPr indent="0" marL="0">
+              <a:buNone/>
+            </a:pPr>
+            <a:r>
+              <a:rPr lang="en-US" sz="1500" dirty="0">
+                <a:solidFill>
+                  <a:schemeClr val="bg1"/>
+                </a:solidFill>
+              </a:rPr>
+              <a:t>Bench B1 to B7, contact model, HIL rig</a:t>
+            </a:r>
+            <a:endParaRPr lang="en-US" sz="1500" dirty="0"/>
+          </a:p>
+        </p:txBody>
+      </p:sp>
+      <p:sp>
+        <p:nvSpPr>
+          <p:cNvPr id="11" name="Stage IOD"/>
+          <p:cNvSpPr/>
+          <p:nvPr/>
+        </p:nvSpPr>
+        <p:spPr>
+          <a:xfrm>
+            <a:off x="6163056" y="1463040"/>
+            <a:ext cx="2651760" cy="2286000"/>
+          </a:xfrm>
+          <a:prstGeom prst="roundRect">
+            <a:avLst>
+              <a:gd name="adj" fmla="val 3200"/>
             </a:avLst>
           </a:prstGeom>
           <a:solidFill>
@@ -4271,14 +4137,14 @@
       </p:sp>
       <p:sp>
         <p:nvSpPr>
-          <p:cNvPr id="7" name="Text 5"/>
+          <p:cNvPr id="12" name="Text 10"/>
           <p:cNvSpPr txBox="1"/>
           <p:nvPr/>
         </p:nvSpPr>
         <p:spPr>
           <a:xfrm>
-            <a:off x="6492240" y="1645920"/>
-            <a:ext cx="4846320" cy="365760"/>
+            <a:off x="6391656" y="1645920"/>
+            <a:ext cx="2194560" cy="274320"/>
           </a:xfrm>
           <a:prstGeom prst="rect">
             <a:avLst/>
@@ -4294,27 +4160,27 @@
               <a:buNone/>
             </a:pPr>
             <a:r>
-              <a:rPr lang="en-US" sz="2200" b="1" dirty="0">
-                <a:solidFill>
-                  <a:schemeClr val="accent4"/>
-                </a:solidFill>
-              </a:rPr>
-              <a:t>Risks</a:t>
-            </a:r>
-            <a:endParaRPr lang="en-US" sz="2200" dirty="0"/>
-          </a:p>
-        </p:txBody>
-      </p:sp>
-      <p:sp>
-        <p:nvSpPr>
-          <p:cNvPr id="8" name="Text 6"/>
+              <a:rPr lang="en-US" sz="1400" dirty="0">
+                <a:solidFill>
+                  <a:schemeClr val="bg2"/>
+                </a:solidFill>
+              </a:rPr>
+              <a:t>later</a:t>
+            </a:r>
+            <a:endParaRPr lang="en-US" sz="1400" dirty="0"/>
+          </a:p>
+        </p:txBody>
+      </p:sp>
+      <p:sp>
+        <p:nvSpPr>
+          <p:cNvPr id="13" name="Text 11"/>
           <p:cNvSpPr txBox="1"/>
           <p:nvPr/>
         </p:nvSpPr>
         <p:spPr>
           <a:xfrm>
-            <a:off x="6492240" y="2286000"/>
-            <a:ext cx="4846320" cy="3108960"/>
+            <a:off x="6391656" y="1965960"/>
+            <a:ext cx="2194560" cy="457200"/>
           </a:xfrm>
           <a:prstGeom prst="rect">
             <a:avLst/>
@@ -4326,94 +4192,369 @@
           <a:bodyPr wrap="square" lIns="0" tIns="0" rIns="0" bIns="0" rtlCol="0" anchor="t"/>
           <a:lstStyle/>
           <a:p>
-            <a:pPr marL="342900" indent="-342900">
-              <a:spcAft>
-                <a:spcPts val="1000"/>
-              </a:spcAft>
-              <a:buSzPct val="100000"/>
-              <a:buChar char="•"/>
-            </a:pPr>
-            <a:r>
-              <a:rPr lang="en-US" sz="1900" dirty="0">
+            <a:pPr indent="0" marL="0">
+              <a:buNone/>
+            </a:pPr>
+            <a:r>
+              <a:rPr lang="en-US" sz="2200" b="1" dirty="0">
+                <a:solidFill>
+                  <a:schemeClr val="accent1"/>
+                </a:solidFill>
+              </a:rPr>
+              <a:t>IOD</a:t>
+            </a:r>
+            <a:endParaRPr lang="en-US" sz="2200" dirty="0"/>
+          </a:p>
+        </p:txBody>
+      </p:sp>
+      <p:sp>
+        <p:nvSpPr>
+          <p:cNvPr id="14" name="Text 12"/>
+          <p:cNvSpPr txBox="1"/>
+          <p:nvPr/>
+        </p:nvSpPr>
+        <p:spPr>
+          <a:xfrm>
+            <a:off x="6391656" y="2560320"/>
+            <a:ext cx="2194560" cy="1097280"/>
+          </a:xfrm>
+          <a:prstGeom prst="rect">
+            <a:avLst/>
+          </a:prstGeom>
+          <a:noFill/>
+          <a:ln/>
+        </p:spPr>
+        <p:txBody>
+          <a:bodyPr wrap="square" lIns="0" tIns="0" rIns="0" bIns="0" rtlCol="0" anchor="t"/>
+          <a:lstStyle/>
+          <a:p>
+            <a:pPr indent="0" marL="0">
+              <a:buNone/>
+            </a:pPr>
+            <a:r>
+              <a:rPr lang="en-US" sz="1500" dirty="0">
                 <a:solidFill>
                   <a:schemeClr val="bg1"/>
                 </a:solidFill>
               </a:rPr>
-              <a:t>Value rests on an assumed failure rate and price</a:t>
-            </a:r>
-            <a:endParaRPr lang="en-US" sz="1900" dirty="0"/>
-          </a:p>
-          <a:p>
-            <a:pPr marL="342900" indent="-342900">
-              <a:spcAft>
-                <a:spcPts val="1000"/>
-              </a:spcAft>
-              <a:buSzPct val="100000"/>
-              <a:buChar char="•"/>
-            </a:pPr>
-            <a:r>
-              <a:rPr lang="en-US" sz="1900" dirty="0">
+              <a:t>Prepared client and servicer in orbit</a:t>
+            </a:r>
+            <a:endParaRPr lang="en-US" sz="1500" dirty="0"/>
+          </a:p>
+        </p:txBody>
+      </p:sp>
+      <p:sp>
+        <p:nvSpPr>
+          <p:cNvPr id="15" name="Stage Product family"/>
+          <p:cNvSpPr/>
+          <p:nvPr/>
+        </p:nvSpPr>
+        <p:spPr>
+          <a:xfrm>
+            <a:off x="8970264" y="1463040"/>
+            <a:ext cx="2651760" cy="2286000"/>
+          </a:xfrm>
+          <a:prstGeom prst="roundRect">
+            <a:avLst>
+              <a:gd name="adj" fmla="val 3200"/>
+            </a:avLst>
+          </a:prstGeom>
+          <a:solidFill>
+            <a:schemeClr val="tx2"/>
+          </a:solidFill>
+          <a:ln w="12700">
+            <a:solidFill>
+              <a:schemeClr val="accent6"/>
+            </a:solidFill>
+            <a:prstDash val="solid"/>
+          </a:ln>
+        </p:spPr>
+      </p:sp>
+      <p:sp>
+        <p:nvSpPr>
+          <p:cNvPr id="16" name="Text 14"/>
+          <p:cNvSpPr txBox="1"/>
+          <p:nvPr/>
+        </p:nvSpPr>
+        <p:spPr>
+          <a:xfrm>
+            <a:off x="9198864" y="1645920"/>
+            <a:ext cx="2194560" cy="274320"/>
+          </a:xfrm>
+          <a:prstGeom prst="rect">
+            <a:avLst/>
+          </a:prstGeom>
+          <a:noFill/>
+          <a:ln/>
+        </p:spPr>
+        <p:txBody>
+          <a:bodyPr wrap="square" lIns="0" tIns="0" rIns="0" bIns="0" rtlCol="0" anchor="t"/>
+          <a:lstStyle/>
+          <a:p>
+            <a:pPr indent="0" marL="0">
+              <a:buNone/>
+            </a:pPr>
+            <a:r>
+              <a:rPr lang="en-US" sz="1400" dirty="0">
+                <a:solidFill>
+                  <a:schemeClr val="bg2"/>
+                </a:solidFill>
+              </a:rPr>
+              <a:t>after</a:t>
+            </a:r>
+            <a:endParaRPr lang="en-US" sz="1400" dirty="0"/>
+          </a:p>
+        </p:txBody>
+      </p:sp>
+      <p:sp>
+        <p:nvSpPr>
+          <p:cNvPr id="17" name="Text 15"/>
+          <p:cNvSpPr txBox="1"/>
+          <p:nvPr/>
+        </p:nvSpPr>
+        <p:spPr>
+          <a:xfrm>
+            <a:off x="9198864" y="1965960"/>
+            <a:ext cx="2194560" cy="457200"/>
+          </a:xfrm>
+          <a:prstGeom prst="rect">
+            <a:avLst/>
+          </a:prstGeom>
+          <a:noFill/>
+          <a:ln/>
+        </p:spPr>
+        <p:txBody>
+          <a:bodyPr wrap="square" lIns="0" tIns="0" rIns="0" bIns="0" rtlCol="0" anchor="t"/>
+          <a:lstStyle/>
+          <a:p>
+            <a:pPr indent="0" marL="0">
+              <a:buNone/>
+            </a:pPr>
+            <a:r>
+              <a:rPr lang="en-US" sz="2200" b="1" dirty="0">
+                <a:solidFill>
+                  <a:schemeClr val="accent1"/>
+                </a:solidFill>
+              </a:rPr>
+              <a:t>Product family</a:t>
+            </a:r>
+            <a:endParaRPr lang="en-US" sz="2200" dirty="0"/>
+          </a:p>
+        </p:txBody>
+      </p:sp>
+      <p:sp>
+        <p:nvSpPr>
+          <p:cNvPr id="18" name="Text 16"/>
+          <p:cNvSpPr txBox="1"/>
+          <p:nvPr/>
+        </p:nvSpPr>
+        <p:spPr>
+          <a:xfrm>
+            <a:off x="9198864" y="2560320"/>
+            <a:ext cx="2194560" cy="1097280"/>
+          </a:xfrm>
+          <a:prstGeom prst="rect">
+            <a:avLst/>
+          </a:prstGeom>
+          <a:noFill/>
+          <a:ln/>
+        </p:spPr>
+        <p:txBody>
+          <a:bodyPr wrap="square" lIns="0" tIns="0" rIns="0" bIns="0" rtlCol="0" anchor="t"/>
+          <a:lstStyle/>
+          <a:p>
+            <a:pPr indent="0" marL="0">
+              <a:buNone/>
+            </a:pPr>
+            <a:r>
+              <a:rPr lang="en-US" sz="1500" dirty="0">
                 <a:solidFill>
                   <a:schemeClr val="bg1"/>
                 </a:solidFill>
               </a:rPr>
-              <a:t>Buyers may prefer servicer-side fixes</a:t>
-            </a:r>
-            <a:endParaRPr lang="en-US" sz="1900" dirty="0"/>
-          </a:p>
-          <a:p>
-            <a:pPr marL="342900" indent="-342900">
-              <a:spcAft>
-                <a:spcPts val="1000"/>
-              </a:spcAft>
-              <a:buSzPct val="100000"/>
-              <a:buChar char="•"/>
-            </a:pPr>
-            <a:r>
-              <a:rPr lang="en-US" sz="1900" dirty="0">
-                <a:solidFill>
-                  <a:schemeClr val="bg1"/>
-                </a:solidFill>
-              </a:rPr>
-              <a:t>Contact-model fidelity and hardware lead time</a:t>
-            </a:r>
-            <a:endParaRPr lang="en-US" sz="1900" dirty="0"/>
-          </a:p>
-          <a:p>
-            <a:pPr marL="342900" indent="-342900">
-              <a:spcAft>
-                <a:spcPts val="1000"/>
-              </a:spcAft>
-              <a:buSzPct val="100000"/>
-              <a:buChar char="•"/>
-            </a:pPr>
-            <a:r>
-              <a:rPr lang="en-US" sz="1900" dirty="0">
-                <a:solidFill>
-                  <a:schemeClr val="bg1"/>
-                </a:solidFill>
-              </a:rPr>
-              <a:t>Standards fragmentation and licensing timing</a:t>
-            </a:r>
-            <a:endParaRPr lang="en-US" sz="1900" dirty="0"/>
-          </a:p>
-          <a:p>
-            <a:pPr marL="342900" indent="-342900">
-              <a:spcAft>
-                <a:spcPts val="1000"/>
-              </a:spcAft>
-              <a:buSzPct val="100000"/>
-              <a:buChar char="•"/>
-            </a:pPr>
-            <a:r>
-              <a:rPr lang="en-US" sz="1900" dirty="0">
-                <a:solidFill>
-                  <a:schemeClr val="bg1"/>
-                </a:solidFill>
-              </a:rPr>
-              <a:t>Novelty not yet checked against patents</a:t>
-            </a:r>
-            <a:endParaRPr lang="en-US" sz="1900" dirty="0"/>
+              <a:t>Tiers 1 to 4 as catalogue items</a:t>
+            </a:r>
+            <a:endParaRPr lang="en-US" sz="1500" dirty="0"/>
+          </a:p>
+        </p:txBody>
+      </p:sp>
+      <p:sp>
+        <p:nvSpPr>
+          <p:cNvPr id="19" name="Text 17"/>
+          <p:cNvSpPr txBox="1"/>
+          <p:nvPr/>
+        </p:nvSpPr>
+        <p:spPr>
+          <a:xfrm>
+            <a:off x="548640" y="4069080"/>
+            <a:ext cx="3291840" cy="822960"/>
+          </a:xfrm>
+          <a:prstGeom prst="rect">
+            <a:avLst/>
+          </a:prstGeom>
+          <a:noFill/>
+          <a:ln/>
+        </p:spPr>
+        <p:txBody>
+          <a:bodyPr wrap="square" lIns="0" tIns="0" rIns="0" bIns="0" rtlCol="0" anchor="t"/>
+          <a:lstStyle/>
+          <a:p>
+            <a:pPr indent="0" marL="0">
+              <a:buNone/>
+            </a:pPr>
+            <a:r>
+              <a:rPr lang="en-US" sz="4800" b="1" dirty="0">
+                <a:solidFill>
+                  <a:schemeClr val="accent2"/>
+                </a:solidFill>
+              </a:rPr>
+              <a:t>EUR 770 k</a:t>
+            </a:r>
+            <a:endParaRPr lang="en-US" sz="4800" dirty="0"/>
+          </a:p>
+        </p:txBody>
+      </p:sp>
+      <p:sp>
+        <p:nvSpPr>
+          <p:cNvPr id="20" name="Text 18"/>
+          <p:cNvSpPr txBox="1"/>
+          <p:nvPr/>
+        </p:nvSpPr>
+        <p:spPr>
+          <a:xfrm>
+            <a:off x="548640" y="4937760"/>
+            <a:ext cx="3291840" cy="640080"/>
+          </a:xfrm>
+          <a:prstGeom prst="rect">
+            <a:avLst/>
+          </a:prstGeom>
+          <a:noFill/>
+          <a:ln/>
+        </p:spPr>
+        <p:txBody>
+          <a:bodyPr wrap="square" lIns="0" tIns="0" rIns="0" bIns="0" rtlCol="0" anchor="t"/>
+          <a:lstStyle/>
+          <a:p>
+            <a:pPr indent="0" marL="0">
+              <a:buNone/>
+            </a:pPr>
+            <a:r>
+              <a:rPr lang="en-US" sz="1400" dirty="0">
+                <a:solidFill>
+                  <a:schemeClr val="bg2"/>
+                </a:solidFill>
+              </a:rPr>
+              <a:t>draft ground-demo budget (assumed)</a:t>
+            </a:r>
+            <a:endParaRPr lang="en-US" sz="1400" dirty="0"/>
+          </a:p>
+        </p:txBody>
+      </p:sp>
+      <p:sp>
+        <p:nvSpPr>
+          <p:cNvPr id="21" name="Text 19"/>
+          <p:cNvSpPr txBox="1"/>
+          <p:nvPr/>
+        </p:nvSpPr>
+        <p:spPr>
+          <a:xfrm>
+            <a:off x="4114800" y="4069080"/>
+            <a:ext cx="2743200" cy="822960"/>
+          </a:xfrm>
+          <a:prstGeom prst="rect">
+            <a:avLst/>
+          </a:prstGeom>
+          <a:noFill/>
+          <a:ln/>
+        </p:spPr>
+        <p:txBody>
+          <a:bodyPr wrap="square" lIns="0" tIns="0" rIns="0" bIns="0" rtlCol="0" anchor="t"/>
+          <a:lstStyle/>
+          <a:p>
+            <a:pPr indent="0" marL="0">
+              <a:buNone/>
+            </a:pPr>
+            <a:r>
+              <a:rPr lang="en-US" sz="4800" b="1" dirty="0">
+                <a:solidFill>
+                  <a:schemeClr val="accent1"/>
+                </a:solidFill>
+              </a:rPr>
+              <a:t>40</a:t>
+            </a:r>
+            <a:endParaRPr lang="en-US" sz="4800" dirty="0"/>
+          </a:p>
+        </p:txBody>
+      </p:sp>
+      <p:sp>
+        <p:nvSpPr>
+          <p:cNvPr id="22" name="Text 20"/>
+          <p:cNvSpPr txBox="1"/>
+          <p:nvPr/>
+        </p:nvSpPr>
+        <p:spPr>
+          <a:xfrm>
+            <a:off x="4114800" y="4937760"/>
+            <a:ext cx="2743200" cy="640080"/>
+          </a:xfrm>
+          <a:prstGeom prst="rect">
+            <a:avLst/>
+          </a:prstGeom>
+          <a:noFill/>
+          <a:ln/>
+        </p:spPr>
+        <p:txBody>
+          <a:bodyPr wrap="square" lIns="0" tIns="0" rIns="0" bIns="0" rtlCol="0" anchor="t"/>
+          <a:lstStyle/>
+          <a:p>
+            <a:pPr indent="0" marL="0">
+              <a:buNone/>
+            </a:pPr>
+            <a:r>
+              <a:rPr lang="en-US" sz="1400" dirty="0">
+                <a:solidFill>
+                  <a:schemeClr val="bg2"/>
+                </a:solidFill>
+              </a:rPr>
+              <a:t>person-months at EUR 8 k assumed</a:t>
+            </a:r>
+            <a:endParaRPr lang="en-US" sz="1400" dirty="0"/>
+          </a:p>
+        </p:txBody>
+      </p:sp>
+      <p:sp>
+        <p:nvSpPr>
+          <p:cNvPr id="23" name="Text 21"/>
+          <p:cNvSpPr txBox="1"/>
+          <p:nvPr/>
+        </p:nvSpPr>
+        <p:spPr>
+          <a:xfrm>
+            <a:off x="7132320" y="4114800"/>
+            <a:ext cx="4480560" cy="1645920"/>
+          </a:xfrm>
+          <a:prstGeom prst="rect">
+            <a:avLst/>
+          </a:prstGeom>
+          <a:noFill/>
+          <a:ln/>
+        </p:spPr>
+        <p:txBody>
+          <a:bodyPr wrap="square" lIns="0" tIns="0" rIns="0" bIns="0" rtlCol="0" anchor="t"/>
+          <a:lstStyle/>
+          <a:p>
+            <a:pPr indent="0" marL="0">
+              <a:buNone/>
+            </a:pPr>
+            <a:r>
+              <a:rPr lang="en-US" sz="1500" dirty="0">
+                <a:solidFill>
+                  <a:schemeClr val="bg2"/>
+                </a:solidFill>
+              </a:rPr>
+              <a:t>Use of funds: about 42% people, 45% bench and rig hardware, 13% contingency. Six work packages: systems, RPO and GNC, HPC and analysis, beacon bench, IOS and OSAN, business and regulatory.</a:t>
+            </a:r>
+            <a:endParaRPr lang="en-US" sz="1500" dirty="0"/>
           </a:p>
         </p:txBody>
       </p:sp>
@@ -4489,16 +4630,16 @@
       </p:grpSpPr>
       <p:sp>
         <p:nvSpPr>
-          <p:cNvPr id="2" name="Text 0"/>
+          <p:cNvPr id="2" name="Text 1"/>
           <p:cNvSpPr/>
           <p:nvPr>
-            <p:ph idx="100" type="title" hasCustomPrompt="1"/>
+            <p:ph idx="101" type="title" hasCustomPrompt="1"/>
           </p:nvPr>
         </p:nvSpPr>
         <p:spPr>
           <a:xfrm>
-            <a:off x="548640" y="2377440"/>
-            <a:ext cx="11091672" cy="1280160"/>
+            <a:off x="548640" y="365760"/>
+            <a:ext cx="11091672" cy="822960"/>
           </a:xfrm>
           <a:prstGeom prst="rect">
             <a:avLst/>
@@ -4507,21 +4648,383 @@
           <a:ln/>
         </p:spPr>
         <p:txBody>
-          <a:bodyPr wrap="square" lIns="0" tIns="0" rIns="0" bIns="0" rtlCol="0"/>
+          <a:bodyPr wrap="square" lIns="0" tIns="0" rIns="0" bIns="0" rtlCol="0" anchor="t"/>
           <a:lstStyle/>
           <a:p>
             <a:pPr algn="l" indent="0" marL="0">
               <a:buNone/>
             </a:pPr>
             <a:r>
-              <a:rPr lang="en-US" sz="5400" b="1" dirty="0">
+              <a:rPr lang="en-US" sz="3200" b="1" dirty="0">
                 <a:solidFill>
                   <a:schemeClr val="bg1"/>
                 </a:solidFill>
               </a:rPr>
-              <a:t>Minimum preparation. Safe when degraded. A scalable roadmap.</a:t>
-            </a:r>
-            <a:endParaRPr lang="en-US" sz="5400" dirty="0"/>
+              <a:t>Three asks and the risks we are watching</a:t>
+            </a:r>
+            <a:endParaRPr lang="en-US" sz="3200" dirty="0"/>
+          </a:p>
+        </p:txBody>
+      </p:sp>
+      <p:sp>
+        <p:nvSpPr>
+          <p:cNvPr id="3" name="Asks"/>
+          <p:cNvSpPr/>
+          <p:nvPr/>
+        </p:nvSpPr>
+        <p:spPr>
+          <a:xfrm>
+            <a:off x="548640" y="1463040"/>
+            <a:ext cx="5394960" cy="4023360"/>
+          </a:xfrm>
+          <a:prstGeom prst="roundRect">
+            <a:avLst>
+              <a:gd name="adj" fmla="val 1818"/>
+            </a:avLst>
+          </a:prstGeom>
+          <a:solidFill>
+            <a:schemeClr val="tx2"/>
+          </a:solidFill>
+          <a:ln w="12700">
+            <a:solidFill>
+              <a:schemeClr val="accent6"/>
+            </a:solidFill>
+            <a:prstDash val="solid"/>
+          </a:ln>
+        </p:spPr>
+      </p:sp>
+      <p:sp>
+        <p:nvSpPr>
+          <p:cNvPr id="4" name="Text 2"/>
+          <p:cNvSpPr txBox="1"/>
+          <p:nvPr/>
+        </p:nvSpPr>
+        <p:spPr>
+          <a:xfrm>
+            <a:off x="822960" y="1645920"/>
+            <a:ext cx="4846320" cy="365760"/>
+          </a:xfrm>
+          <a:prstGeom prst="rect">
+            <a:avLst/>
+          </a:prstGeom>
+          <a:noFill/>
+          <a:ln/>
+        </p:spPr>
+        <p:txBody>
+          <a:bodyPr wrap="square" lIns="0" tIns="0" rIns="0" bIns="0" rtlCol="0" anchor="t"/>
+          <a:lstStyle/>
+          <a:p>
+            <a:pPr indent="0" marL="0">
+              <a:buNone/>
+            </a:pPr>
+            <a:r>
+              <a:rPr lang="en-US" sz="2200" b="1" dirty="0">
+                <a:solidFill>
+                  <a:schemeClr val="accent3"/>
+                </a:solidFill>
+              </a:rPr>
+              <a:t>What we need</a:t>
+            </a:r>
+            <a:endParaRPr lang="en-US" sz="2200" dirty="0"/>
+          </a:p>
+        </p:txBody>
+      </p:sp>
+      <p:sp>
+        <p:nvSpPr>
+          <p:cNvPr id="5" name="Text 3"/>
+          <p:cNvSpPr txBox="1"/>
+          <p:nvPr/>
+        </p:nvSpPr>
+        <p:spPr>
+          <a:xfrm>
+            <a:off x="822960" y="2286000"/>
+            <a:ext cx="4846320" cy="3474720"/>
+          </a:xfrm>
+          <a:prstGeom prst="rect">
+            <a:avLst/>
+          </a:prstGeom>
+          <a:noFill/>
+          <a:ln/>
+        </p:spPr>
+        <p:txBody>
+          <a:bodyPr wrap="square" lIns="0" tIns="0" rIns="0" bIns="0" rtlCol="0" anchor="t"/>
+          <a:lstStyle/>
+          <a:p>
+            <a:pPr marL="342900" indent="-342900">
+              <a:spcAft>
+                <a:spcPts val="1200"/>
+              </a:spcAft>
+              <a:buSzPct val="100000"/>
+              <a:buFont typeface="+mj-lt"/>
+              <a:buAutoNum type="arabicPeriod" startAt="1"/>
+            </a:pPr>
+            <a:r>
+              <a:rPr lang="en-US" sz="2000" dirty="0">
+                <a:solidFill>
+                  <a:schemeClr val="bg1"/>
+                </a:solidFill>
+              </a:rPr>
+              <a:t>Confirm the reference client and the degraded failure cases</a:t>
+            </a:r>
+            <a:endParaRPr lang="en-US" sz="2000" dirty="0"/>
+          </a:p>
+          <a:p>
+            <a:pPr marL="342900" indent="-342900">
+              <a:spcAft>
+                <a:spcPts val="1200"/>
+              </a:spcAft>
+              <a:buSzPct val="100000"/>
+              <a:buFont typeface="+mj-lt"/>
+              <a:buAutoNum type="arabicPeriod" startAt="1"/>
+            </a:pPr>
+            <a:r>
+              <a:rPr lang="en-US" sz="2000" dirty="0">
+                <a:solidFill>
+                  <a:schemeClr val="bg1"/>
+                </a:solidFill>
+              </a:rPr>
+              <a:t>Point us to failure statistics so we can test how often rescue is needed</a:t>
+            </a:r>
+            <a:endParaRPr lang="en-US" sz="2000" dirty="0"/>
+          </a:p>
+          <a:p>
+            <a:pPr marL="342900" indent="-342900">
+              <a:spcAft>
+                <a:spcPts val="1200"/>
+              </a:spcAft>
+              <a:buSzPct val="100000"/>
+              <a:buFont typeface="+mj-lt"/>
+              <a:buAutoNum type="arabicPeriod" startAt="1"/>
+            </a:pPr>
+            <a:r>
+              <a:rPr lang="en-US" sz="2000" dirty="0">
+                <a:solidFill>
+                  <a:schemeClr val="bg1"/>
+                </a:solidFill>
+              </a:rPr>
+              <a:t>Agree the success criteria for the ground demo</a:t>
+            </a:r>
+            <a:endParaRPr lang="en-US" sz="2000" dirty="0"/>
+          </a:p>
+        </p:txBody>
+      </p:sp>
+      <p:sp>
+        <p:nvSpPr>
+          <p:cNvPr id="6" name="Risks"/>
+          <p:cNvSpPr/>
+          <p:nvPr/>
+        </p:nvSpPr>
+        <p:spPr>
+          <a:xfrm>
+            <a:off x="6217920" y="1463040"/>
+            <a:ext cx="5422392" cy="4023360"/>
+          </a:xfrm>
+          <a:prstGeom prst="roundRect">
+            <a:avLst>
+              <a:gd name="adj" fmla="val 1818"/>
+            </a:avLst>
+          </a:prstGeom>
+          <a:solidFill>
+            <a:schemeClr val="tx2"/>
+          </a:solidFill>
+          <a:ln w="12700">
+            <a:solidFill>
+              <a:schemeClr val="accent6"/>
+            </a:solidFill>
+            <a:prstDash val="solid"/>
+          </a:ln>
+        </p:spPr>
+      </p:sp>
+      <p:sp>
+        <p:nvSpPr>
+          <p:cNvPr id="7" name="Text 5"/>
+          <p:cNvSpPr txBox="1"/>
+          <p:nvPr/>
+        </p:nvSpPr>
+        <p:spPr>
+          <a:xfrm>
+            <a:off x="6492240" y="1645920"/>
+            <a:ext cx="4846320" cy="365760"/>
+          </a:xfrm>
+          <a:prstGeom prst="rect">
+            <a:avLst/>
+          </a:prstGeom>
+          <a:noFill/>
+          <a:ln/>
+        </p:spPr>
+        <p:txBody>
+          <a:bodyPr wrap="square" lIns="0" tIns="0" rIns="0" bIns="0" rtlCol="0" anchor="t"/>
+          <a:lstStyle/>
+          <a:p>
+            <a:pPr indent="0" marL="0">
+              <a:buNone/>
+            </a:pPr>
+            <a:r>
+              <a:rPr lang="en-US" sz="2200" b="1" dirty="0">
+                <a:solidFill>
+                  <a:schemeClr val="accent4"/>
+                </a:solidFill>
+              </a:rPr>
+              <a:t>Risks</a:t>
+            </a:r>
+            <a:endParaRPr lang="en-US" sz="2200" dirty="0"/>
+          </a:p>
+        </p:txBody>
+      </p:sp>
+      <p:sp>
+        <p:nvSpPr>
+          <p:cNvPr id="8" name="Text 6"/>
+          <p:cNvSpPr txBox="1"/>
+          <p:nvPr/>
+        </p:nvSpPr>
+        <p:spPr>
+          <a:xfrm>
+            <a:off x="6492240" y="2286000"/>
+            <a:ext cx="4846320" cy="3108960"/>
+          </a:xfrm>
+          <a:prstGeom prst="rect">
+            <a:avLst/>
+          </a:prstGeom>
+          <a:noFill/>
+          <a:ln/>
+        </p:spPr>
+        <p:txBody>
+          <a:bodyPr wrap="square" lIns="0" tIns="0" rIns="0" bIns="0" rtlCol="0" anchor="t"/>
+          <a:lstStyle/>
+          <a:p>
+            <a:pPr marL="342900" indent="-342900">
+              <a:spcAft>
+                <a:spcPts val="1000"/>
+              </a:spcAft>
+              <a:buSzPct val="100000"/>
+              <a:buChar char="•"/>
+            </a:pPr>
+            <a:r>
+              <a:rPr lang="en-US" sz="1900" dirty="0">
+                <a:solidFill>
+                  <a:schemeClr val="bg1"/>
+                </a:solidFill>
+              </a:rPr>
+              <a:t>Value rests on an assumed failure rate and price</a:t>
+            </a:r>
+            <a:endParaRPr lang="en-US" sz="1900" dirty="0"/>
+          </a:p>
+          <a:p>
+            <a:pPr marL="342900" indent="-342900">
+              <a:spcAft>
+                <a:spcPts val="1000"/>
+              </a:spcAft>
+              <a:buSzPct val="100000"/>
+              <a:buChar char="•"/>
+            </a:pPr>
+            <a:r>
+              <a:rPr lang="en-US" sz="1900" dirty="0">
+                <a:solidFill>
+                  <a:schemeClr val="bg1"/>
+                </a:solidFill>
+              </a:rPr>
+              <a:t>Buyers may prefer servicer-side fixes</a:t>
+            </a:r>
+            <a:endParaRPr lang="en-US" sz="1900" dirty="0"/>
+          </a:p>
+          <a:p>
+            <a:pPr marL="342900" indent="-342900">
+              <a:spcAft>
+                <a:spcPts val="1000"/>
+              </a:spcAft>
+              <a:buSzPct val="100000"/>
+              <a:buChar char="•"/>
+            </a:pPr>
+            <a:r>
+              <a:rPr lang="en-US" sz="1900" dirty="0">
+                <a:solidFill>
+                  <a:schemeClr val="bg1"/>
+                </a:solidFill>
+              </a:rPr>
+              <a:t>Contact-model fidelity and hardware lead time</a:t>
+            </a:r>
+            <a:endParaRPr lang="en-US" sz="1900" dirty="0"/>
+          </a:p>
+          <a:p>
+            <a:pPr marL="342900" indent="-342900">
+              <a:spcAft>
+                <a:spcPts val="1000"/>
+              </a:spcAft>
+              <a:buSzPct val="100000"/>
+              <a:buChar char="•"/>
+            </a:pPr>
+            <a:r>
+              <a:rPr lang="en-US" sz="1900" dirty="0">
+                <a:solidFill>
+                  <a:schemeClr val="bg1"/>
+                </a:solidFill>
+              </a:rPr>
+              <a:t>Standards fragmentation and licensing timing</a:t>
+            </a:r>
+            <a:endParaRPr lang="en-US" sz="1900" dirty="0"/>
+          </a:p>
+          <a:p>
+            <a:pPr marL="342900" indent="-342900">
+              <a:spcAft>
+                <a:spcPts val="1000"/>
+              </a:spcAft>
+              <a:buSzPct val="100000"/>
+              <a:buChar char="•"/>
+            </a:pPr>
+            <a:r>
+              <a:rPr lang="en-US" sz="1900" dirty="0">
+                <a:solidFill>
+                  <a:schemeClr val="bg1"/>
+                </a:solidFill>
+              </a:rPr>
+              <a:t>Novelty not yet checked against patents</a:t>
+            </a:r>
+            <a:endParaRPr lang="en-US" sz="1900" dirty="0"/>
+          </a:p>
+        </p:txBody>
+      </p:sp>
+      <p:sp>
+        <p:nvSpPr>
+          <p:cNvPr id="25" name="Slide Number Placeholder 0"/>
+          <p:cNvSpPr>
+            <a:spLocks noGrp="1"/>
+          </p:cNvSpPr>
+          <p:nvPr>
+            <p:ph type="sldNum" sz="quarter" idx="4294967295"/>
+          </p:nvPr>
+        </p:nvSpPr>
+        <p:spPr>
+          <a:xfrm>
+            <a:off x="11183112" y="6446520"/>
+            <a:ext cx="548640" cy="274320"/>
+          </a:xfrm>
+          <a:prstGeom prst="rect">
+            <a:avLst/>
+          </a:prstGeom>
+          <a:extLst>
+            <a:ext uri="{C572A759-6A51-4108-AA02-DFA0A04FC94B}">
+              <ma14:wrappingTextBoxFlag xmlns:ma14="http://schemas.microsoft.com/office/mac/drawingml/2011/main" val="0"/>
+            </a:ext>
+          </a:extLst>
+        </p:spPr>
+        <p:txBody>
+          <a:bodyPr/>
+          <a:lstStyle>
+            <a:lvl1pPr>
+              <a:defRPr sz="1000">
+                <a:solidFill>
+                  <a:schemeClr val="bg2"/>
+                </a:solidFill>
+              </a:defRPr>
+            </a:lvl1pPr>
+          </a:lstStyle>
+          <a:p>
+            <a:pPr algn="r"/>
+            <a:fld id="{F7021451-1387-4CA6-816F-3879F97B5CBC}" type="slidenum">
+              <a:rPr b="0" lang="en-US"/>
+              <a:t>12</a:t>
+            </a:fld>
+            <a:endParaRPr lang="en-US"/>
           </a:p>
         </p:txBody>
       </p:sp>
@@ -4552,6 +5055,69 @@
       </p:grpSpPr>
       <p:sp>
         <p:nvSpPr>
+          <p:cNvPr id="2" name="Text 0"/>
+          <p:cNvSpPr/>
+          <p:nvPr>
+            <p:ph idx="100" type="title" hasCustomPrompt="1"/>
+          </p:nvPr>
+        </p:nvSpPr>
+        <p:spPr>
+          <a:xfrm>
+            <a:off x="548640" y="2377440"/>
+            <a:ext cx="11091672" cy="1280160"/>
+          </a:xfrm>
+          <a:prstGeom prst="rect">
+            <a:avLst/>
+          </a:prstGeom>
+          <a:noFill/>
+          <a:ln/>
+        </p:spPr>
+        <p:txBody>
+          <a:bodyPr wrap="square" lIns="0" tIns="0" rIns="0" bIns="0" rtlCol="0"/>
+          <a:lstStyle/>
+          <a:p>
+            <a:pPr algn="l" indent="0" marL="0">
+              <a:buNone/>
+            </a:pPr>
+            <a:r>
+              <a:rPr lang="en-US" sz="5400" b="1" dirty="0">
+                <a:solidFill>
+                  <a:schemeClr val="bg1"/>
+                </a:solidFill>
+              </a:rPr>
+              <a:t>Minimum preparation. Safe when degraded. A scalable roadmap.</a:t>
+            </a:r>
+            <a:endParaRPr lang="en-US" sz="5400" dirty="0"/>
+          </a:p>
+        </p:txBody>
+      </p:sp>
+    </p:spTree>
+  </p:cSld>
+  <p:clrMapOvr>
+    <a:masterClrMapping/>
+  </p:clrMapOvr>
+</p:sld>
+</file>
+
+<file path=ppt/slides/slide14.xml><?xml version="1.0" encoding="utf-8"?>
+<p:sld xmlns:a="http://schemas.openxmlformats.org/drawingml/2006/main" xmlns:r="http://schemas.openxmlformats.org/officeDocument/2006/relationships" xmlns:p="http://schemas.openxmlformats.org/presentationml/2006/main">
+  <p:cSld name="Slide 14">
+    <p:spTree>
+      <p:nvGrpSpPr>
+        <p:cNvPr id="1" name=""/>
+        <p:cNvGrpSpPr/>
+        <p:nvPr/>
+      </p:nvGrpSpPr>
+      <p:grpSpPr>
+        <a:xfrm>
+          <a:off x="0" y="0"/>
+          <a:ext cx="0" cy="0"/>
+          <a:chOff x="0" y="0"/>
+          <a:chExt cx="0" cy="0"/>
+        </a:xfrm>
+      </p:grpSpPr>
+      <p:sp>
+        <p:nvSpPr>
           <p:cNvPr id="2" name="Text 1"/>
           <p:cNvSpPr/>
           <p:nvPr>
@@ -4590,7 +5156,7 @@
       </p:sp>
       <p:graphicFrame>
         <p:nvGraphicFramePr>
-          <p:cNvPr id="14" name="Table 0"/>
+          <p:cNvPr id="15" name="Table 0"/>
           <p:cNvGraphicFramePr>
             <a:graphicFrameLocks noGrp="1"/>
           </p:cNvGraphicFramePr>
@@ -5804,7 +6370,7 @@
             <a:pPr algn="r"/>
             <a:fld id="{F7021451-1387-4CA6-816F-3879F97B5CBC}" type="slidenum">
               <a:rPr b="0" lang="en-US"/>
-              <a:t>13</a:t>
+              <a:t>14</a:t>
             </a:fld>
             <a:endParaRPr lang="en-US"/>
           </a:p>
@@ -7988,314 +8554,50 @@
                   <a:schemeClr val="bg1"/>
                 </a:solidFill>
               </a:rPr>
-              <a:t>Built, tested, and honest about its limits</a:t>
+              <a:t>Reference architecture: what we cover and what comes next</a:t>
             </a:r>
             <a:endParaRPr lang="en-US" sz="3200" dirty="0"/>
           </a:p>
         </p:txBody>
       </p:sp>
-      <p:sp>
-        <p:nvSpPr>
-          <p:cNvPr id="3" name="Text 1"/>
-          <p:cNvSpPr txBox="1"/>
-          <p:nvPr/>
-        </p:nvSpPr>
-        <p:spPr>
-          <a:xfrm>
-            <a:off x="548640" y="1417320"/>
-            <a:ext cx="2560320" cy="822960"/>
-          </a:xfrm>
-          <a:prstGeom prst="rect">
-            <a:avLst/>
-          </a:prstGeom>
-          <a:noFill/>
-          <a:ln/>
-        </p:spPr>
-        <p:txBody>
-          <a:bodyPr wrap="square" lIns="0" tIns="0" rIns="0" bIns="0" rtlCol="0" anchor="t"/>
-          <a:lstStyle/>
-          <a:p>
-            <a:pPr indent="0" marL="0">
-              <a:buNone/>
-            </a:pPr>
-            <a:r>
-              <a:rPr lang="en-US" sz="4800" b="1" dirty="0">
-                <a:solidFill>
-                  <a:schemeClr val="accent3"/>
-                </a:solidFill>
-              </a:rPr>
-              <a:t>74</a:t>
-            </a:r>
-            <a:endParaRPr lang="en-US" sz="4800" dirty="0"/>
-          </a:p>
-        </p:txBody>
-      </p:sp>
-      <p:sp>
-        <p:nvSpPr>
-          <p:cNvPr id="4" name="Text 2"/>
-          <p:cNvSpPr txBox="1"/>
-          <p:nvPr/>
-        </p:nvSpPr>
-        <p:spPr>
-          <a:xfrm>
-            <a:off x="548640" y="2286000"/>
-            <a:ext cx="2560320" cy="640080"/>
-          </a:xfrm>
-          <a:prstGeom prst="rect">
-            <a:avLst/>
-          </a:prstGeom>
-          <a:noFill/>
-          <a:ln/>
-        </p:spPr>
-        <p:txBody>
-          <a:bodyPr wrap="square" lIns="0" tIns="0" rIns="0" bIns="0" rtlCol="0" anchor="t"/>
-          <a:lstStyle/>
-          <a:p>
-            <a:pPr indent="0" marL="0">
-              <a:buNone/>
-            </a:pPr>
-            <a:r>
-              <a:rPr lang="en-US" sz="1400" dirty="0">
-                <a:solidFill>
-                  <a:schemeClr val="bg2"/>
-                </a:solidFill>
-              </a:rPr>
-              <a:t>automated tests pass</a:t>
-            </a:r>
-            <a:endParaRPr lang="en-US" sz="1400" dirty="0"/>
-          </a:p>
-        </p:txBody>
-      </p:sp>
-      <p:sp>
-        <p:nvSpPr>
-          <p:cNvPr id="5" name="Text 3"/>
-          <p:cNvSpPr txBox="1"/>
-          <p:nvPr/>
-        </p:nvSpPr>
-        <p:spPr>
-          <a:xfrm>
-            <a:off x="3291840" y="1417320"/>
-            <a:ext cx="2560320" cy="822960"/>
-          </a:xfrm>
-          <a:prstGeom prst="rect">
-            <a:avLst/>
-          </a:prstGeom>
-          <a:noFill/>
-          <a:ln/>
-        </p:spPr>
-        <p:txBody>
-          <a:bodyPr wrap="square" lIns="0" tIns="0" rIns="0" bIns="0" rtlCol="0" anchor="t"/>
-          <a:lstStyle/>
-          <a:p>
-            <a:pPr indent="0" marL="0">
-              <a:buNone/>
-            </a:pPr>
-            <a:r>
-              <a:rPr lang="en-US" sz="4800" b="1" dirty="0">
-                <a:solidFill>
-                  <a:schemeClr val="accent1"/>
-                </a:solidFill>
-              </a:rPr>
-              <a:t>41,240</a:t>
-            </a:r>
-            <a:endParaRPr lang="en-US" sz="4800" dirty="0"/>
-          </a:p>
-        </p:txBody>
-      </p:sp>
-      <p:sp>
-        <p:nvSpPr>
-          <p:cNvPr id="6" name="Text 4"/>
-          <p:cNvSpPr txBox="1"/>
-          <p:nvPr/>
-        </p:nvSpPr>
-        <p:spPr>
-          <a:xfrm>
-            <a:off x="3291840" y="2286000"/>
-            <a:ext cx="2560320" cy="640080"/>
-          </a:xfrm>
-          <a:prstGeom prst="rect">
-            <a:avLst/>
-          </a:prstGeom>
-          <a:noFill/>
-          <a:ln/>
-        </p:spPr>
-        <p:txBody>
-          <a:bodyPr wrap="square" lIns="0" tIns="0" rIns="0" bIns="0" rtlCol="0" anchor="t"/>
-          <a:lstStyle/>
-          <a:p>
-            <a:pPr indent="0" marL="0">
-              <a:buNone/>
-            </a:pPr>
-            <a:r>
-              <a:rPr lang="en-US" sz="1400" dirty="0">
-                <a:solidFill>
-                  <a:schemeClr val="bg2"/>
-                </a:solidFill>
-              </a:rPr>
-              <a:t>simulated approaches (35,100 + 6,140)</a:t>
-            </a:r>
-            <a:endParaRPr lang="en-US" sz="1400" dirty="0"/>
-          </a:p>
-        </p:txBody>
-      </p:sp>
-      <p:sp>
-        <p:nvSpPr>
-          <p:cNvPr id="7" name="Text 5"/>
-          <p:cNvSpPr txBox="1"/>
-          <p:nvPr/>
-        </p:nvSpPr>
-        <p:spPr>
-          <a:xfrm>
-            <a:off x="6035040" y="1417320"/>
-            <a:ext cx="2560320" cy="822960"/>
-          </a:xfrm>
-          <a:prstGeom prst="rect">
-            <a:avLst/>
-          </a:prstGeom>
-          <a:noFill/>
-          <a:ln/>
-        </p:spPr>
-        <p:txBody>
-          <a:bodyPr wrap="square" lIns="0" tIns="0" rIns="0" bIns="0" rtlCol="0" anchor="t"/>
-          <a:lstStyle/>
-          <a:p>
-            <a:pPr indent="0" marL="0">
-              <a:buNone/>
-            </a:pPr>
-            <a:r>
-              <a:rPr lang="en-US" sz="4800" b="1" dirty="0">
-                <a:solidFill>
-                  <a:schemeClr val="accent2"/>
-                </a:solidFill>
-              </a:rPr>
-              <a:t>0 / 6,140</a:t>
-            </a:r>
-            <a:endParaRPr lang="en-US" sz="4800" dirty="0"/>
-          </a:p>
-        </p:txBody>
-      </p:sp>
-      <p:sp>
-        <p:nvSpPr>
-          <p:cNvPr id="8" name="Text 6"/>
-          <p:cNvSpPr txBox="1"/>
-          <p:nvPr/>
-        </p:nvSpPr>
-        <p:spPr>
-          <a:xfrm>
-            <a:off x="6035040" y="2286000"/>
-            <a:ext cx="2560320" cy="640080"/>
-          </a:xfrm>
-          <a:prstGeom prst="rect">
-            <a:avLst/>
-          </a:prstGeom>
-          <a:noFill/>
-          <a:ln/>
-        </p:spPr>
-        <p:txBody>
-          <a:bodyPr wrap="square" lIns="0" tIns="0" rIns="0" bIns="0" rtlCol="0" anchor="t"/>
-          <a:lstStyle/>
-          <a:p>
-            <a:pPr indent="0" marL="0">
-              <a:buNone/>
-            </a:pPr>
-            <a:r>
-              <a:rPr lang="en-US" sz="1400" dirty="0">
-                <a:solidFill>
-                  <a:schemeClr val="bg2"/>
-                </a:solidFill>
-              </a:rPr>
-              <a:t>keep-out violations (a count, not a bound)</a:t>
-            </a:r>
-            <a:endParaRPr lang="en-US" sz="1400" dirty="0"/>
-          </a:p>
-        </p:txBody>
-      </p:sp>
-      <p:sp>
-        <p:nvSpPr>
-          <p:cNvPr id="9" name="Text 7"/>
-          <p:cNvSpPr txBox="1"/>
-          <p:nvPr/>
-        </p:nvSpPr>
-        <p:spPr>
-          <a:xfrm>
-            <a:off x="8778240" y="1417320"/>
-            <a:ext cx="2834640" cy="822960"/>
-          </a:xfrm>
-          <a:prstGeom prst="rect">
-            <a:avLst/>
-          </a:prstGeom>
-          <a:noFill/>
-          <a:ln/>
-        </p:spPr>
-        <p:txBody>
-          <a:bodyPr wrap="square" lIns="0" tIns="0" rIns="0" bIns="0" rtlCol="0" anchor="t"/>
-          <a:lstStyle/>
-          <a:p>
-            <a:pPr indent="0" marL="0">
-              <a:buNone/>
-            </a:pPr>
-            <a:r>
-              <a:rPr lang="en-US" sz="4800" b="1" dirty="0">
-                <a:solidFill>
-                  <a:schemeClr val="accent3"/>
-                </a:solidFill>
-              </a:rPr>
-              <a:t>1.2 kg</a:t>
-            </a:r>
-            <a:endParaRPr lang="en-US" sz="4800" dirty="0"/>
-          </a:p>
-        </p:txBody>
-      </p:sp>
-      <p:sp>
-        <p:nvSpPr>
-          <p:cNvPr id="10" name="Text 8"/>
-          <p:cNvSpPr txBox="1"/>
-          <p:nvPr/>
-        </p:nvSpPr>
-        <p:spPr>
-          <a:xfrm>
-            <a:off x="8778240" y="2286000"/>
-            <a:ext cx="2834640" cy="640080"/>
-          </a:xfrm>
-          <a:prstGeom prst="rect">
-            <a:avLst/>
-          </a:prstGeom>
-          <a:noFill/>
-          <a:ln/>
-        </p:spPr>
-        <p:txBody>
-          <a:bodyPr wrap="square" lIns="0" tIns="0" rIns="0" bIns="0" rtlCol="0" anchor="t"/>
-          <a:lstStyle/>
-          <a:p>
-            <a:pPr indent="0" marL="0">
-              <a:buNone/>
-            </a:pPr>
-            <a:r>
-              <a:rPr lang="en-US" sz="1400" dirty="0">
-                <a:solidFill>
-                  <a:schemeClr val="bg2"/>
-                </a:solidFill>
-              </a:rPr>
-              <a:t>fuel gauge error from 800 kg</a:t>
-            </a:r>
-            <a:endParaRPr lang="en-US" sz="1400" dirty="0"/>
-          </a:p>
-        </p:txBody>
-      </p:sp>
-      <p:sp>
-        <p:nvSpPr>
-          <p:cNvPr id="11" name="Verified"/>
+      <p:pic>
+        <p:nvPicPr>
+          <p:cNvPr id="3" name="Reference architecture" descr="Reference system architecture: client satellite, OSAN service interface, servicing spacecraft, ground segment">    </p:cNvPr>
+          <p:cNvPicPr>
+            <a:picLocks noChangeAspect="1"/>
+          </p:cNvPicPr>
+          <p:nvPr/>
+        </p:nvPicPr>
+        <p:blipFill>
+          <a:blip r:embed="rId1"/>
+          <a:stretch>
+            <a:fillRect/>
+          </a:stretch>
+        </p:blipFill>
+        <p:spPr>
+          <a:xfrm>
+            <a:off x="548640" y="1280160"/>
+            <a:ext cx="7040880" cy="4718304"/>
+          </a:xfrm>
+          <a:prstGeom prst="rect">
+            <a:avLst/>
+          </a:prstGeom>
+        </p:spPr>
+      </p:pic>
+      <p:sp>
+        <p:nvSpPr>
+          <p:cNvPr id="4" name="Covered"/>
           <p:cNvSpPr/>
           <p:nvPr/>
         </p:nvSpPr>
         <p:spPr>
           <a:xfrm>
-            <a:off x="548640" y="3291840"/>
-            <a:ext cx="5394960" cy="2743200"/>
+            <a:off x="7863840" y="1280160"/>
+            <a:ext cx="3776472" cy="1481328"/>
           </a:xfrm>
           <a:prstGeom prst="roundRect">
             <a:avLst>
-              <a:gd name="adj" fmla="val 2667"/>
+              <a:gd name="adj" fmla="val 4938"/>
             </a:avLst>
           </a:prstGeom>
           <a:solidFill>
@@ -8311,14 +8613,14 @@
       </p:sp>
       <p:sp>
         <p:nvSpPr>
-          <p:cNvPr id="12" name="Text 10"/>
+          <p:cNvPr id="5" name="Text 2"/>
           <p:cNvSpPr txBox="1"/>
           <p:nvPr/>
         </p:nvSpPr>
         <p:spPr>
           <a:xfrm>
-            <a:off x="822960" y="3474720"/>
-            <a:ext cx="4846320" cy="365760"/>
+            <a:off x="8046720" y="1371600"/>
+            <a:ext cx="3383280" cy="320040"/>
           </a:xfrm>
           <a:prstGeom prst="rect">
             <a:avLst/>
@@ -8334,27 +8636,27 @@
               <a:buNone/>
             </a:pPr>
             <a:r>
-              <a:rPr lang="en-US" sz="2000" b="1" dirty="0">
+              <a:rPr lang="en-US" sz="1800" b="1" dirty="0">
                 <a:solidFill>
                   <a:schemeClr val="accent3"/>
                 </a:solidFill>
               </a:rPr>
-              <a:t>Verified</a:t>
-            </a:r>
-            <a:endParaRPr lang="en-US" sz="2000" dirty="0"/>
-          </a:p>
-        </p:txBody>
-      </p:sp>
-      <p:sp>
-        <p:nvSpPr>
-          <p:cNvPr id="13" name="Text 11"/>
+              <a:t>Covered</a:t>
+            </a:r>
+            <a:endParaRPr lang="en-US" sz="1800" dirty="0"/>
+          </a:p>
+        </p:txBody>
+      </p:sp>
+      <p:sp>
+        <p:nvSpPr>
+          <p:cNvPr id="6" name="Text 3"/>
           <p:cNvSpPr txBox="1"/>
           <p:nvPr/>
         </p:nvSpPr>
         <p:spPr>
           <a:xfrm>
-            <a:off x="822960" y="3931920"/>
-            <a:ext cx="4846320" cy="2011680"/>
+            <a:off x="8046720" y="1737360"/>
+            <a:ext cx="3429000" cy="960120"/>
           </a:xfrm>
           <a:prstGeom prst="rect">
             <a:avLst/>
@@ -8366,93 +8668,35 @@
           <a:bodyPr wrap="square" lIns="0" tIns="0" rIns="0" bIns="0" rtlCol="0" anchor="t"/>
           <a:lstStyle/>
           <a:p>
-            <a:pPr marL="342900" indent="-342900">
-              <a:spcAft>
-                <a:spcPts val="600"/>
-              </a:spcAft>
-              <a:buSzPct val="100000"/>
-              <a:buChar char="•"/>
-            </a:pPr>
-            <a:r>
-              <a:rPr lang="en-US" sz="1500" dirty="0">
+            <a:pPr indent="0" marL="0">
+              <a:buNone/>
+            </a:pPr>
+            <a:r>
+              <a:rPr lang="en-US" sz="1400" dirty="0">
                 <a:solidFill>
                   <a:schemeClr val="bg1"/>
                 </a:solidFill>
               </a:rPr>
-              <a:t>Paired seeds, intervals, exact tests, replayable runs</a:t>
-            </a:r>
-            <a:endParaRPr lang="en-US" sz="1500" dirty="0"/>
-          </a:p>
-          <a:p>
-            <a:pPr marL="342900" indent="-342900">
-              <a:spcAft>
-                <a:spcPts val="600"/>
-              </a:spcAft>
-              <a:buSzPct val="100000"/>
-              <a:buChar char="•"/>
-            </a:pPr>
-            <a:r>
-              <a:rPr lang="en-US" sz="1500" dirty="0">
-                <a:solidFill>
-                  <a:schemeClr val="bg1"/>
-                </a:solidFill>
-              </a:rPr>
-              <a:t>IOS coupled to the approach: approval gate, rate envelope, abort</a:t>
-            </a:r>
-            <a:endParaRPr lang="en-US" sz="1500" dirty="0"/>
-          </a:p>
-          <a:p>
-            <a:pPr marL="342900" indent="-342900">
-              <a:spcAft>
-                <a:spcPts val="600"/>
-              </a:spcAft>
-              <a:buSzPct val="100000"/>
-              <a:buChar char="•"/>
-            </a:pPr>
-            <a:r>
-              <a:rPr lang="en-US" sz="1500" dirty="0">
-                <a:solidFill>
-                  <a:schemeClr val="bg1"/>
-                </a:solidFill>
-              </a:rPr>
-              <a:t>Beacon bench plan B1 to B7 with model-derived limits</a:t>
-            </a:r>
-            <a:endParaRPr lang="en-US" sz="1500" dirty="0"/>
-          </a:p>
-          <a:p>
-            <a:pPr marL="342900" indent="-342900">
-              <a:spcAft>
-                <a:spcPts val="600"/>
-              </a:spcAft>
-              <a:buSzPct val="100000"/>
-              <a:buChar char="•"/>
-            </a:pPr>
-            <a:r>
-              <a:rPr lang="en-US" sz="1500" dirty="0">
-                <a:solidFill>
-                  <a:schemeClr val="bg1"/>
-                </a:solidFill>
-              </a:rPr>
-              <a:t>Leak and sensor faults flagged in 100 of 100 runs</a:t>
-            </a:r>
-            <a:endParaRPr lang="en-US" sz="1500" dirty="0"/>
-          </a:p>
-        </p:txBody>
-      </p:sp>
-      <p:sp>
-        <p:nvSpPr>
-          <p:cNvPr id="14" name="Limits"/>
+              <a:t>Navigation aids, servicer GNC and abort logic, ground platform and approvals</a:t>
+            </a:r>
+            <a:endParaRPr lang="en-US" sz="1400" dirty="0"/>
+          </a:p>
+        </p:txBody>
+      </p:sp>
+      <p:sp>
+        <p:nvSpPr>
+          <p:cNvPr id="7" name="Partial"/>
           <p:cNvSpPr/>
           <p:nvPr/>
         </p:nvSpPr>
         <p:spPr>
           <a:xfrm>
-            <a:off x="6217920" y="3291840"/>
-            <a:ext cx="5422392" cy="2743200"/>
+            <a:off x="7863840" y="2852928"/>
+            <a:ext cx="3776472" cy="1737360"/>
           </a:xfrm>
           <a:prstGeom prst="roundRect">
             <a:avLst>
-              <a:gd name="adj" fmla="val 2667"/>
+              <a:gd name="adj" fmla="val 4211"/>
             </a:avLst>
           </a:prstGeom>
           <a:solidFill>
@@ -8468,14 +8712,14 @@
       </p:sp>
       <p:sp>
         <p:nvSpPr>
-          <p:cNvPr id="15" name="Text 13"/>
+          <p:cNvPr id="8" name="Text 5"/>
           <p:cNvSpPr txBox="1"/>
           <p:nvPr/>
         </p:nvSpPr>
         <p:spPr>
           <a:xfrm>
-            <a:off x="6492240" y="3474720"/>
-            <a:ext cx="4846320" cy="365760"/>
+            <a:off x="8046720" y="2944368"/>
+            <a:ext cx="3383280" cy="320040"/>
           </a:xfrm>
           <a:prstGeom prst="rect">
             <a:avLst/>
@@ -8491,27 +8735,27 @@
               <a:buNone/>
             </a:pPr>
             <a:r>
-              <a:rPr lang="en-US" sz="2000" b="1" dirty="0">
-                <a:solidFill>
-                  <a:schemeClr val="accent4"/>
-                </a:solidFill>
-              </a:rPr>
-              <a:t>Not yet</a:t>
-            </a:r>
-            <a:endParaRPr lang="en-US" sz="2000" dirty="0"/>
-          </a:p>
-        </p:txBody>
-      </p:sp>
-      <p:sp>
-        <p:nvSpPr>
-          <p:cNvPr id="16" name="Text 14"/>
+              <a:rPr lang="en-US" sz="1800" b="1" dirty="0">
+                <a:solidFill>
+                  <a:schemeClr val="accent2"/>
+                </a:solidFill>
+              </a:rPr>
+              <a:t>Partial</a:t>
+            </a:r>
+            <a:endParaRPr lang="en-US" sz="1800" dirty="0"/>
+          </a:p>
+        </p:txBody>
+      </p:sp>
+      <p:sp>
+        <p:nvSpPr>
+          <p:cNvPr id="9" name="Text 6"/>
           <p:cNvSpPr txBox="1"/>
           <p:nvPr/>
         </p:nvSpPr>
         <p:spPr>
           <a:xfrm>
-            <a:off x="6492240" y="3931920"/>
-            <a:ext cx="4846320" cy="2011680"/>
+            <a:off x="8046720" y="3310128"/>
+            <a:ext cx="3429000" cy="1234440"/>
           </a:xfrm>
           <a:prstGeom prst="rect">
             <a:avLst/>
@@ -8523,76 +8767,117 @@
           <a:bodyPr wrap="square" lIns="0" tIns="0" rIns="0" bIns="0" rtlCol="0" anchor="t"/>
           <a:lstStyle/>
           <a:p>
-            <a:pPr marL="342900" indent="-342900">
-              <a:spcAft>
-                <a:spcPts val="600"/>
-              </a:spcAft>
-              <a:buSzPct val="100000"/>
-              <a:buChar char="•"/>
-            </a:pPr>
-            <a:r>
-              <a:rPr lang="en-US" sz="1500" dirty="0">
+            <a:pPr indent="0" marL="0">
+              <a:buNone/>
+            </a:pPr>
+            <a:r>
+              <a:rPr lang="en-US" sz="1400" dirty="0">
                 <a:solidFill>
                   <a:schemeClr val="bg1"/>
                 </a:solidFill>
               </a:rPr>
-              <a:t>No contact or capture model: 'window met' is not a grab</a:t>
-            </a:r>
-            <a:endParaRPr lang="en-US" sz="1500" dirty="0"/>
-          </a:p>
-          <a:p>
-            <a:pPr marL="342900" indent="-342900">
-              <a:spcAft>
-                <a:spcPts val="600"/>
-              </a:spcAft>
-              <a:buSzPct val="100000"/>
-              <a:buChar char="•"/>
-            </a:pPr>
-            <a:r>
-              <a:rPr lang="en-US" sz="1500" dirty="0">
+              <a:t>Service Beacon (no interface or health fields yet), IOS mode, health monitoring (fuel and logs only), capture geometry without loads</a:t>
+            </a:r>
+            <a:endParaRPr lang="en-US" sz="1400" dirty="0"/>
+          </a:p>
+        </p:txBody>
+      </p:sp>
+      <p:sp>
+        <p:nvSpPr>
+          <p:cNvPr id="10" name="Next"/>
+          <p:cNvSpPr/>
+          <p:nvPr/>
+        </p:nvSpPr>
+        <p:spPr>
+          <a:xfrm>
+            <a:off x="7863840" y="4681728"/>
+            <a:ext cx="3776472" cy="1316736"/>
+          </a:xfrm>
+          <a:prstGeom prst="roundRect">
+            <a:avLst>
+              <a:gd name="adj" fmla="val 5556"/>
+            </a:avLst>
+          </a:prstGeom>
+          <a:solidFill>
+            <a:schemeClr val="tx2"/>
+          </a:solidFill>
+          <a:ln w="12700">
+            <a:solidFill>
+              <a:schemeClr val="accent6"/>
+            </a:solidFill>
+            <a:prstDash val="solid"/>
+          </a:ln>
+        </p:spPr>
+      </p:sp>
+      <p:sp>
+        <p:nvSpPr>
+          <p:cNvPr id="11" name="Text 8"/>
+          <p:cNvSpPr txBox="1"/>
+          <p:nvPr/>
+        </p:nvSpPr>
+        <p:spPr>
+          <a:xfrm>
+            <a:off x="8046720" y="4773168"/>
+            <a:ext cx="3383280" cy="320040"/>
+          </a:xfrm>
+          <a:prstGeom prst="rect">
+            <a:avLst/>
+          </a:prstGeom>
+          <a:noFill/>
+          <a:ln/>
+        </p:spPr>
+        <p:txBody>
+          <a:bodyPr wrap="square" lIns="0" tIns="0" rIns="0" bIns="0" rtlCol="0" anchor="t"/>
+          <a:lstStyle/>
+          <a:p>
+            <a:pPr indent="0" marL="0">
+              <a:buNone/>
+            </a:pPr>
+            <a:r>
+              <a:rPr lang="en-US" sz="1800" b="1" dirty="0">
+                <a:solidFill>
+                  <a:schemeClr val="accent4"/>
+                </a:solidFill>
+              </a:rPr>
+              <a:t>Not modelled</a:t>
+            </a:r>
+            <a:endParaRPr lang="en-US" sz="1800" dirty="0"/>
+          </a:p>
+        </p:txBody>
+      </p:sp>
+      <p:sp>
+        <p:nvSpPr>
+          <p:cNvPr id="12" name="Text 9"/>
+          <p:cNvSpPr txBox="1"/>
+          <p:nvPr/>
+        </p:nvSpPr>
+        <p:spPr>
+          <a:xfrm>
+            <a:off x="8046720" y="5138928"/>
+            <a:ext cx="3429000" cy="822960"/>
+          </a:xfrm>
+          <a:prstGeom prst="rect">
+            <a:avLst/>
+          </a:prstGeom>
+          <a:noFill/>
+          <a:ln/>
+        </p:spPr>
+        <p:txBody>
+          <a:bodyPr wrap="square" lIns="0" tIns="0" rIns="0" bIns="0" rtlCol="0" anchor="t"/>
+          <a:lstStyle/>
+          <a:p>
+            <a:pPr indent="0" marL="0">
+              <a:buNone/>
+            </a:pPr>
+            <a:r>
+              <a:rPr lang="en-US" sz="1400" dirty="0">
                 <a:solidFill>
                   <a:schemeClr val="bg1"/>
                 </a:solidFill>
               </a:rPr>
-              <a:t>Retreat passive safety not established</a:t>
-            </a:r>
-            <a:endParaRPr lang="en-US" sz="1500" dirty="0"/>
-          </a:p>
-          <a:p>
-            <a:pPr marL="342900" indent="-342900">
-              <a:spcAft>
-                <a:spcPts val="600"/>
-              </a:spcAft>
-              <a:buSzPct val="100000"/>
-              <a:buChar char="•"/>
-            </a:pPr>
-            <a:r>
-              <a:rPr lang="en-US" sz="1500" dirty="0">
-                <a:solidFill>
-                  <a:schemeClr val="bg1"/>
-                </a:solidFill>
-              </a:rPr>
-              <a:t>No hardware data; costs and noise are assumptions</a:t>
-            </a:r>
-            <a:endParaRPr lang="en-US" sz="1500" dirty="0"/>
-          </a:p>
-          <a:p>
-            <a:pPr marL="342900" indent="-342900">
-              <a:spcAft>
-                <a:spcPts val="600"/>
-              </a:spcAft>
-              <a:buSzPct val="100000"/>
-              <a:buChar char="•"/>
-            </a:pPr>
-            <a:r>
-              <a:rPr lang="en-US" sz="1500" dirty="0">
-                <a:solidFill>
-                  <a:schemeClr val="bg1"/>
-                </a:solidFill>
-              </a:rPr>
-              <a:t>Authentication is a simulation token</a:t>
-            </a:r>
-            <a:endParaRPr lang="en-US" sz="1500" dirty="0"/>
+              <a:t>Utility and fluid transfer, upgrade port, robotic servicing, power and thermal lines</a:t>
+            </a:r>
+            <a:endParaRPr lang="en-US" sz="1400" dirty="0"/>
           </a:p>
         </p:txBody>
       </p:sp>
@@ -8698,7 +8983,7 @@
                   <a:schemeClr val="bg1"/>
                 </a:solidFill>
               </a:rPr>
-              <a:t>A tiered kit that makers add at build time</a:t>
+              <a:t>Built, tested, and honest about its limits</a:t>
             </a:r>
             <a:endParaRPr lang="en-US" sz="3200" dirty="0"/>
           </a:p>
@@ -8706,18 +8991,306 @@
       </p:sp>
       <p:sp>
         <p:nvSpPr>
-          <p:cNvPr id="3" name="Tier 1"/>
+          <p:cNvPr id="3" name="Text 1"/>
+          <p:cNvSpPr txBox="1"/>
+          <p:nvPr/>
+        </p:nvSpPr>
+        <p:spPr>
+          <a:xfrm>
+            <a:off x="548640" y="1417320"/>
+            <a:ext cx="2560320" cy="822960"/>
+          </a:xfrm>
+          <a:prstGeom prst="rect">
+            <a:avLst/>
+          </a:prstGeom>
+          <a:noFill/>
+          <a:ln/>
+        </p:spPr>
+        <p:txBody>
+          <a:bodyPr wrap="square" lIns="0" tIns="0" rIns="0" bIns="0" rtlCol="0" anchor="t"/>
+          <a:lstStyle/>
+          <a:p>
+            <a:pPr indent="0" marL="0">
+              <a:buNone/>
+            </a:pPr>
+            <a:r>
+              <a:rPr lang="en-US" sz="4800" b="1" dirty="0">
+                <a:solidFill>
+                  <a:schemeClr val="accent3"/>
+                </a:solidFill>
+              </a:rPr>
+              <a:t>74</a:t>
+            </a:r>
+            <a:endParaRPr lang="en-US" sz="4800" dirty="0"/>
+          </a:p>
+        </p:txBody>
+      </p:sp>
+      <p:sp>
+        <p:nvSpPr>
+          <p:cNvPr id="4" name="Text 2"/>
+          <p:cNvSpPr txBox="1"/>
+          <p:nvPr/>
+        </p:nvSpPr>
+        <p:spPr>
+          <a:xfrm>
+            <a:off x="548640" y="2286000"/>
+            <a:ext cx="2560320" cy="640080"/>
+          </a:xfrm>
+          <a:prstGeom prst="rect">
+            <a:avLst/>
+          </a:prstGeom>
+          <a:noFill/>
+          <a:ln/>
+        </p:spPr>
+        <p:txBody>
+          <a:bodyPr wrap="square" lIns="0" tIns="0" rIns="0" bIns="0" rtlCol="0" anchor="t"/>
+          <a:lstStyle/>
+          <a:p>
+            <a:pPr indent="0" marL="0">
+              <a:buNone/>
+            </a:pPr>
+            <a:r>
+              <a:rPr lang="en-US" sz="1400" dirty="0">
+                <a:solidFill>
+                  <a:schemeClr val="bg2"/>
+                </a:solidFill>
+              </a:rPr>
+              <a:t>automated tests pass</a:t>
+            </a:r>
+            <a:endParaRPr lang="en-US" sz="1400" dirty="0"/>
+          </a:p>
+        </p:txBody>
+      </p:sp>
+      <p:sp>
+        <p:nvSpPr>
+          <p:cNvPr id="5" name="Text 3"/>
+          <p:cNvSpPr txBox="1"/>
+          <p:nvPr/>
+        </p:nvSpPr>
+        <p:spPr>
+          <a:xfrm>
+            <a:off x="3291840" y="1417320"/>
+            <a:ext cx="2560320" cy="822960"/>
+          </a:xfrm>
+          <a:prstGeom prst="rect">
+            <a:avLst/>
+          </a:prstGeom>
+          <a:noFill/>
+          <a:ln/>
+        </p:spPr>
+        <p:txBody>
+          <a:bodyPr wrap="square" lIns="0" tIns="0" rIns="0" bIns="0" rtlCol="0" anchor="t"/>
+          <a:lstStyle/>
+          <a:p>
+            <a:pPr indent="0" marL="0">
+              <a:buNone/>
+            </a:pPr>
+            <a:r>
+              <a:rPr lang="en-US" sz="4800" b="1" dirty="0">
+                <a:solidFill>
+                  <a:schemeClr val="accent1"/>
+                </a:solidFill>
+              </a:rPr>
+              <a:t>41,240</a:t>
+            </a:r>
+            <a:endParaRPr lang="en-US" sz="4800" dirty="0"/>
+          </a:p>
+        </p:txBody>
+      </p:sp>
+      <p:sp>
+        <p:nvSpPr>
+          <p:cNvPr id="6" name="Text 4"/>
+          <p:cNvSpPr txBox="1"/>
+          <p:nvPr/>
+        </p:nvSpPr>
+        <p:spPr>
+          <a:xfrm>
+            <a:off x="3291840" y="2286000"/>
+            <a:ext cx="2560320" cy="640080"/>
+          </a:xfrm>
+          <a:prstGeom prst="rect">
+            <a:avLst/>
+          </a:prstGeom>
+          <a:noFill/>
+          <a:ln/>
+        </p:spPr>
+        <p:txBody>
+          <a:bodyPr wrap="square" lIns="0" tIns="0" rIns="0" bIns="0" rtlCol="0" anchor="t"/>
+          <a:lstStyle/>
+          <a:p>
+            <a:pPr indent="0" marL="0">
+              <a:buNone/>
+            </a:pPr>
+            <a:r>
+              <a:rPr lang="en-US" sz="1400" dirty="0">
+                <a:solidFill>
+                  <a:schemeClr val="bg2"/>
+                </a:solidFill>
+              </a:rPr>
+              <a:t>simulated approaches (35,100 + 6,140)</a:t>
+            </a:r>
+            <a:endParaRPr lang="en-US" sz="1400" dirty="0"/>
+          </a:p>
+        </p:txBody>
+      </p:sp>
+      <p:sp>
+        <p:nvSpPr>
+          <p:cNvPr id="7" name="Text 5"/>
+          <p:cNvSpPr txBox="1"/>
+          <p:nvPr/>
+        </p:nvSpPr>
+        <p:spPr>
+          <a:xfrm>
+            <a:off x="6035040" y="1417320"/>
+            <a:ext cx="2560320" cy="822960"/>
+          </a:xfrm>
+          <a:prstGeom prst="rect">
+            <a:avLst/>
+          </a:prstGeom>
+          <a:noFill/>
+          <a:ln/>
+        </p:spPr>
+        <p:txBody>
+          <a:bodyPr wrap="square" lIns="0" tIns="0" rIns="0" bIns="0" rtlCol="0" anchor="t"/>
+          <a:lstStyle/>
+          <a:p>
+            <a:pPr indent="0" marL="0">
+              <a:buNone/>
+            </a:pPr>
+            <a:r>
+              <a:rPr lang="en-US" sz="4800" b="1" dirty="0">
+                <a:solidFill>
+                  <a:schemeClr val="accent2"/>
+                </a:solidFill>
+              </a:rPr>
+              <a:t>0 / 6,140</a:t>
+            </a:r>
+            <a:endParaRPr lang="en-US" sz="4800" dirty="0"/>
+          </a:p>
+        </p:txBody>
+      </p:sp>
+      <p:sp>
+        <p:nvSpPr>
+          <p:cNvPr id="8" name="Text 6"/>
+          <p:cNvSpPr txBox="1"/>
+          <p:nvPr/>
+        </p:nvSpPr>
+        <p:spPr>
+          <a:xfrm>
+            <a:off x="6035040" y="2286000"/>
+            <a:ext cx="2560320" cy="640080"/>
+          </a:xfrm>
+          <a:prstGeom prst="rect">
+            <a:avLst/>
+          </a:prstGeom>
+          <a:noFill/>
+          <a:ln/>
+        </p:spPr>
+        <p:txBody>
+          <a:bodyPr wrap="square" lIns="0" tIns="0" rIns="0" bIns="0" rtlCol="0" anchor="t"/>
+          <a:lstStyle/>
+          <a:p>
+            <a:pPr indent="0" marL="0">
+              <a:buNone/>
+            </a:pPr>
+            <a:r>
+              <a:rPr lang="en-US" sz="1400" dirty="0">
+                <a:solidFill>
+                  <a:schemeClr val="bg2"/>
+                </a:solidFill>
+              </a:rPr>
+              <a:t>keep-out violations (a count, not a bound)</a:t>
+            </a:r>
+            <a:endParaRPr lang="en-US" sz="1400" dirty="0"/>
+          </a:p>
+        </p:txBody>
+      </p:sp>
+      <p:sp>
+        <p:nvSpPr>
+          <p:cNvPr id="9" name="Text 7"/>
+          <p:cNvSpPr txBox="1"/>
+          <p:nvPr/>
+        </p:nvSpPr>
+        <p:spPr>
+          <a:xfrm>
+            <a:off x="8778240" y="1417320"/>
+            <a:ext cx="2834640" cy="822960"/>
+          </a:xfrm>
+          <a:prstGeom prst="rect">
+            <a:avLst/>
+          </a:prstGeom>
+          <a:noFill/>
+          <a:ln/>
+        </p:spPr>
+        <p:txBody>
+          <a:bodyPr wrap="square" lIns="0" tIns="0" rIns="0" bIns="0" rtlCol="0" anchor="t"/>
+          <a:lstStyle/>
+          <a:p>
+            <a:pPr indent="0" marL="0">
+              <a:buNone/>
+            </a:pPr>
+            <a:r>
+              <a:rPr lang="en-US" sz="4800" b="1" dirty="0">
+                <a:solidFill>
+                  <a:schemeClr val="accent3"/>
+                </a:solidFill>
+              </a:rPr>
+              <a:t>1.2 kg</a:t>
+            </a:r>
+            <a:endParaRPr lang="en-US" sz="4800" dirty="0"/>
+          </a:p>
+        </p:txBody>
+      </p:sp>
+      <p:sp>
+        <p:nvSpPr>
+          <p:cNvPr id="10" name="Text 8"/>
+          <p:cNvSpPr txBox="1"/>
+          <p:nvPr/>
+        </p:nvSpPr>
+        <p:spPr>
+          <a:xfrm>
+            <a:off x="8778240" y="2286000"/>
+            <a:ext cx="2834640" cy="640080"/>
+          </a:xfrm>
+          <a:prstGeom prst="rect">
+            <a:avLst/>
+          </a:prstGeom>
+          <a:noFill/>
+          <a:ln/>
+        </p:spPr>
+        <p:txBody>
+          <a:bodyPr wrap="square" lIns="0" tIns="0" rIns="0" bIns="0" rtlCol="0" anchor="t"/>
+          <a:lstStyle/>
+          <a:p>
+            <a:pPr indent="0" marL="0">
+              <a:buNone/>
+            </a:pPr>
+            <a:r>
+              <a:rPr lang="en-US" sz="1400" dirty="0">
+                <a:solidFill>
+                  <a:schemeClr val="bg2"/>
+                </a:solidFill>
+              </a:rPr>
+              <a:t>fuel gauge error from 800 kg</a:t>
+            </a:r>
+            <a:endParaRPr lang="en-US" sz="1400" dirty="0"/>
+          </a:p>
+        </p:txBody>
+      </p:sp>
+      <p:sp>
+        <p:nvSpPr>
+          <p:cNvPr id="11" name="Verified"/>
           <p:cNvSpPr/>
           <p:nvPr/>
         </p:nvSpPr>
         <p:spPr>
           <a:xfrm>
-            <a:off x="548640" y="1463040"/>
-            <a:ext cx="2651760" cy="3566160"/>
+            <a:off x="548640" y="3291840"/>
+            <a:ext cx="5394960" cy="2743200"/>
           </a:xfrm>
           <a:prstGeom prst="roundRect">
             <a:avLst>
-              <a:gd name="adj" fmla="val 2759"/>
+              <a:gd name="adj" fmla="val 2667"/>
             </a:avLst>
           </a:prstGeom>
           <a:solidFill>
@@ -8733,14 +9306,14 @@
       </p:sp>
       <p:sp>
         <p:nvSpPr>
-          <p:cNvPr id="4" name="Text 2"/>
+          <p:cNvPr id="12" name="Text 10"/>
           <p:cNvSpPr txBox="1"/>
           <p:nvPr/>
         </p:nvSpPr>
         <p:spPr>
           <a:xfrm>
-            <a:off x="777240" y="1645920"/>
-            <a:ext cx="2194560" cy="365760"/>
+            <a:off x="822960" y="3474720"/>
+            <a:ext cx="4846320" cy="365760"/>
           </a:xfrm>
           <a:prstGeom prst="rect">
             <a:avLst/>
@@ -8756,27 +9329,27 @@
               <a:buNone/>
             </a:pPr>
             <a:r>
-              <a:rPr lang="en-US" sz="1400" dirty="0">
-                <a:solidFill>
-                  <a:schemeClr val="bg2"/>
-                </a:solidFill>
-              </a:rPr>
-              <a:t>Tier 1</a:t>
-            </a:r>
-            <a:endParaRPr lang="en-US" sz="1400" dirty="0"/>
-          </a:p>
-        </p:txBody>
-      </p:sp>
-      <p:sp>
-        <p:nvSpPr>
-          <p:cNvPr id="5" name="Text 3"/>
+              <a:rPr lang="en-US" sz="2000" b="1" dirty="0">
+                <a:solidFill>
+                  <a:schemeClr val="accent3"/>
+                </a:solidFill>
+              </a:rPr>
+              <a:t>Verified</a:t>
+            </a:r>
+            <a:endParaRPr lang="en-US" sz="2000" dirty="0"/>
+          </a:p>
+        </p:txBody>
+      </p:sp>
+      <p:sp>
+        <p:nvSpPr>
+          <p:cNvPr id="13" name="Text 11"/>
           <p:cNvSpPr txBox="1"/>
           <p:nvPr/>
         </p:nvSpPr>
         <p:spPr>
           <a:xfrm>
-            <a:off x="777240" y="2011680"/>
-            <a:ext cx="2194560" cy="731520"/>
+            <a:off x="822960" y="3931920"/>
+            <a:ext cx="4846320" cy="2011680"/>
           </a:xfrm>
           <a:prstGeom prst="rect">
             <a:avLst/>
@@ -8788,44 +9361,12 @@
           <a:bodyPr wrap="square" lIns="0" tIns="0" rIns="0" bIns="0" rtlCol="0" anchor="t"/>
           <a:lstStyle/>
           <a:p>
-            <a:pPr indent="0" marL="0">
-              <a:buNone/>
-            </a:pPr>
-            <a:r>
-              <a:rPr lang="en-US" sz="2000" b="1" dirty="0">
-                <a:solidFill>
-                  <a:schemeClr val="accent1"/>
-                </a:solidFill>
-              </a:rPr>
-              <a:t>EOL-ready</a:t>
-            </a:r>
-            <a:endParaRPr lang="en-US" sz="2000" dirty="0"/>
-          </a:p>
-        </p:txBody>
-      </p:sp>
-      <p:sp>
-        <p:nvSpPr>
-          <p:cNvPr id="6" name="Text 4"/>
-          <p:cNvSpPr txBox="1"/>
-          <p:nvPr/>
-        </p:nvSpPr>
-        <p:spPr>
-          <a:xfrm>
-            <a:off x="777240" y="2788920"/>
-            <a:ext cx="2194560" cy="731520"/>
-          </a:xfrm>
-          <a:prstGeom prst="rect">
-            <a:avLst/>
-          </a:prstGeom>
-          <a:noFill/>
-          <a:ln/>
-        </p:spPr>
-        <p:txBody>
-          <a:bodyPr wrap="square" lIns="0" tIns="0" rIns="0" bIns="0" rtlCol="0" anchor="t"/>
-          <a:lstStyle/>
-          <a:p>
-            <a:pPr indent="0" marL="0">
-              <a:buNone/>
+            <a:pPr marL="342900" indent="-342900">
+              <a:spcAft>
+                <a:spcPts val="600"/>
+              </a:spcAft>
+              <a:buSzPct val="100000"/>
+              <a:buChar char="•"/>
             </a:pPr>
             <a:r>
               <a:rPr lang="en-US" sz="1500" dirty="0">
@@ -8833,98 +9374,80 @@
                   <a:schemeClr val="bg1"/>
                 </a:solidFill>
               </a:rPr>
-              <a:t>Capture fixture + markers</a:t>
+              <a:t>Paired seeds, intervals, exact tests, replayable runs</a:t>
             </a:r>
             <a:endParaRPr lang="en-US" sz="1500" dirty="0"/>
           </a:p>
-        </p:txBody>
-      </p:sp>
-      <p:sp>
-        <p:nvSpPr>
-          <p:cNvPr id="7" name="Text 5"/>
-          <p:cNvSpPr txBox="1"/>
-          <p:nvPr/>
-        </p:nvSpPr>
-        <p:spPr>
-          <a:xfrm>
-            <a:off x="777240" y="3611880"/>
-            <a:ext cx="2194560" cy="457200"/>
-          </a:xfrm>
-          <a:prstGeom prst="rect">
-            <a:avLst/>
-          </a:prstGeom>
-          <a:noFill/>
-          <a:ln/>
-        </p:spPr>
-        <p:txBody>
-          <a:bodyPr wrap="square" lIns="0" tIns="0" rIns="0" bIns="0" rtlCol="0" anchor="t"/>
-          <a:lstStyle/>
-          <a:p>
-            <a:pPr indent="0" marL="0">
-              <a:buNone/>
-            </a:pPr>
-            <a:r>
-              <a:rPr lang="en-US" sz="2400" b="1" dirty="0">
-                <a:solidFill>
-                  <a:schemeClr val="accent2"/>
-                </a:solidFill>
-              </a:rPr>
-              <a:t>EUR 0.36 M</a:t>
-            </a:r>
-            <a:endParaRPr lang="en-US" sz="2400" dirty="0"/>
-          </a:p>
-        </p:txBody>
-      </p:sp>
-      <p:sp>
-        <p:nvSpPr>
-          <p:cNvPr id="8" name="Text 6"/>
-          <p:cNvSpPr txBox="1"/>
-          <p:nvPr/>
-        </p:nvSpPr>
-        <p:spPr>
-          <a:xfrm>
-            <a:off x="777240" y="4160520"/>
-            <a:ext cx="2194560" cy="640080"/>
-          </a:xfrm>
-          <a:prstGeom prst="rect">
-            <a:avLst/>
-          </a:prstGeom>
-          <a:noFill/>
-          <a:ln/>
-        </p:spPr>
-        <p:txBody>
-          <a:bodyPr wrap="square" lIns="0" tIns="0" rIns="0" bIns="0" rtlCol="0" anchor="t"/>
-          <a:lstStyle/>
-          <a:p>
-            <a:pPr indent="0" marL="0">
-              <a:buNone/>
-            </a:pPr>
-            <a:r>
-              <a:rPr lang="en-US" sz="1400" dirty="0">
-                <a:solidFill>
-                  <a:schemeClr val="bg2"/>
-                </a:solidFill>
-              </a:rPr>
-              <a:t>enables: Removal</a:t>
-            </a:r>
-            <a:endParaRPr lang="en-US" sz="1400" dirty="0"/>
-          </a:p>
-        </p:txBody>
-      </p:sp>
-      <p:sp>
-        <p:nvSpPr>
-          <p:cNvPr id="9" name="Tier 2"/>
+          <a:p>
+            <a:pPr marL="342900" indent="-342900">
+              <a:spcAft>
+                <a:spcPts val="600"/>
+              </a:spcAft>
+              <a:buSzPct val="100000"/>
+              <a:buChar char="•"/>
+            </a:pPr>
+            <a:r>
+              <a:rPr lang="en-US" sz="1500" dirty="0">
+                <a:solidFill>
+                  <a:schemeClr val="bg1"/>
+                </a:solidFill>
+              </a:rPr>
+              <a:t>IOS coupled to the approach: approval gate, rate envelope, abort</a:t>
+            </a:r>
+            <a:endParaRPr lang="en-US" sz="1500" dirty="0"/>
+          </a:p>
+          <a:p>
+            <a:pPr marL="342900" indent="-342900">
+              <a:spcAft>
+                <a:spcPts val="600"/>
+              </a:spcAft>
+              <a:buSzPct val="100000"/>
+              <a:buChar char="•"/>
+            </a:pPr>
+            <a:r>
+              <a:rPr lang="en-US" sz="1500" dirty="0">
+                <a:solidFill>
+                  <a:schemeClr val="bg1"/>
+                </a:solidFill>
+              </a:rPr>
+              <a:t>Beacon bench plan B1 to B7 with model-derived limits</a:t>
+            </a:r>
+            <a:endParaRPr lang="en-US" sz="1500" dirty="0"/>
+          </a:p>
+          <a:p>
+            <a:pPr marL="342900" indent="-342900">
+              <a:spcAft>
+                <a:spcPts val="600"/>
+              </a:spcAft>
+              <a:buSzPct val="100000"/>
+              <a:buChar char="•"/>
+            </a:pPr>
+            <a:r>
+              <a:rPr lang="en-US" sz="1500" dirty="0">
+                <a:solidFill>
+                  <a:schemeClr val="bg1"/>
+                </a:solidFill>
+              </a:rPr>
+              <a:t>Leak and sensor faults flagged in 100 of 100 runs</a:t>
+            </a:r>
+            <a:endParaRPr lang="en-US" sz="1500" dirty="0"/>
+          </a:p>
+        </p:txBody>
+      </p:sp>
+      <p:sp>
+        <p:nvSpPr>
+          <p:cNvPr id="14" name="Limits"/>
           <p:cNvSpPr/>
           <p:nvPr/>
         </p:nvSpPr>
         <p:spPr>
           <a:xfrm>
-            <a:off x="3355848" y="1463040"/>
-            <a:ext cx="2651760" cy="3566160"/>
+            <a:off x="6217920" y="3291840"/>
+            <a:ext cx="5422392" cy="2743200"/>
           </a:xfrm>
           <a:prstGeom prst="roundRect">
             <a:avLst>
-              <a:gd name="adj" fmla="val 2759"/>
+              <a:gd name="adj" fmla="val 2667"/>
             </a:avLst>
           </a:prstGeom>
           <a:solidFill>
@@ -8940,14 +9463,14 @@
       </p:sp>
       <p:sp>
         <p:nvSpPr>
-          <p:cNvPr id="10" name="Text 8"/>
+          <p:cNvPr id="15" name="Text 13"/>
           <p:cNvSpPr txBox="1"/>
           <p:nvPr/>
         </p:nvSpPr>
         <p:spPr>
           <a:xfrm>
-            <a:off x="3584448" y="1645920"/>
-            <a:ext cx="2194560" cy="365760"/>
+            <a:off x="6492240" y="3474720"/>
+            <a:ext cx="4846320" cy="365760"/>
           </a:xfrm>
           <a:prstGeom prst="rect">
             <a:avLst/>
@@ -8963,27 +9486,27 @@
               <a:buNone/>
             </a:pPr>
             <a:r>
-              <a:rPr lang="en-US" sz="1400" dirty="0">
-                <a:solidFill>
-                  <a:schemeClr val="bg2"/>
-                </a:solidFill>
-              </a:rPr>
-              <a:t>Tier 2</a:t>
-            </a:r>
-            <a:endParaRPr lang="en-US" sz="1400" dirty="0"/>
-          </a:p>
-        </p:txBody>
-      </p:sp>
-      <p:sp>
-        <p:nvSpPr>
-          <p:cNvPr id="11" name="Text 9"/>
+              <a:rPr lang="en-US" sz="2000" b="1" dirty="0">
+                <a:solidFill>
+                  <a:schemeClr val="accent4"/>
+                </a:solidFill>
+              </a:rPr>
+              <a:t>Not yet</a:t>
+            </a:r>
+            <a:endParaRPr lang="en-US" sz="2000" dirty="0"/>
+          </a:p>
+        </p:txBody>
+      </p:sp>
+      <p:sp>
+        <p:nvSpPr>
+          <p:cNvPr id="16" name="Text 14"/>
           <p:cNvSpPr txBox="1"/>
           <p:nvPr/>
         </p:nvSpPr>
         <p:spPr>
           <a:xfrm>
-            <a:off x="3584448" y="2011680"/>
-            <a:ext cx="2194560" cy="731520"/>
+            <a:off x="6492240" y="3931920"/>
+            <a:ext cx="4846320" cy="2011680"/>
           </a:xfrm>
           <a:prstGeom prst="rect">
             <a:avLst/>
@@ -8995,44 +9518,12 @@
           <a:bodyPr wrap="square" lIns="0" tIns="0" rIns="0" bIns="0" rtlCol="0" anchor="t"/>
           <a:lstStyle/>
           <a:p>
-            <a:pPr indent="0" marL="0">
-              <a:buNone/>
-            </a:pPr>
-            <a:r>
-              <a:rPr lang="en-US" sz="2000" b="1" dirty="0">
-                <a:solidFill>
-                  <a:schemeClr val="accent1"/>
-                </a:solidFill>
-              </a:rPr>
-              <a:t>Service-ready</a:t>
-            </a:r>
-            <a:endParaRPr lang="en-US" sz="2000" dirty="0"/>
-          </a:p>
-        </p:txBody>
-      </p:sp>
-      <p:sp>
-        <p:nvSpPr>
-          <p:cNvPr id="12" name="Text 10"/>
-          <p:cNvSpPr txBox="1"/>
-          <p:nvPr/>
-        </p:nvSpPr>
-        <p:spPr>
-          <a:xfrm>
-            <a:off x="3584448" y="2788920"/>
-            <a:ext cx="2194560" cy="731520"/>
-          </a:xfrm>
-          <a:prstGeom prst="rect">
-            <a:avLst/>
-          </a:prstGeom>
-          <a:noFill/>
-          <a:ln/>
-        </p:spPr>
-        <p:txBody>
-          <a:bodyPr wrap="square" lIns="0" tIns="0" rIns="0" bIns="0" rtlCol="0" anchor="t"/>
-          <a:lstStyle/>
-          <a:p>
-            <a:pPr indent="0" marL="0">
-              <a:buNone/>
+            <a:pPr marL="342900" indent="-342900">
+              <a:spcAft>
+                <a:spcPts val="600"/>
+              </a:spcAft>
+              <a:buSzPct val="100000"/>
+              <a:buChar char="•"/>
             </a:pPr>
             <a:r>
               <a:rPr lang="en-US" sz="1500" dirty="0">
@@ -9040,206 +9531,17 @@
                   <a:schemeClr val="bg1"/>
                 </a:solidFill>
               </a:rPr>
-              <a:t>+ IOS mode + beacon</a:t>
+              <a:t>No contact or capture model: 'window met' is not a grab</a:t>
             </a:r>
             <a:endParaRPr lang="en-US" sz="1500" dirty="0"/>
           </a:p>
-        </p:txBody>
-      </p:sp>
-      <p:sp>
-        <p:nvSpPr>
-          <p:cNvPr id="13" name="Text 11"/>
-          <p:cNvSpPr txBox="1"/>
-          <p:nvPr/>
-        </p:nvSpPr>
-        <p:spPr>
-          <a:xfrm>
-            <a:off x="3584448" y="3611880"/>
-            <a:ext cx="2194560" cy="457200"/>
-          </a:xfrm>
-          <a:prstGeom prst="rect">
-            <a:avLst/>
-          </a:prstGeom>
-          <a:noFill/>
-          <a:ln/>
-        </p:spPr>
-        <p:txBody>
-          <a:bodyPr wrap="square" lIns="0" tIns="0" rIns="0" bIns="0" rtlCol="0" anchor="t"/>
-          <a:lstStyle/>
-          <a:p>
-            <a:pPr indent="0" marL="0">
-              <a:buNone/>
-            </a:pPr>
-            <a:r>
-              <a:rPr lang="en-US" sz="2400" b="1" dirty="0">
-                <a:solidFill>
-                  <a:schemeClr val="accent2"/>
-                </a:solidFill>
-              </a:rPr>
-              <a:t>EUR 1.46 M</a:t>
-            </a:r>
-            <a:endParaRPr lang="en-US" sz="2400" dirty="0"/>
-          </a:p>
-        </p:txBody>
-      </p:sp>
-      <p:sp>
-        <p:nvSpPr>
-          <p:cNvPr id="14" name="Text 12"/>
-          <p:cNvSpPr txBox="1"/>
-          <p:nvPr/>
-        </p:nvSpPr>
-        <p:spPr>
-          <a:xfrm>
-            <a:off x="3584448" y="4160520"/>
-            <a:ext cx="2194560" cy="640080"/>
-          </a:xfrm>
-          <a:prstGeom prst="rect">
-            <a:avLst/>
-          </a:prstGeom>
-          <a:noFill/>
-          <a:ln/>
-        </p:spPr>
-        <p:txBody>
-          <a:bodyPr wrap="square" lIns="0" tIns="0" rIns="0" bIns="0" rtlCol="0" anchor="t"/>
-          <a:lstStyle/>
-          <a:p>
-            <a:pPr indent="0" marL="0">
-              <a:buNone/>
-            </a:pPr>
-            <a:r>
-              <a:rPr lang="en-US" sz="1400" dirty="0">
-                <a:solidFill>
-                  <a:schemeClr val="bg2"/>
-                </a:solidFill>
-              </a:rPr>
-              <a:t>enables: Attached propulsion</a:t>
-            </a:r>
-            <a:endParaRPr lang="en-US" sz="1400" dirty="0"/>
-          </a:p>
-        </p:txBody>
-      </p:sp>
-      <p:sp>
-        <p:nvSpPr>
-          <p:cNvPr id="15" name="Tier 3"/>
-          <p:cNvSpPr/>
-          <p:nvPr/>
-        </p:nvSpPr>
-        <p:spPr>
-          <a:xfrm>
-            <a:off x="6163056" y="1463040"/>
-            <a:ext cx="2651760" cy="3566160"/>
-          </a:xfrm>
-          <a:prstGeom prst="roundRect">
-            <a:avLst>
-              <a:gd name="adj" fmla="val 2759"/>
-            </a:avLst>
-          </a:prstGeom>
-          <a:solidFill>
-            <a:schemeClr val="tx2"/>
-          </a:solidFill>
-          <a:ln w="12700">
-            <a:solidFill>
-              <a:schemeClr val="accent6"/>
-            </a:solidFill>
-            <a:prstDash val="solid"/>
-          </a:ln>
-        </p:spPr>
-      </p:sp>
-      <p:sp>
-        <p:nvSpPr>
-          <p:cNvPr id="16" name="Text 14"/>
-          <p:cNvSpPr txBox="1"/>
-          <p:nvPr/>
-        </p:nvSpPr>
-        <p:spPr>
-          <a:xfrm>
-            <a:off x="6391656" y="1645920"/>
-            <a:ext cx="2194560" cy="365760"/>
-          </a:xfrm>
-          <a:prstGeom prst="rect">
-            <a:avLst/>
-          </a:prstGeom>
-          <a:noFill/>
-          <a:ln/>
-        </p:spPr>
-        <p:txBody>
-          <a:bodyPr wrap="square" lIns="0" tIns="0" rIns="0" bIns="0" rtlCol="0" anchor="t"/>
-          <a:lstStyle/>
-          <a:p>
-            <a:pPr indent="0" marL="0">
-              <a:buNone/>
-            </a:pPr>
-            <a:r>
-              <a:rPr lang="en-US" sz="1400" dirty="0">
-                <a:solidFill>
-                  <a:schemeClr val="bg2"/>
-                </a:solidFill>
-              </a:rPr>
-              <a:t>Tier 3</a:t>
-            </a:r>
-            <a:endParaRPr lang="en-US" sz="1400" dirty="0"/>
-          </a:p>
-        </p:txBody>
-      </p:sp>
-      <p:sp>
-        <p:nvSpPr>
-          <p:cNvPr id="17" name="Text 15"/>
-          <p:cNvSpPr txBox="1"/>
-          <p:nvPr/>
-        </p:nvSpPr>
-        <p:spPr>
-          <a:xfrm>
-            <a:off x="6391656" y="2011680"/>
-            <a:ext cx="2194560" cy="731520"/>
-          </a:xfrm>
-          <a:prstGeom prst="rect">
-            <a:avLst/>
-          </a:prstGeom>
-          <a:noFill/>
-          <a:ln/>
-        </p:spPr>
-        <p:txBody>
-          <a:bodyPr wrap="square" lIns="0" tIns="0" rIns="0" bIns="0" rtlCol="0" anchor="t"/>
-          <a:lstStyle/>
-          <a:p>
-            <a:pPr indent="0" marL="0">
-              <a:buNone/>
-            </a:pPr>
-            <a:r>
-              <a:rPr lang="en-US" sz="2000" b="1" dirty="0">
-                <a:solidFill>
-                  <a:schemeClr val="accent1"/>
-                </a:solidFill>
-              </a:rPr>
-              <a:t>Life-extension-ready</a:t>
-            </a:r>
-            <a:endParaRPr lang="en-US" sz="2000" dirty="0"/>
-          </a:p>
-        </p:txBody>
-      </p:sp>
-      <p:sp>
-        <p:nvSpPr>
-          <p:cNvPr id="18" name="Text 16"/>
-          <p:cNvSpPr txBox="1"/>
-          <p:nvPr/>
-        </p:nvSpPr>
-        <p:spPr>
-          <a:xfrm>
-            <a:off x="6391656" y="2788920"/>
-            <a:ext cx="2194560" cy="731520"/>
-          </a:xfrm>
-          <a:prstGeom prst="rect">
-            <a:avLst/>
-          </a:prstGeom>
-          <a:noFill/>
-          <a:ln/>
-        </p:spPr>
-        <p:txBody>
-          <a:bodyPr wrap="square" lIns="0" tIns="0" rIns="0" bIns="0" rtlCol="0" anchor="t"/>
-          <a:lstStyle/>
-          <a:p>
-            <a:pPr indent="0" marL="0">
-              <a:buNone/>
+          <a:p>
+            <a:pPr marL="342900" indent="-342900">
+              <a:spcAft>
+                <a:spcPts val="600"/>
+              </a:spcAft>
+              <a:buSzPct val="100000"/>
+              <a:buChar char="•"/>
             </a:pPr>
             <a:r>
               <a:rPr lang="en-US" sz="1500" dirty="0">
@@ -9247,206 +9549,17 @@
                   <a:schemeClr val="bg1"/>
                 </a:solidFill>
               </a:rPr>
-              <a:t>+ refuelling port</a:t>
+              <a:t>Retreat passive safety not established</a:t>
             </a:r>
             <a:endParaRPr lang="en-US" sz="1500" dirty="0"/>
           </a:p>
-        </p:txBody>
-      </p:sp>
-      <p:sp>
-        <p:nvSpPr>
-          <p:cNvPr id="19" name="Text 17"/>
-          <p:cNvSpPr txBox="1"/>
-          <p:nvPr/>
-        </p:nvSpPr>
-        <p:spPr>
-          <a:xfrm>
-            <a:off x="6391656" y="3611880"/>
-            <a:ext cx="2194560" cy="457200"/>
-          </a:xfrm>
-          <a:prstGeom prst="rect">
-            <a:avLst/>
-          </a:prstGeom>
-          <a:noFill/>
-          <a:ln/>
-        </p:spPr>
-        <p:txBody>
-          <a:bodyPr wrap="square" lIns="0" tIns="0" rIns="0" bIns="0" rtlCol="0" anchor="t"/>
-          <a:lstStyle/>
-          <a:p>
-            <a:pPr indent="0" marL="0">
-              <a:buNone/>
-            </a:pPr>
-            <a:r>
-              <a:rPr lang="en-US" sz="2400" b="1" dirty="0">
-                <a:solidFill>
-                  <a:schemeClr val="accent2"/>
-                </a:solidFill>
-              </a:rPr>
-              <a:t>EUR 2.18 M</a:t>
-            </a:r>
-            <a:endParaRPr lang="en-US" sz="2400" dirty="0"/>
-          </a:p>
-        </p:txBody>
-      </p:sp>
-      <p:sp>
-        <p:nvSpPr>
-          <p:cNvPr id="20" name="Text 18"/>
-          <p:cNvSpPr txBox="1"/>
-          <p:nvPr/>
-        </p:nvSpPr>
-        <p:spPr>
-          <a:xfrm>
-            <a:off x="6391656" y="4160520"/>
-            <a:ext cx="2194560" cy="640080"/>
-          </a:xfrm>
-          <a:prstGeom prst="rect">
-            <a:avLst/>
-          </a:prstGeom>
-          <a:noFill/>
-          <a:ln/>
-        </p:spPr>
-        <p:txBody>
-          <a:bodyPr wrap="square" lIns="0" tIns="0" rIns="0" bIns="0" rtlCol="0" anchor="t"/>
-          <a:lstStyle/>
-          <a:p>
-            <a:pPr indent="0" marL="0">
-              <a:buNone/>
-            </a:pPr>
-            <a:r>
-              <a:rPr lang="en-US" sz="1400" dirty="0">
-                <a:solidFill>
-                  <a:schemeClr val="bg2"/>
-                </a:solidFill>
-              </a:rPr>
-              <a:t>enables: Refuel and release</a:t>
-            </a:r>
-            <a:endParaRPr lang="en-US" sz="1400" dirty="0"/>
-          </a:p>
-        </p:txBody>
-      </p:sp>
-      <p:sp>
-        <p:nvSpPr>
-          <p:cNvPr id="21" name="Tier 4"/>
-          <p:cNvSpPr/>
-          <p:nvPr/>
-        </p:nvSpPr>
-        <p:spPr>
-          <a:xfrm>
-            <a:off x="8970264" y="1463040"/>
-            <a:ext cx="2651760" cy="3566160"/>
-          </a:xfrm>
-          <a:prstGeom prst="roundRect">
-            <a:avLst>
-              <a:gd name="adj" fmla="val 2759"/>
-            </a:avLst>
-          </a:prstGeom>
-          <a:solidFill>
-            <a:schemeClr val="tx2"/>
-          </a:solidFill>
-          <a:ln w="12700">
-            <a:solidFill>
-              <a:schemeClr val="accent6"/>
-            </a:solidFill>
-            <a:prstDash val="solid"/>
-          </a:ln>
-        </p:spPr>
-      </p:sp>
-      <p:sp>
-        <p:nvSpPr>
-          <p:cNvPr id="22" name="Text 20"/>
-          <p:cNvSpPr txBox="1"/>
-          <p:nvPr/>
-        </p:nvSpPr>
-        <p:spPr>
-          <a:xfrm>
-            <a:off x="9198864" y="1645920"/>
-            <a:ext cx="2194560" cy="365760"/>
-          </a:xfrm>
-          <a:prstGeom prst="rect">
-            <a:avLst/>
-          </a:prstGeom>
-          <a:noFill/>
-          <a:ln/>
-        </p:spPr>
-        <p:txBody>
-          <a:bodyPr wrap="square" lIns="0" tIns="0" rIns="0" bIns="0" rtlCol="0" anchor="t"/>
-          <a:lstStyle/>
-          <a:p>
-            <a:pPr indent="0" marL="0">
-              <a:buNone/>
-            </a:pPr>
-            <a:r>
-              <a:rPr lang="en-US" sz="1400" dirty="0">
-                <a:solidFill>
-                  <a:schemeClr val="bg2"/>
-                </a:solidFill>
-              </a:rPr>
-              <a:t>Tier 4</a:t>
-            </a:r>
-            <a:endParaRPr lang="en-US" sz="1400" dirty="0"/>
-          </a:p>
-        </p:txBody>
-      </p:sp>
-      <p:sp>
-        <p:nvSpPr>
-          <p:cNvPr id="23" name="Text 21"/>
-          <p:cNvSpPr txBox="1"/>
-          <p:nvPr/>
-        </p:nvSpPr>
-        <p:spPr>
-          <a:xfrm>
-            <a:off x="9198864" y="2011680"/>
-            <a:ext cx="2194560" cy="731520"/>
-          </a:xfrm>
-          <a:prstGeom prst="rect">
-            <a:avLst/>
-          </a:prstGeom>
-          <a:noFill/>
-          <a:ln/>
-        </p:spPr>
-        <p:txBody>
-          <a:bodyPr wrap="square" lIns="0" tIns="0" rIns="0" bIns="0" rtlCol="0" anchor="t"/>
-          <a:lstStyle/>
-          <a:p>
-            <a:pPr indent="0" marL="0">
-              <a:buNone/>
-            </a:pPr>
-            <a:r>
-              <a:rPr lang="en-US" sz="2000" b="1" dirty="0">
-                <a:solidFill>
-                  <a:schemeClr val="accent1"/>
-                </a:solidFill>
-              </a:rPr>
-              <a:t>Augmentation-ready</a:t>
-            </a:r>
-            <a:endParaRPr lang="en-US" sz="2000" dirty="0"/>
-          </a:p>
-        </p:txBody>
-      </p:sp>
-      <p:sp>
-        <p:nvSpPr>
-          <p:cNvPr id="24" name="Text 22"/>
-          <p:cNvSpPr txBox="1"/>
-          <p:nvPr/>
-        </p:nvSpPr>
-        <p:spPr>
-          <a:xfrm>
-            <a:off x="9198864" y="2788920"/>
-            <a:ext cx="2194560" cy="731520"/>
-          </a:xfrm>
-          <a:prstGeom prst="rect">
-            <a:avLst/>
-          </a:prstGeom>
-          <a:noFill/>
-          <a:ln/>
-        </p:spPr>
-        <p:txBody>
-          <a:bodyPr wrap="square" lIns="0" tIns="0" rIns="0" bIns="0" rtlCol="0" anchor="t"/>
-          <a:lstStyle/>
-          <a:p>
-            <a:pPr indent="0" marL="0">
-              <a:buNone/>
+          <a:p>
+            <a:pPr marL="342900" indent="-342900">
+              <a:spcAft>
+                <a:spcPts val="600"/>
+              </a:spcAft>
+              <a:buSzPct val="100000"/>
+              <a:buChar char="•"/>
             </a:pPr>
             <a:r>
               <a:rPr lang="en-US" sz="1500" dirty="0">
@@ -9454,115 +9567,25 @@
                   <a:schemeClr val="bg1"/>
                 </a:solidFill>
               </a:rPr>
-              <a:t>+ power, data, POD (OSAN)</a:t>
+              <a:t>No hardware data; costs and noise are assumptions</a:t>
             </a:r>
             <a:endParaRPr lang="en-US" sz="1500" dirty="0"/>
           </a:p>
-        </p:txBody>
-      </p:sp>
-      <p:sp>
-        <p:nvSpPr>
-          <p:cNvPr id="25" name="Text 23"/>
-          <p:cNvSpPr txBox="1"/>
-          <p:nvPr/>
-        </p:nvSpPr>
-        <p:spPr>
-          <a:xfrm>
-            <a:off x="9198864" y="3611880"/>
-            <a:ext cx="2194560" cy="457200"/>
-          </a:xfrm>
-          <a:prstGeom prst="rect">
-            <a:avLst/>
-          </a:prstGeom>
-          <a:noFill/>
-          <a:ln/>
-        </p:spPr>
-        <p:txBody>
-          <a:bodyPr wrap="square" lIns="0" tIns="0" rIns="0" bIns="0" rtlCol="0" anchor="t"/>
-          <a:lstStyle/>
-          <a:p>
-            <a:pPr indent="0" marL="0">
-              <a:buNone/>
-            </a:pPr>
-            <a:r>
-              <a:rPr lang="en-US" sz="2400" b="1" dirty="0">
-                <a:solidFill>
-                  <a:schemeClr val="accent2"/>
-                </a:solidFill>
-              </a:rPr>
-              <a:t>EUR 6.68 M</a:t>
-            </a:r>
-            <a:endParaRPr lang="en-US" sz="2400" dirty="0"/>
-          </a:p>
-        </p:txBody>
-      </p:sp>
-      <p:sp>
-        <p:nvSpPr>
-          <p:cNvPr id="26" name="Text 24"/>
-          <p:cNvSpPr txBox="1"/>
-          <p:nvPr/>
-        </p:nvSpPr>
-        <p:spPr>
-          <a:xfrm>
-            <a:off x="9198864" y="4160520"/>
-            <a:ext cx="2194560" cy="640080"/>
-          </a:xfrm>
-          <a:prstGeom prst="rect">
-            <a:avLst/>
-          </a:prstGeom>
-          <a:noFill/>
-          <a:ln/>
-        </p:spPr>
-        <p:txBody>
-          <a:bodyPr wrap="square" lIns="0" tIns="0" rIns="0" bIns="0" rtlCol="0" anchor="t"/>
-          <a:lstStyle/>
-          <a:p>
-            <a:pPr indent="0" marL="0">
-              <a:buNone/>
-            </a:pPr>
-            <a:r>
-              <a:rPr lang="en-US" sz="1400" dirty="0">
-                <a:solidFill>
-                  <a:schemeClr val="bg2"/>
-                </a:solidFill>
-              </a:rPr>
-              <a:t>enables: Upgrade POD</a:t>
-            </a:r>
-            <a:endParaRPr lang="en-US" sz="1400" dirty="0"/>
-          </a:p>
-        </p:txBody>
-      </p:sp>
-      <p:sp>
-        <p:nvSpPr>
-          <p:cNvPr id="27" name="Text 25"/>
-          <p:cNvSpPr txBox="1"/>
-          <p:nvPr/>
-        </p:nvSpPr>
-        <p:spPr>
-          <a:xfrm>
-            <a:off x="548640" y="5257800"/>
-            <a:ext cx="11091672" cy="822960"/>
-          </a:xfrm>
-          <a:prstGeom prst="rect">
-            <a:avLst/>
-          </a:prstGeom>
-          <a:noFill/>
-          <a:ln/>
-        </p:spPr>
-        <p:txBody>
-          <a:bodyPr wrap="square" lIns="0" tIns="0" rIns="0" bIns="0" rtlCol="0" anchor="t"/>
-          <a:lstStyle/>
-          <a:p>
-            <a:pPr indent="0" marL="0">
-              <a:buNone/>
+          <a:p>
+            <a:pPr marL="342900" indent="-342900">
+              <a:spcAft>
+                <a:spcPts val="600"/>
+              </a:spcAft>
+              <a:buSzPct val="100000"/>
+              <a:buChar char="•"/>
             </a:pPr>
             <a:r>
               <a:rPr lang="en-US" sz="1500" dirty="0">
                 <a:solidFill>
-                  <a:schemeClr val="bg2"/>
-                </a:solidFill>
-              </a:rPr>
-              <a:t>Buyers (hypotheses): satellite makers and operators for the kit; servicers for more successful visits per vehicle; insurers and regulators for reproducible evidence. Costs per unit are assumptions: unit price, mass, launch and shared development.</a:t>
+                  <a:schemeClr val="bg1"/>
+                </a:solidFill>
+              </a:rPr>
+              <a:t>Authentication is a simulation token</a:t>
             </a:r>
             <a:endParaRPr lang="en-US" sz="1500" dirty="0"/>
           </a:p>
@@ -9670,6 +9693,978 @@
                   <a:schemeClr val="bg1"/>
                 </a:solidFill>
               </a:rPr>
+              <a:t>A tiered kit that makers add at build time</a:t>
+            </a:r>
+            <a:endParaRPr lang="en-US" sz="3200" dirty="0"/>
+          </a:p>
+        </p:txBody>
+      </p:sp>
+      <p:sp>
+        <p:nvSpPr>
+          <p:cNvPr id="3" name="Tier 1"/>
+          <p:cNvSpPr/>
+          <p:nvPr/>
+        </p:nvSpPr>
+        <p:spPr>
+          <a:xfrm>
+            <a:off x="548640" y="1463040"/>
+            <a:ext cx="2651760" cy="3566160"/>
+          </a:xfrm>
+          <a:prstGeom prst="roundRect">
+            <a:avLst>
+              <a:gd name="adj" fmla="val 2759"/>
+            </a:avLst>
+          </a:prstGeom>
+          <a:solidFill>
+            <a:schemeClr val="tx2"/>
+          </a:solidFill>
+          <a:ln w="12700">
+            <a:solidFill>
+              <a:schemeClr val="accent6"/>
+            </a:solidFill>
+            <a:prstDash val="solid"/>
+          </a:ln>
+        </p:spPr>
+      </p:sp>
+      <p:sp>
+        <p:nvSpPr>
+          <p:cNvPr id="4" name="Text 2"/>
+          <p:cNvSpPr txBox="1"/>
+          <p:nvPr/>
+        </p:nvSpPr>
+        <p:spPr>
+          <a:xfrm>
+            <a:off x="777240" y="1645920"/>
+            <a:ext cx="2194560" cy="365760"/>
+          </a:xfrm>
+          <a:prstGeom prst="rect">
+            <a:avLst/>
+          </a:prstGeom>
+          <a:noFill/>
+          <a:ln/>
+        </p:spPr>
+        <p:txBody>
+          <a:bodyPr wrap="square" lIns="0" tIns="0" rIns="0" bIns="0" rtlCol="0" anchor="t"/>
+          <a:lstStyle/>
+          <a:p>
+            <a:pPr indent="0" marL="0">
+              <a:buNone/>
+            </a:pPr>
+            <a:r>
+              <a:rPr lang="en-US" sz="1400" dirty="0">
+                <a:solidFill>
+                  <a:schemeClr val="bg2"/>
+                </a:solidFill>
+              </a:rPr>
+              <a:t>Tier 1</a:t>
+            </a:r>
+            <a:endParaRPr lang="en-US" sz="1400" dirty="0"/>
+          </a:p>
+        </p:txBody>
+      </p:sp>
+      <p:sp>
+        <p:nvSpPr>
+          <p:cNvPr id="5" name="Text 3"/>
+          <p:cNvSpPr txBox="1"/>
+          <p:nvPr/>
+        </p:nvSpPr>
+        <p:spPr>
+          <a:xfrm>
+            <a:off x="777240" y="2011680"/>
+            <a:ext cx="2194560" cy="731520"/>
+          </a:xfrm>
+          <a:prstGeom prst="rect">
+            <a:avLst/>
+          </a:prstGeom>
+          <a:noFill/>
+          <a:ln/>
+        </p:spPr>
+        <p:txBody>
+          <a:bodyPr wrap="square" lIns="0" tIns="0" rIns="0" bIns="0" rtlCol="0" anchor="t"/>
+          <a:lstStyle/>
+          <a:p>
+            <a:pPr indent="0" marL="0">
+              <a:buNone/>
+            </a:pPr>
+            <a:r>
+              <a:rPr lang="en-US" sz="2000" b="1" dirty="0">
+                <a:solidFill>
+                  <a:schemeClr val="accent1"/>
+                </a:solidFill>
+              </a:rPr>
+              <a:t>EOL-ready</a:t>
+            </a:r>
+            <a:endParaRPr lang="en-US" sz="2000" dirty="0"/>
+          </a:p>
+        </p:txBody>
+      </p:sp>
+      <p:sp>
+        <p:nvSpPr>
+          <p:cNvPr id="6" name="Text 4"/>
+          <p:cNvSpPr txBox="1"/>
+          <p:nvPr/>
+        </p:nvSpPr>
+        <p:spPr>
+          <a:xfrm>
+            <a:off x="777240" y="2788920"/>
+            <a:ext cx="2194560" cy="731520"/>
+          </a:xfrm>
+          <a:prstGeom prst="rect">
+            <a:avLst/>
+          </a:prstGeom>
+          <a:noFill/>
+          <a:ln/>
+        </p:spPr>
+        <p:txBody>
+          <a:bodyPr wrap="square" lIns="0" tIns="0" rIns="0" bIns="0" rtlCol="0" anchor="t"/>
+          <a:lstStyle/>
+          <a:p>
+            <a:pPr indent="0" marL="0">
+              <a:buNone/>
+            </a:pPr>
+            <a:r>
+              <a:rPr lang="en-US" sz="1500" dirty="0">
+                <a:solidFill>
+                  <a:schemeClr val="bg1"/>
+                </a:solidFill>
+              </a:rPr>
+              <a:t>Capture fixture + markers</a:t>
+            </a:r>
+            <a:endParaRPr lang="en-US" sz="1500" dirty="0"/>
+          </a:p>
+        </p:txBody>
+      </p:sp>
+      <p:sp>
+        <p:nvSpPr>
+          <p:cNvPr id="7" name="Text 5"/>
+          <p:cNvSpPr txBox="1"/>
+          <p:nvPr/>
+        </p:nvSpPr>
+        <p:spPr>
+          <a:xfrm>
+            <a:off x="777240" y="3611880"/>
+            <a:ext cx="2194560" cy="457200"/>
+          </a:xfrm>
+          <a:prstGeom prst="rect">
+            <a:avLst/>
+          </a:prstGeom>
+          <a:noFill/>
+          <a:ln/>
+        </p:spPr>
+        <p:txBody>
+          <a:bodyPr wrap="square" lIns="0" tIns="0" rIns="0" bIns="0" rtlCol="0" anchor="t"/>
+          <a:lstStyle/>
+          <a:p>
+            <a:pPr indent="0" marL="0">
+              <a:buNone/>
+            </a:pPr>
+            <a:r>
+              <a:rPr lang="en-US" sz="2400" b="1" dirty="0">
+                <a:solidFill>
+                  <a:schemeClr val="accent2"/>
+                </a:solidFill>
+              </a:rPr>
+              <a:t>EUR 0.36 M</a:t>
+            </a:r>
+            <a:endParaRPr lang="en-US" sz="2400" dirty="0"/>
+          </a:p>
+        </p:txBody>
+      </p:sp>
+      <p:sp>
+        <p:nvSpPr>
+          <p:cNvPr id="8" name="Text 6"/>
+          <p:cNvSpPr txBox="1"/>
+          <p:nvPr/>
+        </p:nvSpPr>
+        <p:spPr>
+          <a:xfrm>
+            <a:off x="777240" y="4160520"/>
+            <a:ext cx="2194560" cy="640080"/>
+          </a:xfrm>
+          <a:prstGeom prst="rect">
+            <a:avLst/>
+          </a:prstGeom>
+          <a:noFill/>
+          <a:ln/>
+        </p:spPr>
+        <p:txBody>
+          <a:bodyPr wrap="square" lIns="0" tIns="0" rIns="0" bIns="0" rtlCol="0" anchor="t"/>
+          <a:lstStyle/>
+          <a:p>
+            <a:pPr indent="0" marL="0">
+              <a:buNone/>
+            </a:pPr>
+            <a:r>
+              <a:rPr lang="en-US" sz="1400" dirty="0">
+                <a:solidFill>
+                  <a:schemeClr val="bg2"/>
+                </a:solidFill>
+              </a:rPr>
+              <a:t>enables: Removal</a:t>
+            </a:r>
+            <a:endParaRPr lang="en-US" sz="1400" dirty="0"/>
+          </a:p>
+        </p:txBody>
+      </p:sp>
+      <p:sp>
+        <p:nvSpPr>
+          <p:cNvPr id="9" name="Tier 2"/>
+          <p:cNvSpPr/>
+          <p:nvPr/>
+        </p:nvSpPr>
+        <p:spPr>
+          <a:xfrm>
+            <a:off x="3355848" y="1463040"/>
+            <a:ext cx="2651760" cy="3566160"/>
+          </a:xfrm>
+          <a:prstGeom prst="roundRect">
+            <a:avLst>
+              <a:gd name="adj" fmla="val 2759"/>
+            </a:avLst>
+          </a:prstGeom>
+          <a:solidFill>
+            <a:schemeClr val="tx2"/>
+          </a:solidFill>
+          <a:ln w="12700">
+            <a:solidFill>
+              <a:schemeClr val="accent6"/>
+            </a:solidFill>
+            <a:prstDash val="solid"/>
+          </a:ln>
+        </p:spPr>
+      </p:sp>
+      <p:sp>
+        <p:nvSpPr>
+          <p:cNvPr id="10" name="Text 8"/>
+          <p:cNvSpPr txBox="1"/>
+          <p:nvPr/>
+        </p:nvSpPr>
+        <p:spPr>
+          <a:xfrm>
+            <a:off x="3584448" y="1645920"/>
+            <a:ext cx="2194560" cy="365760"/>
+          </a:xfrm>
+          <a:prstGeom prst="rect">
+            <a:avLst/>
+          </a:prstGeom>
+          <a:noFill/>
+          <a:ln/>
+        </p:spPr>
+        <p:txBody>
+          <a:bodyPr wrap="square" lIns="0" tIns="0" rIns="0" bIns="0" rtlCol="0" anchor="t"/>
+          <a:lstStyle/>
+          <a:p>
+            <a:pPr indent="0" marL="0">
+              <a:buNone/>
+            </a:pPr>
+            <a:r>
+              <a:rPr lang="en-US" sz="1400" dirty="0">
+                <a:solidFill>
+                  <a:schemeClr val="bg2"/>
+                </a:solidFill>
+              </a:rPr>
+              <a:t>Tier 2</a:t>
+            </a:r>
+            <a:endParaRPr lang="en-US" sz="1400" dirty="0"/>
+          </a:p>
+        </p:txBody>
+      </p:sp>
+      <p:sp>
+        <p:nvSpPr>
+          <p:cNvPr id="11" name="Text 9"/>
+          <p:cNvSpPr txBox="1"/>
+          <p:nvPr/>
+        </p:nvSpPr>
+        <p:spPr>
+          <a:xfrm>
+            <a:off x="3584448" y="2011680"/>
+            <a:ext cx="2194560" cy="731520"/>
+          </a:xfrm>
+          <a:prstGeom prst="rect">
+            <a:avLst/>
+          </a:prstGeom>
+          <a:noFill/>
+          <a:ln/>
+        </p:spPr>
+        <p:txBody>
+          <a:bodyPr wrap="square" lIns="0" tIns="0" rIns="0" bIns="0" rtlCol="0" anchor="t"/>
+          <a:lstStyle/>
+          <a:p>
+            <a:pPr indent="0" marL="0">
+              <a:buNone/>
+            </a:pPr>
+            <a:r>
+              <a:rPr lang="en-US" sz="2000" b="1" dirty="0">
+                <a:solidFill>
+                  <a:schemeClr val="accent1"/>
+                </a:solidFill>
+              </a:rPr>
+              <a:t>Service-ready</a:t>
+            </a:r>
+            <a:endParaRPr lang="en-US" sz="2000" dirty="0"/>
+          </a:p>
+        </p:txBody>
+      </p:sp>
+      <p:sp>
+        <p:nvSpPr>
+          <p:cNvPr id="12" name="Text 10"/>
+          <p:cNvSpPr txBox="1"/>
+          <p:nvPr/>
+        </p:nvSpPr>
+        <p:spPr>
+          <a:xfrm>
+            <a:off x="3584448" y="2788920"/>
+            <a:ext cx="2194560" cy="731520"/>
+          </a:xfrm>
+          <a:prstGeom prst="rect">
+            <a:avLst/>
+          </a:prstGeom>
+          <a:noFill/>
+          <a:ln/>
+        </p:spPr>
+        <p:txBody>
+          <a:bodyPr wrap="square" lIns="0" tIns="0" rIns="0" bIns="0" rtlCol="0" anchor="t"/>
+          <a:lstStyle/>
+          <a:p>
+            <a:pPr indent="0" marL="0">
+              <a:buNone/>
+            </a:pPr>
+            <a:r>
+              <a:rPr lang="en-US" sz="1500" dirty="0">
+                <a:solidFill>
+                  <a:schemeClr val="bg1"/>
+                </a:solidFill>
+              </a:rPr>
+              <a:t>+ IOS mode + beacon</a:t>
+            </a:r>
+            <a:endParaRPr lang="en-US" sz="1500" dirty="0"/>
+          </a:p>
+        </p:txBody>
+      </p:sp>
+      <p:sp>
+        <p:nvSpPr>
+          <p:cNvPr id="13" name="Text 11"/>
+          <p:cNvSpPr txBox="1"/>
+          <p:nvPr/>
+        </p:nvSpPr>
+        <p:spPr>
+          <a:xfrm>
+            <a:off x="3584448" y="3611880"/>
+            <a:ext cx="2194560" cy="457200"/>
+          </a:xfrm>
+          <a:prstGeom prst="rect">
+            <a:avLst/>
+          </a:prstGeom>
+          <a:noFill/>
+          <a:ln/>
+        </p:spPr>
+        <p:txBody>
+          <a:bodyPr wrap="square" lIns="0" tIns="0" rIns="0" bIns="0" rtlCol="0" anchor="t"/>
+          <a:lstStyle/>
+          <a:p>
+            <a:pPr indent="0" marL="0">
+              <a:buNone/>
+            </a:pPr>
+            <a:r>
+              <a:rPr lang="en-US" sz="2400" b="1" dirty="0">
+                <a:solidFill>
+                  <a:schemeClr val="accent2"/>
+                </a:solidFill>
+              </a:rPr>
+              <a:t>EUR 1.46 M</a:t>
+            </a:r>
+            <a:endParaRPr lang="en-US" sz="2400" dirty="0"/>
+          </a:p>
+        </p:txBody>
+      </p:sp>
+      <p:sp>
+        <p:nvSpPr>
+          <p:cNvPr id="14" name="Text 12"/>
+          <p:cNvSpPr txBox="1"/>
+          <p:nvPr/>
+        </p:nvSpPr>
+        <p:spPr>
+          <a:xfrm>
+            <a:off x="3584448" y="4160520"/>
+            <a:ext cx="2194560" cy="640080"/>
+          </a:xfrm>
+          <a:prstGeom prst="rect">
+            <a:avLst/>
+          </a:prstGeom>
+          <a:noFill/>
+          <a:ln/>
+        </p:spPr>
+        <p:txBody>
+          <a:bodyPr wrap="square" lIns="0" tIns="0" rIns="0" bIns="0" rtlCol="0" anchor="t"/>
+          <a:lstStyle/>
+          <a:p>
+            <a:pPr indent="0" marL="0">
+              <a:buNone/>
+            </a:pPr>
+            <a:r>
+              <a:rPr lang="en-US" sz="1400" dirty="0">
+                <a:solidFill>
+                  <a:schemeClr val="bg2"/>
+                </a:solidFill>
+              </a:rPr>
+              <a:t>enables: Attached propulsion</a:t>
+            </a:r>
+            <a:endParaRPr lang="en-US" sz="1400" dirty="0"/>
+          </a:p>
+        </p:txBody>
+      </p:sp>
+      <p:sp>
+        <p:nvSpPr>
+          <p:cNvPr id="15" name="Tier 3"/>
+          <p:cNvSpPr/>
+          <p:nvPr/>
+        </p:nvSpPr>
+        <p:spPr>
+          <a:xfrm>
+            <a:off x="6163056" y="1463040"/>
+            <a:ext cx="2651760" cy="3566160"/>
+          </a:xfrm>
+          <a:prstGeom prst="roundRect">
+            <a:avLst>
+              <a:gd name="adj" fmla="val 2759"/>
+            </a:avLst>
+          </a:prstGeom>
+          <a:solidFill>
+            <a:schemeClr val="tx2"/>
+          </a:solidFill>
+          <a:ln w="12700">
+            <a:solidFill>
+              <a:schemeClr val="accent6"/>
+            </a:solidFill>
+            <a:prstDash val="solid"/>
+          </a:ln>
+        </p:spPr>
+      </p:sp>
+      <p:sp>
+        <p:nvSpPr>
+          <p:cNvPr id="16" name="Text 14"/>
+          <p:cNvSpPr txBox="1"/>
+          <p:nvPr/>
+        </p:nvSpPr>
+        <p:spPr>
+          <a:xfrm>
+            <a:off x="6391656" y="1645920"/>
+            <a:ext cx="2194560" cy="365760"/>
+          </a:xfrm>
+          <a:prstGeom prst="rect">
+            <a:avLst/>
+          </a:prstGeom>
+          <a:noFill/>
+          <a:ln/>
+        </p:spPr>
+        <p:txBody>
+          <a:bodyPr wrap="square" lIns="0" tIns="0" rIns="0" bIns="0" rtlCol="0" anchor="t"/>
+          <a:lstStyle/>
+          <a:p>
+            <a:pPr indent="0" marL="0">
+              <a:buNone/>
+            </a:pPr>
+            <a:r>
+              <a:rPr lang="en-US" sz="1400" dirty="0">
+                <a:solidFill>
+                  <a:schemeClr val="bg2"/>
+                </a:solidFill>
+              </a:rPr>
+              <a:t>Tier 3</a:t>
+            </a:r>
+            <a:endParaRPr lang="en-US" sz="1400" dirty="0"/>
+          </a:p>
+        </p:txBody>
+      </p:sp>
+      <p:sp>
+        <p:nvSpPr>
+          <p:cNvPr id="17" name="Text 15"/>
+          <p:cNvSpPr txBox="1"/>
+          <p:nvPr/>
+        </p:nvSpPr>
+        <p:spPr>
+          <a:xfrm>
+            <a:off x="6391656" y="2011680"/>
+            <a:ext cx="2194560" cy="731520"/>
+          </a:xfrm>
+          <a:prstGeom prst="rect">
+            <a:avLst/>
+          </a:prstGeom>
+          <a:noFill/>
+          <a:ln/>
+        </p:spPr>
+        <p:txBody>
+          <a:bodyPr wrap="square" lIns="0" tIns="0" rIns="0" bIns="0" rtlCol="0" anchor="t"/>
+          <a:lstStyle/>
+          <a:p>
+            <a:pPr indent="0" marL="0">
+              <a:buNone/>
+            </a:pPr>
+            <a:r>
+              <a:rPr lang="en-US" sz="2000" b="1" dirty="0">
+                <a:solidFill>
+                  <a:schemeClr val="accent1"/>
+                </a:solidFill>
+              </a:rPr>
+              <a:t>Life-extension-ready</a:t>
+            </a:r>
+            <a:endParaRPr lang="en-US" sz="2000" dirty="0"/>
+          </a:p>
+        </p:txBody>
+      </p:sp>
+      <p:sp>
+        <p:nvSpPr>
+          <p:cNvPr id="18" name="Text 16"/>
+          <p:cNvSpPr txBox="1"/>
+          <p:nvPr/>
+        </p:nvSpPr>
+        <p:spPr>
+          <a:xfrm>
+            <a:off x="6391656" y="2788920"/>
+            <a:ext cx="2194560" cy="731520"/>
+          </a:xfrm>
+          <a:prstGeom prst="rect">
+            <a:avLst/>
+          </a:prstGeom>
+          <a:noFill/>
+          <a:ln/>
+        </p:spPr>
+        <p:txBody>
+          <a:bodyPr wrap="square" lIns="0" tIns="0" rIns="0" bIns="0" rtlCol="0" anchor="t"/>
+          <a:lstStyle/>
+          <a:p>
+            <a:pPr indent="0" marL="0">
+              <a:buNone/>
+            </a:pPr>
+            <a:r>
+              <a:rPr lang="en-US" sz="1500" dirty="0">
+                <a:solidFill>
+                  <a:schemeClr val="bg1"/>
+                </a:solidFill>
+              </a:rPr>
+              <a:t>+ refuelling port</a:t>
+            </a:r>
+            <a:endParaRPr lang="en-US" sz="1500" dirty="0"/>
+          </a:p>
+        </p:txBody>
+      </p:sp>
+      <p:sp>
+        <p:nvSpPr>
+          <p:cNvPr id="19" name="Text 17"/>
+          <p:cNvSpPr txBox="1"/>
+          <p:nvPr/>
+        </p:nvSpPr>
+        <p:spPr>
+          <a:xfrm>
+            <a:off x="6391656" y="3611880"/>
+            <a:ext cx="2194560" cy="457200"/>
+          </a:xfrm>
+          <a:prstGeom prst="rect">
+            <a:avLst/>
+          </a:prstGeom>
+          <a:noFill/>
+          <a:ln/>
+        </p:spPr>
+        <p:txBody>
+          <a:bodyPr wrap="square" lIns="0" tIns="0" rIns="0" bIns="0" rtlCol="0" anchor="t"/>
+          <a:lstStyle/>
+          <a:p>
+            <a:pPr indent="0" marL="0">
+              <a:buNone/>
+            </a:pPr>
+            <a:r>
+              <a:rPr lang="en-US" sz="2400" b="1" dirty="0">
+                <a:solidFill>
+                  <a:schemeClr val="accent2"/>
+                </a:solidFill>
+              </a:rPr>
+              <a:t>EUR 2.18 M</a:t>
+            </a:r>
+            <a:endParaRPr lang="en-US" sz="2400" dirty="0"/>
+          </a:p>
+        </p:txBody>
+      </p:sp>
+      <p:sp>
+        <p:nvSpPr>
+          <p:cNvPr id="20" name="Text 18"/>
+          <p:cNvSpPr txBox="1"/>
+          <p:nvPr/>
+        </p:nvSpPr>
+        <p:spPr>
+          <a:xfrm>
+            <a:off x="6391656" y="4160520"/>
+            <a:ext cx="2194560" cy="640080"/>
+          </a:xfrm>
+          <a:prstGeom prst="rect">
+            <a:avLst/>
+          </a:prstGeom>
+          <a:noFill/>
+          <a:ln/>
+        </p:spPr>
+        <p:txBody>
+          <a:bodyPr wrap="square" lIns="0" tIns="0" rIns="0" bIns="0" rtlCol="0" anchor="t"/>
+          <a:lstStyle/>
+          <a:p>
+            <a:pPr indent="0" marL="0">
+              <a:buNone/>
+            </a:pPr>
+            <a:r>
+              <a:rPr lang="en-US" sz="1400" dirty="0">
+                <a:solidFill>
+                  <a:schemeClr val="bg2"/>
+                </a:solidFill>
+              </a:rPr>
+              <a:t>enables: Refuel and release</a:t>
+            </a:r>
+            <a:endParaRPr lang="en-US" sz="1400" dirty="0"/>
+          </a:p>
+        </p:txBody>
+      </p:sp>
+      <p:sp>
+        <p:nvSpPr>
+          <p:cNvPr id="21" name="Tier 4"/>
+          <p:cNvSpPr/>
+          <p:nvPr/>
+        </p:nvSpPr>
+        <p:spPr>
+          <a:xfrm>
+            <a:off x="8970264" y="1463040"/>
+            <a:ext cx="2651760" cy="3566160"/>
+          </a:xfrm>
+          <a:prstGeom prst="roundRect">
+            <a:avLst>
+              <a:gd name="adj" fmla="val 2759"/>
+            </a:avLst>
+          </a:prstGeom>
+          <a:solidFill>
+            <a:schemeClr val="tx2"/>
+          </a:solidFill>
+          <a:ln w="12700">
+            <a:solidFill>
+              <a:schemeClr val="accent6"/>
+            </a:solidFill>
+            <a:prstDash val="solid"/>
+          </a:ln>
+        </p:spPr>
+      </p:sp>
+      <p:sp>
+        <p:nvSpPr>
+          <p:cNvPr id="22" name="Text 20"/>
+          <p:cNvSpPr txBox="1"/>
+          <p:nvPr/>
+        </p:nvSpPr>
+        <p:spPr>
+          <a:xfrm>
+            <a:off x="9198864" y="1645920"/>
+            <a:ext cx="2194560" cy="365760"/>
+          </a:xfrm>
+          <a:prstGeom prst="rect">
+            <a:avLst/>
+          </a:prstGeom>
+          <a:noFill/>
+          <a:ln/>
+        </p:spPr>
+        <p:txBody>
+          <a:bodyPr wrap="square" lIns="0" tIns="0" rIns="0" bIns="0" rtlCol="0" anchor="t"/>
+          <a:lstStyle/>
+          <a:p>
+            <a:pPr indent="0" marL="0">
+              <a:buNone/>
+            </a:pPr>
+            <a:r>
+              <a:rPr lang="en-US" sz="1400" dirty="0">
+                <a:solidFill>
+                  <a:schemeClr val="bg2"/>
+                </a:solidFill>
+              </a:rPr>
+              <a:t>Tier 4</a:t>
+            </a:r>
+            <a:endParaRPr lang="en-US" sz="1400" dirty="0"/>
+          </a:p>
+        </p:txBody>
+      </p:sp>
+      <p:sp>
+        <p:nvSpPr>
+          <p:cNvPr id="23" name="Text 21"/>
+          <p:cNvSpPr txBox="1"/>
+          <p:nvPr/>
+        </p:nvSpPr>
+        <p:spPr>
+          <a:xfrm>
+            <a:off x="9198864" y="2011680"/>
+            <a:ext cx="2194560" cy="731520"/>
+          </a:xfrm>
+          <a:prstGeom prst="rect">
+            <a:avLst/>
+          </a:prstGeom>
+          <a:noFill/>
+          <a:ln/>
+        </p:spPr>
+        <p:txBody>
+          <a:bodyPr wrap="square" lIns="0" tIns="0" rIns="0" bIns="0" rtlCol="0" anchor="t"/>
+          <a:lstStyle/>
+          <a:p>
+            <a:pPr indent="0" marL="0">
+              <a:buNone/>
+            </a:pPr>
+            <a:r>
+              <a:rPr lang="en-US" sz="2000" b="1" dirty="0">
+                <a:solidFill>
+                  <a:schemeClr val="accent1"/>
+                </a:solidFill>
+              </a:rPr>
+              <a:t>Augmentation-ready</a:t>
+            </a:r>
+            <a:endParaRPr lang="en-US" sz="2000" dirty="0"/>
+          </a:p>
+        </p:txBody>
+      </p:sp>
+      <p:sp>
+        <p:nvSpPr>
+          <p:cNvPr id="24" name="Text 22"/>
+          <p:cNvSpPr txBox="1"/>
+          <p:nvPr/>
+        </p:nvSpPr>
+        <p:spPr>
+          <a:xfrm>
+            <a:off x="9198864" y="2788920"/>
+            <a:ext cx="2194560" cy="731520"/>
+          </a:xfrm>
+          <a:prstGeom prst="rect">
+            <a:avLst/>
+          </a:prstGeom>
+          <a:noFill/>
+          <a:ln/>
+        </p:spPr>
+        <p:txBody>
+          <a:bodyPr wrap="square" lIns="0" tIns="0" rIns="0" bIns="0" rtlCol="0" anchor="t"/>
+          <a:lstStyle/>
+          <a:p>
+            <a:pPr indent="0" marL="0">
+              <a:buNone/>
+            </a:pPr>
+            <a:r>
+              <a:rPr lang="en-US" sz="1500" dirty="0">
+                <a:solidFill>
+                  <a:schemeClr val="bg1"/>
+                </a:solidFill>
+              </a:rPr>
+              <a:t>+ power, data, POD (OSAN)</a:t>
+            </a:r>
+            <a:endParaRPr lang="en-US" sz="1500" dirty="0"/>
+          </a:p>
+        </p:txBody>
+      </p:sp>
+      <p:sp>
+        <p:nvSpPr>
+          <p:cNvPr id="25" name="Text 23"/>
+          <p:cNvSpPr txBox="1"/>
+          <p:nvPr/>
+        </p:nvSpPr>
+        <p:spPr>
+          <a:xfrm>
+            <a:off x="9198864" y="3611880"/>
+            <a:ext cx="2194560" cy="457200"/>
+          </a:xfrm>
+          <a:prstGeom prst="rect">
+            <a:avLst/>
+          </a:prstGeom>
+          <a:noFill/>
+          <a:ln/>
+        </p:spPr>
+        <p:txBody>
+          <a:bodyPr wrap="square" lIns="0" tIns="0" rIns="0" bIns="0" rtlCol="0" anchor="t"/>
+          <a:lstStyle/>
+          <a:p>
+            <a:pPr indent="0" marL="0">
+              <a:buNone/>
+            </a:pPr>
+            <a:r>
+              <a:rPr lang="en-US" sz="2400" b="1" dirty="0">
+                <a:solidFill>
+                  <a:schemeClr val="accent2"/>
+                </a:solidFill>
+              </a:rPr>
+              <a:t>EUR 6.68 M</a:t>
+            </a:r>
+            <a:endParaRPr lang="en-US" sz="2400" dirty="0"/>
+          </a:p>
+        </p:txBody>
+      </p:sp>
+      <p:sp>
+        <p:nvSpPr>
+          <p:cNvPr id="26" name="Text 24"/>
+          <p:cNvSpPr txBox="1"/>
+          <p:nvPr/>
+        </p:nvSpPr>
+        <p:spPr>
+          <a:xfrm>
+            <a:off x="9198864" y="4160520"/>
+            <a:ext cx="2194560" cy="640080"/>
+          </a:xfrm>
+          <a:prstGeom prst="rect">
+            <a:avLst/>
+          </a:prstGeom>
+          <a:noFill/>
+          <a:ln/>
+        </p:spPr>
+        <p:txBody>
+          <a:bodyPr wrap="square" lIns="0" tIns="0" rIns="0" bIns="0" rtlCol="0" anchor="t"/>
+          <a:lstStyle/>
+          <a:p>
+            <a:pPr indent="0" marL="0">
+              <a:buNone/>
+            </a:pPr>
+            <a:r>
+              <a:rPr lang="en-US" sz="1400" dirty="0">
+                <a:solidFill>
+                  <a:schemeClr val="bg2"/>
+                </a:solidFill>
+              </a:rPr>
+              <a:t>enables: Upgrade POD</a:t>
+            </a:r>
+            <a:endParaRPr lang="en-US" sz="1400" dirty="0"/>
+          </a:p>
+        </p:txBody>
+      </p:sp>
+      <p:sp>
+        <p:nvSpPr>
+          <p:cNvPr id="27" name="Text 25"/>
+          <p:cNvSpPr txBox="1"/>
+          <p:nvPr/>
+        </p:nvSpPr>
+        <p:spPr>
+          <a:xfrm>
+            <a:off x="548640" y="5257800"/>
+            <a:ext cx="11091672" cy="822960"/>
+          </a:xfrm>
+          <a:prstGeom prst="rect">
+            <a:avLst/>
+          </a:prstGeom>
+          <a:noFill/>
+          <a:ln/>
+        </p:spPr>
+        <p:txBody>
+          <a:bodyPr wrap="square" lIns="0" tIns="0" rIns="0" bIns="0" rtlCol="0" anchor="t"/>
+          <a:lstStyle/>
+          <a:p>
+            <a:pPr indent="0" marL="0">
+              <a:buNone/>
+            </a:pPr>
+            <a:r>
+              <a:rPr lang="en-US" sz="1500" dirty="0">
+                <a:solidFill>
+                  <a:schemeClr val="bg2"/>
+                </a:solidFill>
+              </a:rPr>
+              <a:t>Buyers (hypotheses): satellite makers and operators for the kit; servicers for more successful visits per vehicle; insurers and regulators for reproducible evidence. Costs per unit are assumptions: unit price, mass, launch and shared development.</a:t>
+            </a:r>
+            <a:endParaRPr lang="en-US" sz="1500" dirty="0"/>
+          </a:p>
+        </p:txBody>
+      </p:sp>
+      <p:sp>
+        <p:nvSpPr>
+          <p:cNvPr id="25" name="Slide Number Placeholder 0"/>
+          <p:cNvSpPr>
+            <a:spLocks noGrp="1"/>
+          </p:cNvSpPr>
+          <p:nvPr>
+            <p:ph type="sldNum" sz="quarter" idx="4294967295"/>
+          </p:nvPr>
+        </p:nvSpPr>
+        <p:spPr>
+          <a:xfrm>
+            <a:off x="11183112" y="6446520"/>
+            <a:ext cx="548640" cy="274320"/>
+          </a:xfrm>
+          <a:prstGeom prst="rect">
+            <a:avLst/>
+          </a:prstGeom>
+          <a:extLst>
+            <a:ext uri="{C572A759-6A51-4108-AA02-DFA0A04FC94B}">
+              <ma14:wrappingTextBoxFlag xmlns:ma14="http://schemas.microsoft.com/office/mac/drawingml/2011/main" val="0"/>
+            </a:ext>
+          </a:extLst>
+        </p:spPr>
+        <p:txBody>
+          <a:bodyPr/>
+          <a:lstStyle>
+            <a:lvl1pPr>
+              <a:defRPr sz="1000">
+                <a:solidFill>
+                  <a:schemeClr val="bg2"/>
+                </a:solidFill>
+              </a:defRPr>
+            </a:lvl1pPr>
+          </a:lstStyle>
+          <a:p>
+            <a:pPr algn="r"/>
+            <a:fld id="{F7021451-1387-4CA6-816F-3879F97B5CBC}" type="slidenum">
+              <a:rPr b="0" lang="en-US"/>
+              <a:t>8</a:t>
+            </a:fld>
+            <a:endParaRPr lang="en-US"/>
+          </a:p>
+        </p:txBody>
+      </p:sp>
+    </p:spTree>
+  </p:cSld>
+  <p:clrMapOvr>
+    <a:masterClrMapping/>
+  </p:clrMapOvr>
+</p:sld>
+</file>
+
+<file path=ppt/slides/slide9.xml><?xml version="1.0" encoding="utf-8"?>
+<p:sld xmlns:a="http://schemas.openxmlformats.org/drawingml/2006/main" xmlns:r="http://schemas.openxmlformats.org/officeDocument/2006/relationships" xmlns:p="http://schemas.openxmlformats.org/presentationml/2006/main">
+  <p:cSld name="Slide 9">
+    <p:spTree>
+      <p:nvGrpSpPr>
+        <p:cNvPr id="1" name=""/>
+        <p:cNvGrpSpPr/>
+        <p:nvPr/>
+      </p:nvGrpSpPr>
+      <p:grpSpPr>
+        <a:xfrm>
+          <a:off x="0" y="0"/>
+          <a:ext cx="0" cy="0"/>
+          <a:chOff x="0" y="0"/>
+          <a:chExt cx="0" cy="0"/>
+        </a:xfrm>
+      </p:grpSpPr>
+      <p:sp>
+        <p:nvSpPr>
+          <p:cNvPr id="2" name="Text 1"/>
+          <p:cNvSpPr/>
+          <p:nvPr>
+            <p:ph idx="101" type="title" hasCustomPrompt="1"/>
+          </p:nvPr>
+        </p:nvSpPr>
+        <p:spPr>
+          <a:xfrm>
+            <a:off x="548640" y="365760"/>
+            <a:ext cx="11091672" cy="822960"/>
+          </a:xfrm>
+          <a:prstGeom prst="rect">
+            <a:avLst/>
+          </a:prstGeom>
+          <a:noFill/>
+          <a:ln/>
+        </p:spPr>
+        <p:txBody>
+          <a:bodyPr wrap="square" lIns="0" tIns="0" rIns="0" bIns="0" rtlCol="0" anchor="t"/>
+          <a:lstStyle/>
+          <a:p>
+            <a:pPr algn="l" indent="0" marL="0">
+              <a:buNone/>
+            </a:pPr>
+            <a:r>
+              <a:rPr lang="en-US" sz="3200" b="1" dirty="0">
+                <a:solidFill>
+                  <a:schemeClr val="bg1"/>
+                </a:solidFill>
+              </a:rPr>
               <a:t>Markers repay almost at once; the beacon and IOS need more</a:t>
             </a:r>
             <a:endParaRPr lang="en-US" sz="3200" dirty="0"/>
@@ -9678,7 +10673,7 @@
       </p:sp>
       <p:graphicFrame>
         <p:nvGraphicFramePr>
-          <p:cNvPr id="9" name="Table 0"/>
+          <p:cNvPr id="10" name="Table 0"/>
           <p:cNvGraphicFramePr>
             <a:graphicFrameLocks noGrp="1"/>
           </p:cNvGraphicFramePr>
@@ -11439,482 +12434,6 @@
               <a:t>How often a client degrades enough to need rescue. It drives every break-even. The beacon is likely undervalued: identity, interface and health data carry no value in the simulator.</a:t>
             </a:r>
             <a:endParaRPr lang="en-US" sz="1500" dirty="0"/>
-          </a:p>
-        </p:txBody>
-      </p:sp>
-      <p:sp>
-        <p:nvSpPr>
-          <p:cNvPr id="25" name="Slide Number Placeholder 0"/>
-          <p:cNvSpPr>
-            <a:spLocks noGrp="1"/>
-          </p:cNvSpPr>
-          <p:nvPr>
-            <p:ph type="sldNum" sz="quarter" idx="4294967295"/>
-          </p:nvPr>
-        </p:nvSpPr>
-        <p:spPr>
-          <a:xfrm>
-            <a:off x="11183112" y="6446520"/>
-            <a:ext cx="548640" cy="274320"/>
-          </a:xfrm>
-          <a:prstGeom prst="rect">
-            <a:avLst/>
-          </a:prstGeom>
-          <a:extLst>
-            <a:ext uri="{C572A759-6A51-4108-AA02-DFA0A04FC94B}">
-              <ma14:wrappingTextBoxFlag xmlns:ma14="http://schemas.microsoft.com/office/mac/drawingml/2011/main" val="0"/>
-            </a:ext>
-          </a:extLst>
-        </p:spPr>
-        <p:txBody>
-          <a:bodyPr/>
-          <a:lstStyle>
-            <a:lvl1pPr>
-              <a:defRPr sz="1000">
-                <a:solidFill>
-                  <a:schemeClr val="bg2"/>
-                </a:solidFill>
-              </a:defRPr>
-            </a:lvl1pPr>
-          </a:lstStyle>
-          <a:p>
-            <a:pPr algn="r"/>
-            <a:fld id="{F7021451-1387-4CA6-816F-3879F97B5CBC}" type="slidenum">
-              <a:rPr b="0" lang="en-US"/>
-              <a:t>8</a:t>
-            </a:fld>
-            <a:endParaRPr lang="en-US"/>
-          </a:p>
-        </p:txBody>
-      </p:sp>
-    </p:spTree>
-  </p:cSld>
-  <p:clrMapOvr>
-    <a:masterClrMapping/>
-  </p:clrMapOvr>
-</p:sld>
-</file>
-
-<file path=ppt/slides/slide9.xml><?xml version="1.0" encoding="utf-8"?>
-<p:sld xmlns:a="http://schemas.openxmlformats.org/drawingml/2006/main" xmlns:r="http://schemas.openxmlformats.org/officeDocument/2006/relationships" xmlns:p="http://schemas.openxmlformats.org/presentationml/2006/main">
-  <p:cSld name="Slide 9">
-    <p:spTree>
-      <p:nvGrpSpPr>
-        <p:cNvPr id="1" name=""/>
-        <p:cNvGrpSpPr/>
-        <p:nvPr/>
-      </p:nvGrpSpPr>
-      <p:grpSpPr>
-        <a:xfrm>
-          <a:off x="0" y="0"/>
-          <a:ext cx="0" cy="0"/>
-          <a:chOff x="0" y="0"/>
-          <a:chExt cx="0" cy="0"/>
-        </a:xfrm>
-      </p:grpSpPr>
-      <p:sp>
-        <p:nvSpPr>
-          <p:cNvPr id="2" name="Text 1"/>
-          <p:cNvSpPr/>
-          <p:nvPr>
-            <p:ph idx="101" type="title" hasCustomPrompt="1"/>
-          </p:nvPr>
-        </p:nvSpPr>
-        <p:spPr>
-          <a:xfrm>
-            <a:off x="548640" y="365760"/>
-            <a:ext cx="11091672" cy="822960"/>
-          </a:xfrm>
-          <a:prstGeom prst="rect">
-            <a:avLst/>
-          </a:prstGeom>
-          <a:noFill/>
-          <a:ln/>
-        </p:spPr>
-        <p:txBody>
-          <a:bodyPr wrap="square" lIns="0" tIns="0" rIns="0" bIns="0" rtlCol="0" anchor="t"/>
-          <a:lstStyle/>
-          <a:p>
-            <a:pPr algn="l" indent="0" marL="0">
-              <a:buNone/>
-            </a:pPr>
-            <a:r>
-              <a:rPr lang="en-US" sz="3200" b="1" dirty="0">
-                <a:solidFill>
-                  <a:schemeClr val="bg1"/>
-                </a:solidFill>
-              </a:rPr>
-              <a:t>Others fix the servicer; we specify the client</a:t>
-            </a:r>
-            <a:endParaRPr lang="en-US" sz="3200" dirty="0"/>
-          </a:p>
-        </p:txBody>
-      </p:sp>
-      <p:sp>
-        <p:nvSpPr>
-          <p:cNvPr id="3" name="Competition"/>
-          <p:cNvSpPr/>
-          <p:nvPr/>
-        </p:nvSpPr>
-        <p:spPr>
-          <a:xfrm>
-            <a:off x="548640" y="1463040"/>
-            <a:ext cx="5394960" cy="4206240"/>
-          </a:xfrm>
-          <a:prstGeom prst="roundRect">
-            <a:avLst>
-              <a:gd name="adj" fmla="val 1739"/>
-            </a:avLst>
-          </a:prstGeom>
-          <a:solidFill>
-            <a:schemeClr val="tx2"/>
-          </a:solidFill>
-          <a:ln w="12700">
-            <a:solidFill>
-              <a:schemeClr val="accent6"/>
-            </a:solidFill>
-            <a:prstDash val="solid"/>
-          </a:ln>
-        </p:spPr>
-      </p:sp>
-      <p:sp>
-        <p:nvSpPr>
-          <p:cNvPr id="4" name="Text 2"/>
-          <p:cNvSpPr txBox="1"/>
-          <p:nvPr/>
-        </p:nvSpPr>
-        <p:spPr>
-          <a:xfrm>
-            <a:off x="822960" y="1645920"/>
-            <a:ext cx="4846320" cy="365760"/>
-          </a:xfrm>
-          <a:prstGeom prst="rect">
-            <a:avLst/>
-          </a:prstGeom>
-          <a:noFill/>
-          <a:ln/>
-        </p:spPr>
-        <p:txBody>
-          <a:bodyPr wrap="square" lIns="0" tIns="0" rIns="0" bIns="0" rtlCol="0" anchor="t"/>
-          <a:lstStyle/>
-          <a:p>
-            <a:pPr indent="0" marL="0">
-              <a:buNone/>
-            </a:pPr>
-            <a:r>
-              <a:rPr lang="en-US" sz="2000" b="1" dirty="0">
-                <a:solidFill>
-                  <a:schemeClr val="accent1"/>
-                </a:solidFill>
-              </a:rPr>
-              <a:t>Existing offers [to verify]</a:t>
-            </a:r>
-            <a:endParaRPr lang="en-US" sz="2000" dirty="0"/>
-          </a:p>
-        </p:txBody>
-      </p:sp>
-      <p:sp>
-        <p:nvSpPr>
-          <p:cNvPr id="5" name="Text 3"/>
-          <p:cNvSpPr txBox="1"/>
-          <p:nvPr/>
-        </p:nvSpPr>
-        <p:spPr>
-          <a:xfrm>
-            <a:off x="822960" y="2194560"/>
-            <a:ext cx="4846320" cy="3200400"/>
-          </a:xfrm>
-          <a:prstGeom prst="rect">
-            <a:avLst/>
-          </a:prstGeom>
-          <a:noFill/>
-          <a:ln/>
-        </p:spPr>
-        <p:txBody>
-          <a:bodyPr wrap="square" lIns="0" tIns="0" rIns="0" bIns="0" rtlCol="0" anchor="t"/>
-          <a:lstStyle/>
-          <a:p>
-            <a:pPr marL="342900" indent="-342900">
-              <a:spcAft>
-                <a:spcPts val="800"/>
-              </a:spcAft>
-              <a:buSzPct val="100000"/>
-              <a:buChar char="•"/>
-            </a:pPr>
-            <a:r>
-              <a:rPr lang="en-US" sz="1700" dirty="0">
-                <a:solidFill>
-                  <a:schemeClr val="bg1"/>
-                </a:solidFill>
-              </a:rPr>
-              <a:t>Northrop Grumman MEV and MRV: life extension of unprepared GEO clients</a:t>
-            </a:r>
-            <a:endParaRPr lang="en-US" sz="1700" dirty="0"/>
-          </a:p>
-          <a:p>
-            <a:pPr marL="342900" indent="-342900">
-              <a:spcAft>
-                <a:spcPts val="800"/>
-              </a:spcAft>
-              <a:buSzPct val="100000"/>
-              <a:buChar char="•"/>
-            </a:pPr>
-            <a:r>
-              <a:rPr lang="en-US" sz="1700" dirty="0">
-                <a:solidFill>
-                  <a:schemeClr val="bg1"/>
-                </a:solidFill>
-              </a:rPr>
-              <a:t>Astroscale: removal, inspection, docking plate on client</a:t>
-            </a:r>
-            <a:endParaRPr lang="en-US" sz="1700" dirty="0"/>
-          </a:p>
-          <a:p>
-            <a:pPr marL="342900" indent="-342900">
-              <a:spcAft>
-                <a:spcPts val="800"/>
-              </a:spcAft>
-              <a:buSzPct val="100000"/>
-              <a:buChar char="•"/>
-            </a:pPr>
-            <a:r>
-              <a:rPr lang="en-US" sz="1700" dirty="0">
-                <a:solidFill>
-                  <a:schemeClr val="bg1"/>
-                </a:solidFill>
-              </a:rPr>
-              <a:t>Starfish Space: autonomous docking and inspection</a:t>
-            </a:r>
-            <a:endParaRPr lang="en-US" sz="1700" dirty="0"/>
-          </a:p>
-          <a:p>
-            <a:pPr marL="342900" indent="-342900">
-              <a:spcAft>
-                <a:spcPts val="800"/>
-              </a:spcAft>
-              <a:buSzPct val="100000"/>
-              <a:buChar char="•"/>
-            </a:pPr>
-            <a:r>
-              <a:rPr lang="en-US" sz="1700" dirty="0">
-                <a:solidFill>
-                  <a:schemeClr val="bg1"/>
-                </a:solidFill>
-              </a:rPr>
-              <a:t>ClearSpace: capture of defunct objects</a:t>
-            </a:r>
-            <a:endParaRPr lang="en-US" sz="1700" dirty="0"/>
-          </a:p>
-          <a:p>
-            <a:pPr marL="342900" indent="-342900">
-              <a:spcAft>
-                <a:spcPts val="800"/>
-              </a:spcAft>
-              <a:buSzPct val="100000"/>
-              <a:buChar char="•"/>
-            </a:pPr>
-            <a:r>
-              <a:rPr lang="en-US" sz="1700" dirty="0">
-                <a:solidFill>
-                  <a:schemeClr val="bg1"/>
-                </a:solidFill>
-              </a:rPr>
-              <a:t>Orbit Fab, MDA, Airbus, Thales Alenia, OHB: refuel ports, arms, interfaces</a:t>
-            </a:r>
-            <a:endParaRPr lang="en-US" sz="1700" dirty="0"/>
-          </a:p>
-        </p:txBody>
-      </p:sp>
-      <p:sp>
-        <p:nvSpPr>
-          <p:cNvPr id="6" name="Rules"/>
-          <p:cNvSpPr/>
-          <p:nvPr/>
-        </p:nvSpPr>
-        <p:spPr>
-          <a:xfrm>
-            <a:off x="6217920" y="1463040"/>
-            <a:ext cx="5422392" cy="4206240"/>
-          </a:xfrm>
-          <a:prstGeom prst="roundRect">
-            <a:avLst>
-              <a:gd name="adj" fmla="val 1739"/>
-            </a:avLst>
-          </a:prstGeom>
-          <a:solidFill>
-            <a:schemeClr val="tx2"/>
-          </a:solidFill>
-          <a:ln w="12700">
-            <a:solidFill>
-              <a:schemeClr val="accent6"/>
-            </a:solidFill>
-            <a:prstDash val="solid"/>
-          </a:ln>
-        </p:spPr>
-      </p:sp>
-      <p:sp>
-        <p:nvSpPr>
-          <p:cNvPr id="7" name="Text 5"/>
-          <p:cNvSpPr txBox="1"/>
-          <p:nvPr/>
-        </p:nvSpPr>
-        <p:spPr>
-          <a:xfrm>
-            <a:off x="6492240" y="1645920"/>
-            <a:ext cx="4846320" cy="365760"/>
-          </a:xfrm>
-          <a:prstGeom prst="rect">
-            <a:avLst/>
-          </a:prstGeom>
-          <a:noFill/>
-          <a:ln/>
-        </p:spPr>
-        <p:txBody>
-          <a:bodyPr wrap="square" lIns="0" tIns="0" rIns="0" bIns="0" rtlCol="0" anchor="t"/>
-          <a:lstStyle/>
-          <a:p>
-            <a:pPr indent="0" marL="0">
-              <a:buNone/>
-            </a:pPr>
-            <a:r>
-              <a:rPr lang="en-US" sz="2000" b="1" dirty="0">
-                <a:solidFill>
-                  <a:schemeClr val="accent3"/>
-                </a:solidFill>
-              </a:rPr>
-              <a:t>Rules that shape the design [to verify]</a:t>
-            </a:r>
-            <a:endParaRPr lang="en-US" sz="2000" dirty="0"/>
-          </a:p>
-        </p:txBody>
-      </p:sp>
-      <p:sp>
-        <p:nvSpPr>
-          <p:cNvPr id="8" name="Text 6"/>
-          <p:cNvSpPr txBox="1"/>
-          <p:nvPr/>
-        </p:nvSpPr>
-        <p:spPr>
-          <a:xfrm>
-            <a:off x="6492240" y="2194560"/>
-            <a:ext cx="4846320" cy="3200400"/>
-          </a:xfrm>
-          <a:prstGeom prst="rect">
-            <a:avLst/>
-          </a:prstGeom>
-          <a:noFill/>
-          <a:ln/>
-        </p:spPr>
-        <p:txBody>
-          <a:bodyPr wrap="square" lIns="0" tIns="0" rIns="0" bIns="0" rtlCol="0" anchor="t"/>
-          <a:lstStyle/>
-          <a:p>
-            <a:pPr marL="342900" indent="-342900">
-              <a:spcAft>
-                <a:spcPts val="800"/>
-              </a:spcAft>
-              <a:buSzPct val="100000"/>
-              <a:buChar char="•"/>
-            </a:pPr>
-            <a:r>
-              <a:rPr lang="en-US" sz="1700" dirty="0">
-                <a:solidFill>
-                  <a:schemeClr val="bg1"/>
-                </a:solidFill>
-              </a:rPr>
-              <a:t>ISO 24330 for rendezvous and servicing practice</a:t>
-            </a:r>
-            <a:endParaRPr lang="en-US" sz="1700" dirty="0"/>
-          </a:p>
-          <a:p>
-            <a:pPr marL="342900" indent="-342900">
-              <a:spcAft>
-                <a:spcPts val="800"/>
-              </a:spcAft>
-              <a:buSzPct val="100000"/>
-              <a:buChar char="•"/>
-            </a:pPr>
-            <a:r>
-              <a:rPr lang="en-US" sz="1700" dirty="0">
-                <a:solidFill>
-                  <a:schemeClr val="bg1"/>
-                </a:solidFill>
-              </a:rPr>
-              <a:t>ISO 24113 and IADC for debris and end of life</a:t>
-            </a:r>
-            <a:endParaRPr lang="en-US" sz="1700" dirty="0"/>
-          </a:p>
-          <a:p>
-            <a:pPr marL="342900" indent="-342900">
-              <a:spcAft>
-                <a:spcPts val="800"/>
-              </a:spcAft>
-              <a:buSzPct val="100000"/>
-              <a:buChar char="•"/>
-            </a:pPr>
-            <a:r>
-              <a:rPr lang="en-US" sz="1700" dirty="0">
-                <a:solidFill>
-                  <a:schemeClr val="bg1"/>
-                </a:solidFill>
-              </a:rPr>
-              <a:t>ECSS series for GNC, verification and interfaces</a:t>
-            </a:r>
-            <a:endParaRPr lang="en-US" sz="1700" dirty="0"/>
-          </a:p>
-          <a:p>
-            <a:pPr marL="342900" indent="-342900">
-              <a:spcAft>
-                <a:spcPts val="800"/>
-              </a:spcAft>
-              <a:buSzPct val="100000"/>
-              <a:buChar char="•"/>
-            </a:pPr>
-            <a:r>
-              <a:rPr lang="en-US" sz="1700" dirty="0">
-                <a:solidFill>
-                  <a:schemeClr val="bg1"/>
-                </a:solidFill>
-              </a:rPr>
-              <a:t>NASA-STD-7009 for model credibility</a:t>
-            </a:r>
-            <a:endParaRPr lang="en-US" sz="1700" dirty="0"/>
-          </a:p>
-          <a:p>
-            <a:pPr marL="342900" indent="-342900">
-              <a:spcAft>
-                <a:spcPts val="800"/>
-              </a:spcAft>
-              <a:buSzPct val="100000"/>
-              <a:buChar char="•"/>
-            </a:pPr>
-            <a:r>
-              <a:rPr lang="en-US" sz="1700" dirty="0">
-                <a:solidFill>
-                  <a:schemeClr val="bg1"/>
-                </a:solidFill>
-              </a:rPr>
-              <a:t>ITU and national licensing for the beacon</a:t>
-            </a:r>
-            <a:endParaRPr lang="en-US" sz="1700" dirty="0"/>
-          </a:p>
-          <a:p>
-            <a:pPr marL="342900" indent="-342900">
-              <a:spcAft>
-                <a:spcPts val="800"/>
-              </a:spcAft>
-              <a:buSzPct val="100000"/>
-              <a:buChar char="•"/>
-            </a:pPr>
-            <a:r>
-              <a:rPr lang="en-US" sz="1700" dirty="0">
-                <a:solidFill>
-                  <a:schemeClr val="bg1"/>
-                </a:solidFill>
-              </a:rPr>
-              <a:t>Owner consent and national authorisation; EU Space Act evolving</a:t>
-            </a:r>
-            <a:endParaRPr lang="en-US" sz="1700" dirty="0"/>
           </a:p>
         </p:txBody>
       </p:sp>
